--- a/Energy/Energy_Murders.pptx
+++ b/Energy/Energy_Murders.pptx
@@ -4,6 +4,9 @@
   <p:sldMasterIdLst>
     <p:sldMasterId id="2147483648" r:id="rId1"/>
   </p:sldMasterIdLst>
+  <p:notesMasterIdLst>
+    <p:notesMasterId r:id="rId51"/>
+  </p:notesMasterIdLst>
   <p:sldIdLst>
     <p:sldId id="273" r:id="rId2"/>
     <p:sldId id="323" r:id="rId3"/>
@@ -160,6 +163,2875 @@
 </p:presentation>
 </file>
 
+<file path=ppt/notesMasters/notesMaster1.xml><?xml version="1.0" encoding="utf-8"?>
+<p:notesMaster xmlns:a="http://schemas.openxmlformats.org/drawingml/2006/main" xmlns:r="http://schemas.openxmlformats.org/officeDocument/2006/relationships" xmlns:p="http://schemas.openxmlformats.org/presentationml/2006/main">
+  <p:cSld>
+    <p:bg>
+      <p:bgRef idx="1001">
+        <a:schemeClr val="bg1"/>
+      </p:bgRef>
+    </p:bg>
+    <p:spTree>
+      <p:nvGrpSpPr>
+        <p:cNvPr id="1" name=""/>
+        <p:cNvGrpSpPr/>
+        <p:nvPr/>
+      </p:nvGrpSpPr>
+      <p:grpSpPr>
+        <a:xfrm>
+          <a:off x="0" y="0"/>
+          <a:ext cx="0" cy="0"/>
+          <a:chOff x="0" y="0"/>
+          <a:chExt cx="0" cy="0"/>
+        </a:xfrm>
+      </p:grpSpPr>
+      <p:sp>
+        <p:nvSpPr>
+          <p:cNvPr id="2" name="Header Placeholder 1"/>
+          <p:cNvSpPr>
+            <a:spLocks noGrp="1"/>
+          </p:cNvSpPr>
+          <p:nvPr>
+            <p:ph type="hdr" sz="quarter"/>
+          </p:nvPr>
+        </p:nvSpPr>
+        <p:spPr>
+          <a:xfrm>
+            <a:off x="0" y="0"/>
+            <a:ext cx="2971800" cy="458788"/>
+          </a:xfrm>
+          <a:prstGeom prst="rect">
+            <a:avLst/>
+          </a:prstGeom>
+        </p:spPr>
+        <p:txBody>
+          <a:bodyPr vert="horz" lIns="91440" tIns="45720" rIns="91440" bIns="45720" rtlCol="0"/>
+          <a:lstStyle>
+            <a:lvl1pPr algn="l">
+              <a:defRPr sz="1200"/>
+            </a:lvl1pPr>
+          </a:lstStyle>
+          <a:p>
+            <a:endParaRPr lang="en-US"/>
+          </a:p>
+        </p:txBody>
+      </p:sp>
+      <p:sp>
+        <p:nvSpPr>
+          <p:cNvPr id="3" name="Date Placeholder 2"/>
+          <p:cNvSpPr>
+            <a:spLocks noGrp="1"/>
+          </p:cNvSpPr>
+          <p:nvPr>
+            <p:ph type="dt" idx="1"/>
+          </p:nvPr>
+        </p:nvSpPr>
+        <p:spPr>
+          <a:xfrm>
+            <a:off x="3884613" y="0"/>
+            <a:ext cx="2971800" cy="458788"/>
+          </a:xfrm>
+          <a:prstGeom prst="rect">
+            <a:avLst/>
+          </a:prstGeom>
+        </p:spPr>
+        <p:txBody>
+          <a:bodyPr vert="horz" lIns="91440" tIns="45720" rIns="91440" bIns="45720" rtlCol="0"/>
+          <a:lstStyle>
+            <a:lvl1pPr algn="r">
+              <a:defRPr sz="1200"/>
+            </a:lvl1pPr>
+          </a:lstStyle>
+          <a:p>
+            <a:fld id="{80B891FF-142D-154F-843C-7CB8EB458228}" type="datetimeFigureOut">
+              <a:rPr lang="en-US" smtClean="0"/>
+              <a:t>3/31/26</a:t>
+            </a:fld>
+            <a:endParaRPr lang="en-US"/>
+          </a:p>
+        </p:txBody>
+      </p:sp>
+      <p:sp>
+        <p:nvSpPr>
+          <p:cNvPr id="4" name="Slide Image Placeholder 3"/>
+          <p:cNvSpPr>
+            <a:spLocks noGrp="1" noRot="1" noChangeAspect="1"/>
+          </p:cNvSpPr>
+          <p:nvPr>
+            <p:ph type="sldImg" idx="2"/>
+          </p:nvPr>
+        </p:nvSpPr>
+        <p:spPr>
+          <a:xfrm>
+            <a:off x="685800" y="1143000"/>
+            <a:ext cx="5486400" cy="3086100"/>
+          </a:xfrm>
+          <a:prstGeom prst="rect">
+            <a:avLst/>
+          </a:prstGeom>
+          <a:noFill/>
+          <a:ln w="12700">
+            <a:solidFill>
+              <a:prstClr val="black"/>
+            </a:solidFill>
+          </a:ln>
+        </p:spPr>
+        <p:txBody>
+          <a:bodyPr vert="horz" lIns="91440" tIns="45720" rIns="91440" bIns="45720" rtlCol="0" anchor="ctr"/>
+          <a:lstStyle/>
+          <a:p>
+            <a:endParaRPr lang="en-US"/>
+          </a:p>
+        </p:txBody>
+      </p:sp>
+      <p:sp>
+        <p:nvSpPr>
+          <p:cNvPr id="5" name="Notes Placeholder 4"/>
+          <p:cNvSpPr>
+            <a:spLocks noGrp="1"/>
+          </p:cNvSpPr>
+          <p:nvPr>
+            <p:ph type="body" sz="quarter" idx="3"/>
+          </p:nvPr>
+        </p:nvSpPr>
+        <p:spPr>
+          <a:xfrm>
+            <a:off x="685800" y="4400550"/>
+            <a:ext cx="5486400" cy="3600450"/>
+          </a:xfrm>
+          <a:prstGeom prst="rect">
+            <a:avLst/>
+          </a:prstGeom>
+        </p:spPr>
+        <p:txBody>
+          <a:bodyPr vert="horz" lIns="91440" tIns="45720" rIns="91440" bIns="45720" rtlCol="0"/>
+          <a:lstStyle/>
+          <a:p>
+            <a:pPr lvl="0"/>
+            <a:r>
+              <a:rPr lang="en-US"/>
+              <a:t>Click to edit Master text styles</a:t>
+            </a:r>
+          </a:p>
+          <a:p>
+            <a:pPr lvl="1"/>
+            <a:r>
+              <a:rPr lang="en-US"/>
+              <a:t>Second level</a:t>
+            </a:r>
+          </a:p>
+          <a:p>
+            <a:pPr lvl="2"/>
+            <a:r>
+              <a:rPr lang="en-US"/>
+              <a:t>Third level</a:t>
+            </a:r>
+          </a:p>
+          <a:p>
+            <a:pPr lvl="3"/>
+            <a:r>
+              <a:rPr lang="en-US"/>
+              <a:t>Fourth level</a:t>
+            </a:r>
+          </a:p>
+          <a:p>
+            <a:pPr lvl="4"/>
+            <a:r>
+              <a:rPr lang="en-US"/>
+              <a:t>Fifth level</a:t>
+            </a:r>
+          </a:p>
+        </p:txBody>
+      </p:sp>
+      <p:sp>
+        <p:nvSpPr>
+          <p:cNvPr id="6" name="Footer Placeholder 5"/>
+          <p:cNvSpPr>
+            <a:spLocks noGrp="1"/>
+          </p:cNvSpPr>
+          <p:nvPr>
+            <p:ph type="ftr" sz="quarter" idx="4"/>
+          </p:nvPr>
+        </p:nvSpPr>
+        <p:spPr>
+          <a:xfrm>
+            <a:off x="0" y="8685213"/>
+            <a:ext cx="2971800" cy="458787"/>
+          </a:xfrm>
+          <a:prstGeom prst="rect">
+            <a:avLst/>
+          </a:prstGeom>
+        </p:spPr>
+        <p:txBody>
+          <a:bodyPr vert="horz" lIns="91440" tIns="45720" rIns="91440" bIns="45720" rtlCol="0" anchor="b"/>
+          <a:lstStyle>
+            <a:lvl1pPr algn="l">
+              <a:defRPr sz="1200"/>
+            </a:lvl1pPr>
+          </a:lstStyle>
+          <a:p>
+            <a:endParaRPr lang="en-US"/>
+          </a:p>
+        </p:txBody>
+      </p:sp>
+      <p:sp>
+        <p:nvSpPr>
+          <p:cNvPr id="7" name="Slide Number Placeholder 6"/>
+          <p:cNvSpPr>
+            <a:spLocks noGrp="1"/>
+          </p:cNvSpPr>
+          <p:nvPr>
+            <p:ph type="sldNum" sz="quarter" idx="5"/>
+          </p:nvPr>
+        </p:nvSpPr>
+        <p:spPr>
+          <a:xfrm>
+            <a:off x="3884613" y="8685213"/>
+            <a:ext cx="2971800" cy="458787"/>
+          </a:xfrm>
+          <a:prstGeom prst="rect">
+            <a:avLst/>
+          </a:prstGeom>
+        </p:spPr>
+        <p:txBody>
+          <a:bodyPr vert="horz" lIns="91440" tIns="45720" rIns="91440" bIns="45720" rtlCol="0" anchor="b"/>
+          <a:lstStyle>
+            <a:lvl1pPr algn="r">
+              <a:defRPr sz="1200"/>
+            </a:lvl1pPr>
+          </a:lstStyle>
+          <a:p>
+            <a:fld id="{0A330D19-CF36-894D-9497-944CAF9A330D}" type="slidenum">
+              <a:rPr lang="en-US" smtClean="0"/>
+              <a:t>‹#›</a:t>
+            </a:fld>
+            <a:endParaRPr lang="en-US"/>
+          </a:p>
+        </p:txBody>
+      </p:sp>
+    </p:spTree>
+    <p:extLst>
+      <p:ext uri="{BB962C8B-B14F-4D97-AF65-F5344CB8AC3E}">
+        <p14:creationId xmlns:p14="http://schemas.microsoft.com/office/powerpoint/2010/main" val="3302637085"/>
+      </p:ext>
+    </p:extLst>
+  </p:cSld>
+  <p:clrMap bg1="lt1" tx1="dk1" bg2="lt2" tx2="dk2" accent1="accent1" accent2="accent2" accent3="accent3" accent4="accent4" accent5="accent5" accent6="accent6" hlink="hlink" folHlink="folHlink"/>
+  <p:notesStyle>
+    <a:lvl1pPr marL="0" algn="l" defTabSz="914400" rtl="0" eaLnBrk="1" latinLnBrk="0" hangingPunct="1">
+      <a:defRPr sz="1200" kern="1200">
+        <a:solidFill>
+          <a:schemeClr val="tx1"/>
+        </a:solidFill>
+        <a:latin typeface="+mn-lt"/>
+        <a:ea typeface="+mn-ea"/>
+        <a:cs typeface="+mn-cs"/>
+      </a:defRPr>
+    </a:lvl1pPr>
+    <a:lvl2pPr marL="457200" algn="l" defTabSz="914400" rtl="0" eaLnBrk="1" latinLnBrk="0" hangingPunct="1">
+      <a:defRPr sz="1200" kern="1200">
+        <a:solidFill>
+          <a:schemeClr val="tx1"/>
+        </a:solidFill>
+        <a:latin typeface="+mn-lt"/>
+        <a:ea typeface="+mn-ea"/>
+        <a:cs typeface="+mn-cs"/>
+      </a:defRPr>
+    </a:lvl2pPr>
+    <a:lvl3pPr marL="914400" algn="l" defTabSz="914400" rtl="0" eaLnBrk="1" latinLnBrk="0" hangingPunct="1">
+      <a:defRPr sz="1200" kern="1200">
+        <a:solidFill>
+          <a:schemeClr val="tx1"/>
+        </a:solidFill>
+        <a:latin typeface="+mn-lt"/>
+        <a:ea typeface="+mn-ea"/>
+        <a:cs typeface="+mn-cs"/>
+      </a:defRPr>
+    </a:lvl3pPr>
+    <a:lvl4pPr marL="1371600" algn="l" defTabSz="914400" rtl="0" eaLnBrk="1" latinLnBrk="0" hangingPunct="1">
+      <a:defRPr sz="1200" kern="1200">
+        <a:solidFill>
+          <a:schemeClr val="tx1"/>
+        </a:solidFill>
+        <a:latin typeface="+mn-lt"/>
+        <a:ea typeface="+mn-ea"/>
+        <a:cs typeface="+mn-cs"/>
+      </a:defRPr>
+    </a:lvl4pPr>
+    <a:lvl5pPr marL="1828800" algn="l" defTabSz="914400" rtl="0" eaLnBrk="1" latinLnBrk="0" hangingPunct="1">
+      <a:defRPr sz="1200" kern="1200">
+        <a:solidFill>
+          <a:schemeClr val="tx1"/>
+        </a:solidFill>
+        <a:latin typeface="+mn-lt"/>
+        <a:ea typeface="+mn-ea"/>
+        <a:cs typeface="+mn-cs"/>
+      </a:defRPr>
+    </a:lvl5pPr>
+    <a:lvl6pPr marL="2286000" algn="l" defTabSz="914400" rtl="0" eaLnBrk="1" latinLnBrk="0" hangingPunct="1">
+      <a:defRPr sz="1200" kern="1200">
+        <a:solidFill>
+          <a:schemeClr val="tx1"/>
+        </a:solidFill>
+        <a:latin typeface="+mn-lt"/>
+        <a:ea typeface="+mn-ea"/>
+        <a:cs typeface="+mn-cs"/>
+      </a:defRPr>
+    </a:lvl6pPr>
+    <a:lvl7pPr marL="2743200" algn="l" defTabSz="914400" rtl="0" eaLnBrk="1" latinLnBrk="0" hangingPunct="1">
+      <a:defRPr sz="1200" kern="1200">
+        <a:solidFill>
+          <a:schemeClr val="tx1"/>
+        </a:solidFill>
+        <a:latin typeface="+mn-lt"/>
+        <a:ea typeface="+mn-ea"/>
+        <a:cs typeface="+mn-cs"/>
+      </a:defRPr>
+    </a:lvl7pPr>
+    <a:lvl8pPr marL="3200400" algn="l" defTabSz="914400" rtl="0" eaLnBrk="1" latinLnBrk="0" hangingPunct="1">
+      <a:defRPr sz="1200" kern="1200">
+        <a:solidFill>
+          <a:schemeClr val="tx1"/>
+        </a:solidFill>
+        <a:latin typeface="+mn-lt"/>
+        <a:ea typeface="+mn-ea"/>
+        <a:cs typeface="+mn-cs"/>
+      </a:defRPr>
+    </a:lvl8pPr>
+    <a:lvl9pPr marL="3657600" algn="l" defTabSz="914400" rtl="0" eaLnBrk="1" latinLnBrk="0" hangingPunct="1">
+      <a:defRPr sz="1200" kern="1200">
+        <a:solidFill>
+          <a:schemeClr val="tx1"/>
+        </a:solidFill>
+        <a:latin typeface="+mn-lt"/>
+        <a:ea typeface="+mn-ea"/>
+        <a:cs typeface="+mn-cs"/>
+      </a:defRPr>
+    </a:lvl9pPr>
+  </p:notesStyle>
+</p:notesMaster>
+</file>
+
+<file path=ppt/notesSlides/notesSlide1.xml><?xml version="1.0" encoding="utf-8"?>
+<p:notes xmlns:a="http://schemas.openxmlformats.org/drawingml/2006/main" xmlns:r="http://schemas.openxmlformats.org/officeDocument/2006/relationships" xmlns:p="http://schemas.openxmlformats.org/presentationml/2006/main">
+  <p:cSld>
+    <p:spTree>
+      <p:nvGrpSpPr>
+        <p:cNvPr id="1" name=""/>
+        <p:cNvGrpSpPr/>
+        <p:nvPr/>
+      </p:nvGrpSpPr>
+      <p:grpSpPr>
+        <a:xfrm>
+          <a:off x="0" y="0"/>
+          <a:ext cx="0" cy="0"/>
+          <a:chOff x="0" y="0"/>
+          <a:chExt cx="0" cy="0"/>
+        </a:xfrm>
+      </p:grpSpPr>
+      <p:sp>
+        <p:nvSpPr>
+          <p:cNvPr id="2" name="Slide Image Placeholder 1"/>
+          <p:cNvSpPr>
+            <a:spLocks noGrp="1" noRot="1" noChangeAspect="1"/>
+          </p:cNvSpPr>
+          <p:nvPr>
+            <p:ph type="sldImg"/>
+          </p:nvPr>
+        </p:nvSpPr>
+        <p:spPr/>
+      </p:sp>
+      <p:sp>
+        <p:nvSpPr>
+          <p:cNvPr id="3" name="Notes Placeholder 2"/>
+          <p:cNvSpPr>
+            <a:spLocks noGrp="1"/>
+          </p:cNvSpPr>
+          <p:nvPr>
+            <p:ph type="body" idx="1"/>
+          </p:nvPr>
+        </p:nvSpPr>
+        <p:spPr/>
+        <p:txBody>
+          <a:bodyPr/>
+          <a:lstStyle/>
+          <a:p>
+            <a:endParaRPr lang="en-US"/>
+          </a:p>
+        </p:txBody>
+      </p:sp>
+      <p:sp>
+        <p:nvSpPr>
+          <p:cNvPr id="4" name="Slide Number Placeholder 3"/>
+          <p:cNvSpPr>
+            <a:spLocks noGrp="1"/>
+          </p:cNvSpPr>
+          <p:nvPr>
+            <p:ph type="sldNum" sz="quarter" idx="5"/>
+          </p:nvPr>
+        </p:nvSpPr>
+        <p:spPr/>
+        <p:txBody>
+          <a:bodyPr/>
+          <a:lstStyle/>
+          <a:p>
+            <a:fld id="{0A330D19-CF36-894D-9497-944CAF9A330D}" type="slidenum">
+              <a:rPr lang="en-US" smtClean="0"/>
+              <a:t>3</a:t>
+            </a:fld>
+            <a:endParaRPr lang="en-US"/>
+          </a:p>
+        </p:txBody>
+      </p:sp>
+    </p:spTree>
+    <p:extLst>
+      <p:ext uri="{BB962C8B-B14F-4D97-AF65-F5344CB8AC3E}">
+        <p14:creationId xmlns:p14="http://schemas.microsoft.com/office/powerpoint/2010/main" val="4253936646"/>
+      </p:ext>
+    </p:extLst>
+  </p:cSld>
+  <p:clrMapOvr>
+    <a:masterClrMapping/>
+  </p:clrMapOvr>
+</p:notes>
+</file>
+
+<file path=ppt/notesSlides/notesSlide10.xml><?xml version="1.0" encoding="utf-8"?>
+<p:notes xmlns:a="http://schemas.openxmlformats.org/drawingml/2006/main" xmlns:r="http://schemas.openxmlformats.org/officeDocument/2006/relationships" xmlns:p="http://schemas.openxmlformats.org/presentationml/2006/main">
+  <p:cSld>
+    <p:spTree>
+      <p:nvGrpSpPr>
+        <p:cNvPr id="1" name=""/>
+        <p:cNvGrpSpPr/>
+        <p:nvPr/>
+      </p:nvGrpSpPr>
+      <p:grpSpPr>
+        <a:xfrm>
+          <a:off x="0" y="0"/>
+          <a:ext cx="0" cy="0"/>
+          <a:chOff x="0" y="0"/>
+          <a:chExt cx="0" cy="0"/>
+        </a:xfrm>
+      </p:grpSpPr>
+      <p:sp>
+        <p:nvSpPr>
+          <p:cNvPr id="2" name="Slide Image Placeholder 1"/>
+          <p:cNvSpPr>
+            <a:spLocks noGrp="1" noRot="1" noChangeAspect="1"/>
+          </p:cNvSpPr>
+          <p:nvPr>
+            <p:ph type="sldImg"/>
+          </p:nvPr>
+        </p:nvSpPr>
+        <p:spPr/>
+      </p:sp>
+      <p:sp>
+        <p:nvSpPr>
+          <p:cNvPr id="3" name="Notes Placeholder 2"/>
+          <p:cNvSpPr>
+            <a:spLocks noGrp="1"/>
+          </p:cNvSpPr>
+          <p:nvPr>
+            <p:ph type="body" idx="1"/>
+          </p:nvPr>
+        </p:nvSpPr>
+        <p:spPr/>
+        <p:txBody>
+          <a:bodyPr/>
+          <a:lstStyle/>
+          <a:p>
+            <a:endParaRPr lang="en-US"/>
+          </a:p>
+        </p:txBody>
+      </p:sp>
+      <p:sp>
+        <p:nvSpPr>
+          <p:cNvPr id="4" name="Slide Number Placeholder 3"/>
+          <p:cNvSpPr>
+            <a:spLocks noGrp="1"/>
+          </p:cNvSpPr>
+          <p:nvPr>
+            <p:ph type="sldNum" sz="quarter" idx="5"/>
+          </p:nvPr>
+        </p:nvSpPr>
+        <p:spPr/>
+        <p:txBody>
+          <a:bodyPr/>
+          <a:lstStyle/>
+          <a:p>
+            <a:fld id="{0A330D19-CF36-894D-9497-944CAF9A330D}" type="slidenum">
+              <a:rPr lang="en-US" smtClean="0"/>
+              <a:t>12</a:t>
+            </a:fld>
+            <a:endParaRPr lang="en-US"/>
+          </a:p>
+        </p:txBody>
+      </p:sp>
+    </p:spTree>
+    <p:extLst>
+      <p:ext uri="{BB962C8B-B14F-4D97-AF65-F5344CB8AC3E}">
+        <p14:creationId xmlns:p14="http://schemas.microsoft.com/office/powerpoint/2010/main" val="909561944"/>
+      </p:ext>
+    </p:extLst>
+  </p:cSld>
+  <p:clrMapOvr>
+    <a:masterClrMapping/>
+  </p:clrMapOvr>
+</p:notes>
+</file>
+
+<file path=ppt/notesSlides/notesSlide11.xml><?xml version="1.0" encoding="utf-8"?>
+<p:notes xmlns:a="http://schemas.openxmlformats.org/drawingml/2006/main" xmlns:r="http://schemas.openxmlformats.org/officeDocument/2006/relationships" xmlns:p="http://schemas.openxmlformats.org/presentationml/2006/main">
+  <p:cSld>
+    <p:spTree>
+      <p:nvGrpSpPr>
+        <p:cNvPr id="1" name=""/>
+        <p:cNvGrpSpPr/>
+        <p:nvPr/>
+      </p:nvGrpSpPr>
+      <p:grpSpPr>
+        <a:xfrm>
+          <a:off x="0" y="0"/>
+          <a:ext cx="0" cy="0"/>
+          <a:chOff x="0" y="0"/>
+          <a:chExt cx="0" cy="0"/>
+        </a:xfrm>
+      </p:grpSpPr>
+      <p:sp>
+        <p:nvSpPr>
+          <p:cNvPr id="2" name="Slide Image Placeholder 1"/>
+          <p:cNvSpPr>
+            <a:spLocks noGrp="1" noRot="1" noChangeAspect="1"/>
+          </p:cNvSpPr>
+          <p:nvPr>
+            <p:ph type="sldImg"/>
+          </p:nvPr>
+        </p:nvSpPr>
+        <p:spPr/>
+      </p:sp>
+      <p:sp>
+        <p:nvSpPr>
+          <p:cNvPr id="3" name="Notes Placeholder 2"/>
+          <p:cNvSpPr>
+            <a:spLocks noGrp="1"/>
+          </p:cNvSpPr>
+          <p:nvPr>
+            <p:ph type="body" idx="1"/>
+          </p:nvPr>
+        </p:nvSpPr>
+        <p:spPr/>
+        <p:txBody>
+          <a:bodyPr/>
+          <a:lstStyle/>
+          <a:p>
+            <a:endParaRPr lang="en-US"/>
+          </a:p>
+        </p:txBody>
+      </p:sp>
+      <p:sp>
+        <p:nvSpPr>
+          <p:cNvPr id="4" name="Slide Number Placeholder 3"/>
+          <p:cNvSpPr>
+            <a:spLocks noGrp="1"/>
+          </p:cNvSpPr>
+          <p:nvPr>
+            <p:ph type="sldNum" sz="quarter" idx="5"/>
+          </p:nvPr>
+        </p:nvSpPr>
+        <p:spPr/>
+        <p:txBody>
+          <a:bodyPr/>
+          <a:lstStyle/>
+          <a:p>
+            <a:fld id="{0A330D19-CF36-894D-9497-944CAF9A330D}" type="slidenum">
+              <a:rPr lang="en-US" smtClean="0"/>
+              <a:t>13</a:t>
+            </a:fld>
+            <a:endParaRPr lang="en-US"/>
+          </a:p>
+        </p:txBody>
+      </p:sp>
+    </p:spTree>
+    <p:extLst>
+      <p:ext uri="{BB962C8B-B14F-4D97-AF65-F5344CB8AC3E}">
+        <p14:creationId xmlns:p14="http://schemas.microsoft.com/office/powerpoint/2010/main" val="2273196205"/>
+      </p:ext>
+    </p:extLst>
+  </p:cSld>
+  <p:clrMapOvr>
+    <a:masterClrMapping/>
+  </p:clrMapOvr>
+</p:notes>
+</file>
+
+<file path=ppt/notesSlides/notesSlide12.xml><?xml version="1.0" encoding="utf-8"?>
+<p:notes xmlns:a="http://schemas.openxmlformats.org/drawingml/2006/main" xmlns:r="http://schemas.openxmlformats.org/officeDocument/2006/relationships" xmlns:p="http://schemas.openxmlformats.org/presentationml/2006/main">
+  <p:cSld>
+    <p:spTree>
+      <p:nvGrpSpPr>
+        <p:cNvPr id="1" name=""/>
+        <p:cNvGrpSpPr/>
+        <p:nvPr/>
+      </p:nvGrpSpPr>
+      <p:grpSpPr>
+        <a:xfrm>
+          <a:off x="0" y="0"/>
+          <a:ext cx="0" cy="0"/>
+          <a:chOff x="0" y="0"/>
+          <a:chExt cx="0" cy="0"/>
+        </a:xfrm>
+      </p:grpSpPr>
+      <p:sp>
+        <p:nvSpPr>
+          <p:cNvPr id="2" name="Slide Image Placeholder 1"/>
+          <p:cNvSpPr>
+            <a:spLocks noGrp="1" noRot="1" noChangeAspect="1"/>
+          </p:cNvSpPr>
+          <p:nvPr>
+            <p:ph type="sldImg"/>
+          </p:nvPr>
+        </p:nvSpPr>
+        <p:spPr/>
+      </p:sp>
+      <p:sp>
+        <p:nvSpPr>
+          <p:cNvPr id="3" name="Notes Placeholder 2"/>
+          <p:cNvSpPr>
+            <a:spLocks noGrp="1"/>
+          </p:cNvSpPr>
+          <p:nvPr>
+            <p:ph type="body" idx="1"/>
+          </p:nvPr>
+        </p:nvSpPr>
+        <p:spPr/>
+        <p:txBody>
+          <a:bodyPr/>
+          <a:lstStyle/>
+          <a:p>
+            <a:endParaRPr lang="en-US"/>
+          </a:p>
+        </p:txBody>
+      </p:sp>
+      <p:sp>
+        <p:nvSpPr>
+          <p:cNvPr id="4" name="Slide Number Placeholder 3"/>
+          <p:cNvSpPr>
+            <a:spLocks noGrp="1"/>
+          </p:cNvSpPr>
+          <p:nvPr>
+            <p:ph type="sldNum" sz="quarter" idx="5"/>
+          </p:nvPr>
+        </p:nvSpPr>
+        <p:spPr/>
+        <p:txBody>
+          <a:bodyPr/>
+          <a:lstStyle/>
+          <a:p>
+            <a:fld id="{0A330D19-CF36-894D-9497-944CAF9A330D}" type="slidenum">
+              <a:rPr lang="en-US" smtClean="0"/>
+              <a:t>14</a:t>
+            </a:fld>
+            <a:endParaRPr lang="en-US"/>
+          </a:p>
+        </p:txBody>
+      </p:sp>
+    </p:spTree>
+    <p:extLst>
+      <p:ext uri="{BB962C8B-B14F-4D97-AF65-F5344CB8AC3E}">
+        <p14:creationId xmlns:p14="http://schemas.microsoft.com/office/powerpoint/2010/main" val="1478687534"/>
+      </p:ext>
+    </p:extLst>
+  </p:cSld>
+  <p:clrMapOvr>
+    <a:masterClrMapping/>
+  </p:clrMapOvr>
+</p:notes>
+</file>
+
+<file path=ppt/notesSlides/notesSlide13.xml><?xml version="1.0" encoding="utf-8"?>
+<p:notes xmlns:a="http://schemas.openxmlformats.org/drawingml/2006/main" xmlns:r="http://schemas.openxmlformats.org/officeDocument/2006/relationships" xmlns:p="http://schemas.openxmlformats.org/presentationml/2006/main">
+  <p:cSld>
+    <p:spTree>
+      <p:nvGrpSpPr>
+        <p:cNvPr id="1" name=""/>
+        <p:cNvGrpSpPr/>
+        <p:nvPr/>
+      </p:nvGrpSpPr>
+      <p:grpSpPr>
+        <a:xfrm>
+          <a:off x="0" y="0"/>
+          <a:ext cx="0" cy="0"/>
+          <a:chOff x="0" y="0"/>
+          <a:chExt cx="0" cy="0"/>
+        </a:xfrm>
+      </p:grpSpPr>
+      <p:sp>
+        <p:nvSpPr>
+          <p:cNvPr id="2" name="Slide Image Placeholder 1"/>
+          <p:cNvSpPr>
+            <a:spLocks noGrp="1" noRot="1" noChangeAspect="1"/>
+          </p:cNvSpPr>
+          <p:nvPr>
+            <p:ph type="sldImg"/>
+          </p:nvPr>
+        </p:nvSpPr>
+        <p:spPr/>
+      </p:sp>
+      <p:sp>
+        <p:nvSpPr>
+          <p:cNvPr id="3" name="Notes Placeholder 2"/>
+          <p:cNvSpPr>
+            <a:spLocks noGrp="1"/>
+          </p:cNvSpPr>
+          <p:nvPr>
+            <p:ph type="body" idx="1"/>
+          </p:nvPr>
+        </p:nvSpPr>
+        <p:spPr/>
+        <p:txBody>
+          <a:bodyPr/>
+          <a:lstStyle/>
+          <a:p>
+            <a:endParaRPr lang="en-US"/>
+          </a:p>
+        </p:txBody>
+      </p:sp>
+      <p:sp>
+        <p:nvSpPr>
+          <p:cNvPr id="4" name="Slide Number Placeholder 3"/>
+          <p:cNvSpPr>
+            <a:spLocks noGrp="1"/>
+          </p:cNvSpPr>
+          <p:nvPr>
+            <p:ph type="sldNum" sz="quarter" idx="5"/>
+          </p:nvPr>
+        </p:nvSpPr>
+        <p:spPr/>
+        <p:txBody>
+          <a:bodyPr/>
+          <a:lstStyle/>
+          <a:p>
+            <a:fld id="{0A330D19-CF36-894D-9497-944CAF9A330D}" type="slidenum">
+              <a:rPr lang="en-US" smtClean="0"/>
+              <a:t>15</a:t>
+            </a:fld>
+            <a:endParaRPr lang="en-US"/>
+          </a:p>
+        </p:txBody>
+      </p:sp>
+    </p:spTree>
+    <p:extLst>
+      <p:ext uri="{BB962C8B-B14F-4D97-AF65-F5344CB8AC3E}">
+        <p14:creationId xmlns:p14="http://schemas.microsoft.com/office/powerpoint/2010/main" val="3680974890"/>
+      </p:ext>
+    </p:extLst>
+  </p:cSld>
+  <p:clrMapOvr>
+    <a:masterClrMapping/>
+  </p:clrMapOvr>
+</p:notes>
+</file>
+
+<file path=ppt/notesSlides/notesSlide14.xml><?xml version="1.0" encoding="utf-8"?>
+<p:notes xmlns:a="http://schemas.openxmlformats.org/drawingml/2006/main" xmlns:r="http://schemas.openxmlformats.org/officeDocument/2006/relationships" xmlns:p="http://schemas.openxmlformats.org/presentationml/2006/main">
+  <p:cSld>
+    <p:spTree>
+      <p:nvGrpSpPr>
+        <p:cNvPr id="1" name=""/>
+        <p:cNvGrpSpPr/>
+        <p:nvPr/>
+      </p:nvGrpSpPr>
+      <p:grpSpPr>
+        <a:xfrm>
+          <a:off x="0" y="0"/>
+          <a:ext cx="0" cy="0"/>
+          <a:chOff x="0" y="0"/>
+          <a:chExt cx="0" cy="0"/>
+        </a:xfrm>
+      </p:grpSpPr>
+      <p:sp>
+        <p:nvSpPr>
+          <p:cNvPr id="2" name="Slide Image Placeholder 1"/>
+          <p:cNvSpPr>
+            <a:spLocks noGrp="1" noRot="1" noChangeAspect="1"/>
+          </p:cNvSpPr>
+          <p:nvPr>
+            <p:ph type="sldImg"/>
+          </p:nvPr>
+        </p:nvSpPr>
+        <p:spPr/>
+      </p:sp>
+      <p:sp>
+        <p:nvSpPr>
+          <p:cNvPr id="3" name="Notes Placeholder 2"/>
+          <p:cNvSpPr>
+            <a:spLocks noGrp="1"/>
+          </p:cNvSpPr>
+          <p:nvPr>
+            <p:ph type="body" idx="1"/>
+          </p:nvPr>
+        </p:nvSpPr>
+        <p:spPr/>
+        <p:txBody>
+          <a:bodyPr/>
+          <a:lstStyle/>
+          <a:p>
+            <a:endParaRPr lang="en-US"/>
+          </a:p>
+        </p:txBody>
+      </p:sp>
+      <p:sp>
+        <p:nvSpPr>
+          <p:cNvPr id="4" name="Slide Number Placeholder 3"/>
+          <p:cNvSpPr>
+            <a:spLocks noGrp="1"/>
+          </p:cNvSpPr>
+          <p:nvPr>
+            <p:ph type="sldNum" sz="quarter" idx="5"/>
+          </p:nvPr>
+        </p:nvSpPr>
+        <p:spPr/>
+        <p:txBody>
+          <a:bodyPr/>
+          <a:lstStyle/>
+          <a:p>
+            <a:fld id="{0A330D19-CF36-894D-9497-944CAF9A330D}" type="slidenum">
+              <a:rPr lang="en-US" smtClean="0"/>
+              <a:t>16</a:t>
+            </a:fld>
+            <a:endParaRPr lang="en-US"/>
+          </a:p>
+        </p:txBody>
+      </p:sp>
+    </p:spTree>
+    <p:extLst>
+      <p:ext uri="{BB962C8B-B14F-4D97-AF65-F5344CB8AC3E}">
+        <p14:creationId xmlns:p14="http://schemas.microsoft.com/office/powerpoint/2010/main" val="3684978473"/>
+      </p:ext>
+    </p:extLst>
+  </p:cSld>
+  <p:clrMapOvr>
+    <a:masterClrMapping/>
+  </p:clrMapOvr>
+</p:notes>
+</file>
+
+<file path=ppt/notesSlides/notesSlide15.xml><?xml version="1.0" encoding="utf-8"?>
+<p:notes xmlns:a="http://schemas.openxmlformats.org/drawingml/2006/main" xmlns:r="http://schemas.openxmlformats.org/officeDocument/2006/relationships" xmlns:p="http://schemas.openxmlformats.org/presentationml/2006/main">
+  <p:cSld>
+    <p:spTree>
+      <p:nvGrpSpPr>
+        <p:cNvPr id="1" name=""/>
+        <p:cNvGrpSpPr/>
+        <p:nvPr/>
+      </p:nvGrpSpPr>
+      <p:grpSpPr>
+        <a:xfrm>
+          <a:off x="0" y="0"/>
+          <a:ext cx="0" cy="0"/>
+          <a:chOff x="0" y="0"/>
+          <a:chExt cx="0" cy="0"/>
+        </a:xfrm>
+      </p:grpSpPr>
+      <p:sp>
+        <p:nvSpPr>
+          <p:cNvPr id="2" name="Slide Image Placeholder 1"/>
+          <p:cNvSpPr>
+            <a:spLocks noGrp="1" noRot="1" noChangeAspect="1"/>
+          </p:cNvSpPr>
+          <p:nvPr>
+            <p:ph type="sldImg"/>
+          </p:nvPr>
+        </p:nvSpPr>
+        <p:spPr/>
+      </p:sp>
+      <p:sp>
+        <p:nvSpPr>
+          <p:cNvPr id="3" name="Notes Placeholder 2"/>
+          <p:cNvSpPr>
+            <a:spLocks noGrp="1"/>
+          </p:cNvSpPr>
+          <p:nvPr>
+            <p:ph type="body" idx="1"/>
+          </p:nvPr>
+        </p:nvSpPr>
+        <p:spPr/>
+        <p:txBody>
+          <a:bodyPr/>
+          <a:lstStyle/>
+          <a:p>
+            <a:endParaRPr lang="en-US"/>
+          </a:p>
+        </p:txBody>
+      </p:sp>
+      <p:sp>
+        <p:nvSpPr>
+          <p:cNvPr id="4" name="Slide Number Placeholder 3"/>
+          <p:cNvSpPr>
+            <a:spLocks noGrp="1"/>
+          </p:cNvSpPr>
+          <p:nvPr>
+            <p:ph type="sldNum" sz="quarter" idx="5"/>
+          </p:nvPr>
+        </p:nvSpPr>
+        <p:spPr/>
+        <p:txBody>
+          <a:bodyPr/>
+          <a:lstStyle/>
+          <a:p>
+            <a:fld id="{0A330D19-CF36-894D-9497-944CAF9A330D}" type="slidenum">
+              <a:rPr lang="en-US" smtClean="0"/>
+              <a:t>17</a:t>
+            </a:fld>
+            <a:endParaRPr lang="en-US"/>
+          </a:p>
+        </p:txBody>
+      </p:sp>
+    </p:spTree>
+    <p:extLst>
+      <p:ext uri="{BB962C8B-B14F-4D97-AF65-F5344CB8AC3E}">
+        <p14:creationId xmlns:p14="http://schemas.microsoft.com/office/powerpoint/2010/main" val="3295589649"/>
+      </p:ext>
+    </p:extLst>
+  </p:cSld>
+  <p:clrMapOvr>
+    <a:masterClrMapping/>
+  </p:clrMapOvr>
+</p:notes>
+</file>
+
+<file path=ppt/notesSlides/notesSlide16.xml><?xml version="1.0" encoding="utf-8"?>
+<p:notes xmlns:a="http://schemas.openxmlformats.org/drawingml/2006/main" xmlns:r="http://schemas.openxmlformats.org/officeDocument/2006/relationships" xmlns:p="http://schemas.openxmlformats.org/presentationml/2006/main">
+  <p:cSld>
+    <p:spTree>
+      <p:nvGrpSpPr>
+        <p:cNvPr id="1" name=""/>
+        <p:cNvGrpSpPr/>
+        <p:nvPr/>
+      </p:nvGrpSpPr>
+      <p:grpSpPr>
+        <a:xfrm>
+          <a:off x="0" y="0"/>
+          <a:ext cx="0" cy="0"/>
+          <a:chOff x="0" y="0"/>
+          <a:chExt cx="0" cy="0"/>
+        </a:xfrm>
+      </p:grpSpPr>
+      <p:sp>
+        <p:nvSpPr>
+          <p:cNvPr id="2" name="Slide Image Placeholder 1"/>
+          <p:cNvSpPr>
+            <a:spLocks noGrp="1" noRot="1" noChangeAspect="1"/>
+          </p:cNvSpPr>
+          <p:nvPr>
+            <p:ph type="sldImg"/>
+          </p:nvPr>
+        </p:nvSpPr>
+        <p:spPr/>
+      </p:sp>
+      <p:sp>
+        <p:nvSpPr>
+          <p:cNvPr id="3" name="Notes Placeholder 2"/>
+          <p:cNvSpPr>
+            <a:spLocks noGrp="1"/>
+          </p:cNvSpPr>
+          <p:nvPr>
+            <p:ph type="body" idx="1"/>
+          </p:nvPr>
+        </p:nvSpPr>
+        <p:spPr/>
+        <p:txBody>
+          <a:bodyPr/>
+          <a:lstStyle/>
+          <a:p>
+            <a:endParaRPr lang="en-US"/>
+          </a:p>
+        </p:txBody>
+      </p:sp>
+      <p:sp>
+        <p:nvSpPr>
+          <p:cNvPr id="4" name="Slide Number Placeholder 3"/>
+          <p:cNvSpPr>
+            <a:spLocks noGrp="1"/>
+          </p:cNvSpPr>
+          <p:nvPr>
+            <p:ph type="sldNum" sz="quarter" idx="5"/>
+          </p:nvPr>
+        </p:nvSpPr>
+        <p:spPr/>
+        <p:txBody>
+          <a:bodyPr/>
+          <a:lstStyle/>
+          <a:p>
+            <a:fld id="{0A330D19-CF36-894D-9497-944CAF9A330D}" type="slidenum">
+              <a:rPr lang="en-US" smtClean="0"/>
+              <a:t>18</a:t>
+            </a:fld>
+            <a:endParaRPr lang="en-US"/>
+          </a:p>
+        </p:txBody>
+      </p:sp>
+    </p:spTree>
+    <p:extLst>
+      <p:ext uri="{BB962C8B-B14F-4D97-AF65-F5344CB8AC3E}">
+        <p14:creationId xmlns:p14="http://schemas.microsoft.com/office/powerpoint/2010/main" val="3886792197"/>
+      </p:ext>
+    </p:extLst>
+  </p:cSld>
+  <p:clrMapOvr>
+    <a:masterClrMapping/>
+  </p:clrMapOvr>
+</p:notes>
+</file>
+
+<file path=ppt/notesSlides/notesSlide17.xml><?xml version="1.0" encoding="utf-8"?>
+<p:notes xmlns:a="http://schemas.openxmlformats.org/drawingml/2006/main" xmlns:r="http://schemas.openxmlformats.org/officeDocument/2006/relationships" xmlns:p="http://schemas.openxmlformats.org/presentationml/2006/main">
+  <p:cSld>
+    <p:spTree>
+      <p:nvGrpSpPr>
+        <p:cNvPr id="1" name=""/>
+        <p:cNvGrpSpPr/>
+        <p:nvPr/>
+      </p:nvGrpSpPr>
+      <p:grpSpPr>
+        <a:xfrm>
+          <a:off x="0" y="0"/>
+          <a:ext cx="0" cy="0"/>
+          <a:chOff x="0" y="0"/>
+          <a:chExt cx="0" cy="0"/>
+        </a:xfrm>
+      </p:grpSpPr>
+      <p:sp>
+        <p:nvSpPr>
+          <p:cNvPr id="2" name="Slide Image Placeholder 1"/>
+          <p:cNvSpPr>
+            <a:spLocks noGrp="1" noRot="1" noChangeAspect="1"/>
+          </p:cNvSpPr>
+          <p:nvPr>
+            <p:ph type="sldImg"/>
+          </p:nvPr>
+        </p:nvSpPr>
+        <p:spPr/>
+      </p:sp>
+      <p:sp>
+        <p:nvSpPr>
+          <p:cNvPr id="3" name="Notes Placeholder 2"/>
+          <p:cNvSpPr>
+            <a:spLocks noGrp="1"/>
+          </p:cNvSpPr>
+          <p:nvPr>
+            <p:ph type="body" idx="1"/>
+          </p:nvPr>
+        </p:nvSpPr>
+        <p:spPr/>
+        <p:txBody>
+          <a:bodyPr/>
+          <a:lstStyle/>
+          <a:p>
+            <a:endParaRPr lang="en-US"/>
+          </a:p>
+        </p:txBody>
+      </p:sp>
+      <p:sp>
+        <p:nvSpPr>
+          <p:cNvPr id="4" name="Slide Number Placeholder 3"/>
+          <p:cNvSpPr>
+            <a:spLocks noGrp="1"/>
+          </p:cNvSpPr>
+          <p:nvPr>
+            <p:ph type="sldNum" sz="quarter" idx="5"/>
+          </p:nvPr>
+        </p:nvSpPr>
+        <p:spPr/>
+        <p:txBody>
+          <a:bodyPr/>
+          <a:lstStyle/>
+          <a:p>
+            <a:fld id="{0A330D19-CF36-894D-9497-944CAF9A330D}" type="slidenum">
+              <a:rPr lang="en-US" smtClean="0"/>
+              <a:t>19</a:t>
+            </a:fld>
+            <a:endParaRPr lang="en-US"/>
+          </a:p>
+        </p:txBody>
+      </p:sp>
+    </p:spTree>
+    <p:extLst>
+      <p:ext uri="{BB962C8B-B14F-4D97-AF65-F5344CB8AC3E}">
+        <p14:creationId xmlns:p14="http://schemas.microsoft.com/office/powerpoint/2010/main" val="1541499543"/>
+      </p:ext>
+    </p:extLst>
+  </p:cSld>
+  <p:clrMapOvr>
+    <a:masterClrMapping/>
+  </p:clrMapOvr>
+</p:notes>
+</file>
+
+<file path=ppt/notesSlides/notesSlide18.xml><?xml version="1.0" encoding="utf-8"?>
+<p:notes xmlns:a="http://schemas.openxmlformats.org/drawingml/2006/main" xmlns:r="http://schemas.openxmlformats.org/officeDocument/2006/relationships" xmlns:p="http://schemas.openxmlformats.org/presentationml/2006/main">
+  <p:cSld>
+    <p:spTree>
+      <p:nvGrpSpPr>
+        <p:cNvPr id="1" name=""/>
+        <p:cNvGrpSpPr/>
+        <p:nvPr/>
+      </p:nvGrpSpPr>
+      <p:grpSpPr>
+        <a:xfrm>
+          <a:off x="0" y="0"/>
+          <a:ext cx="0" cy="0"/>
+          <a:chOff x="0" y="0"/>
+          <a:chExt cx="0" cy="0"/>
+        </a:xfrm>
+      </p:grpSpPr>
+      <p:sp>
+        <p:nvSpPr>
+          <p:cNvPr id="2" name="Slide Image Placeholder 1"/>
+          <p:cNvSpPr>
+            <a:spLocks noGrp="1" noRot="1" noChangeAspect="1"/>
+          </p:cNvSpPr>
+          <p:nvPr>
+            <p:ph type="sldImg"/>
+          </p:nvPr>
+        </p:nvSpPr>
+        <p:spPr/>
+      </p:sp>
+      <p:sp>
+        <p:nvSpPr>
+          <p:cNvPr id="3" name="Notes Placeholder 2"/>
+          <p:cNvSpPr>
+            <a:spLocks noGrp="1"/>
+          </p:cNvSpPr>
+          <p:nvPr>
+            <p:ph type="body" idx="1"/>
+          </p:nvPr>
+        </p:nvSpPr>
+        <p:spPr/>
+        <p:txBody>
+          <a:bodyPr/>
+          <a:lstStyle/>
+          <a:p>
+            <a:endParaRPr lang="en-US"/>
+          </a:p>
+        </p:txBody>
+      </p:sp>
+      <p:sp>
+        <p:nvSpPr>
+          <p:cNvPr id="4" name="Slide Number Placeholder 3"/>
+          <p:cNvSpPr>
+            <a:spLocks noGrp="1"/>
+          </p:cNvSpPr>
+          <p:nvPr>
+            <p:ph type="sldNum" sz="quarter" idx="5"/>
+          </p:nvPr>
+        </p:nvSpPr>
+        <p:spPr/>
+        <p:txBody>
+          <a:bodyPr/>
+          <a:lstStyle/>
+          <a:p>
+            <a:fld id="{0A330D19-CF36-894D-9497-944CAF9A330D}" type="slidenum">
+              <a:rPr lang="en-US" smtClean="0"/>
+              <a:t>20</a:t>
+            </a:fld>
+            <a:endParaRPr lang="en-US"/>
+          </a:p>
+        </p:txBody>
+      </p:sp>
+    </p:spTree>
+    <p:extLst>
+      <p:ext uri="{BB962C8B-B14F-4D97-AF65-F5344CB8AC3E}">
+        <p14:creationId xmlns:p14="http://schemas.microsoft.com/office/powerpoint/2010/main" val="451660104"/>
+      </p:ext>
+    </p:extLst>
+  </p:cSld>
+  <p:clrMapOvr>
+    <a:masterClrMapping/>
+  </p:clrMapOvr>
+</p:notes>
+</file>
+
+<file path=ppt/notesSlides/notesSlide19.xml><?xml version="1.0" encoding="utf-8"?>
+<p:notes xmlns:a="http://schemas.openxmlformats.org/drawingml/2006/main" xmlns:r="http://schemas.openxmlformats.org/officeDocument/2006/relationships" xmlns:p="http://schemas.openxmlformats.org/presentationml/2006/main">
+  <p:cSld>
+    <p:spTree>
+      <p:nvGrpSpPr>
+        <p:cNvPr id="1" name=""/>
+        <p:cNvGrpSpPr/>
+        <p:nvPr/>
+      </p:nvGrpSpPr>
+      <p:grpSpPr>
+        <a:xfrm>
+          <a:off x="0" y="0"/>
+          <a:ext cx="0" cy="0"/>
+          <a:chOff x="0" y="0"/>
+          <a:chExt cx="0" cy="0"/>
+        </a:xfrm>
+      </p:grpSpPr>
+      <p:sp>
+        <p:nvSpPr>
+          <p:cNvPr id="2" name="Slide Image Placeholder 1"/>
+          <p:cNvSpPr>
+            <a:spLocks noGrp="1" noRot="1" noChangeAspect="1"/>
+          </p:cNvSpPr>
+          <p:nvPr>
+            <p:ph type="sldImg"/>
+          </p:nvPr>
+        </p:nvSpPr>
+        <p:spPr/>
+      </p:sp>
+      <p:sp>
+        <p:nvSpPr>
+          <p:cNvPr id="3" name="Notes Placeholder 2"/>
+          <p:cNvSpPr>
+            <a:spLocks noGrp="1"/>
+          </p:cNvSpPr>
+          <p:nvPr>
+            <p:ph type="body" idx="1"/>
+          </p:nvPr>
+        </p:nvSpPr>
+        <p:spPr/>
+        <p:txBody>
+          <a:bodyPr/>
+          <a:lstStyle/>
+          <a:p>
+            <a:endParaRPr lang="en-US"/>
+          </a:p>
+        </p:txBody>
+      </p:sp>
+      <p:sp>
+        <p:nvSpPr>
+          <p:cNvPr id="4" name="Slide Number Placeholder 3"/>
+          <p:cNvSpPr>
+            <a:spLocks noGrp="1"/>
+          </p:cNvSpPr>
+          <p:nvPr>
+            <p:ph type="sldNum" sz="quarter" idx="5"/>
+          </p:nvPr>
+        </p:nvSpPr>
+        <p:spPr/>
+        <p:txBody>
+          <a:bodyPr/>
+          <a:lstStyle/>
+          <a:p>
+            <a:fld id="{0A330D19-CF36-894D-9497-944CAF9A330D}" type="slidenum">
+              <a:rPr lang="en-US" smtClean="0"/>
+              <a:t>21</a:t>
+            </a:fld>
+            <a:endParaRPr lang="en-US"/>
+          </a:p>
+        </p:txBody>
+      </p:sp>
+    </p:spTree>
+    <p:extLst>
+      <p:ext uri="{BB962C8B-B14F-4D97-AF65-F5344CB8AC3E}">
+        <p14:creationId xmlns:p14="http://schemas.microsoft.com/office/powerpoint/2010/main" val="3981865489"/>
+      </p:ext>
+    </p:extLst>
+  </p:cSld>
+  <p:clrMapOvr>
+    <a:masterClrMapping/>
+  </p:clrMapOvr>
+</p:notes>
+</file>
+
+<file path=ppt/notesSlides/notesSlide2.xml><?xml version="1.0" encoding="utf-8"?>
+<p:notes xmlns:a="http://schemas.openxmlformats.org/drawingml/2006/main" xmlns:r="http://schemas.openxmlformats.org/officeDocument/2006/relationships" xmlns:p="http://schemas.openxmlformats.org/presentationml/2006/main">
+  <p:cSld>
+    <p:spTree>
+      <p:nvGrpSpPr>
+        <p:cNvPr id="1" name=""/>
+        <p:cNvGrpSpPr/>
+        <p:nvPr/>
+      </p:nvGrpSpPr>
+      <p:grpSpPr>
+        <a:xfrm>
+          <a:off x="0" y="0"/>
+          <a:ext cx="0" cy="0"/>
+          <a:chOff x="0" y="0"/>
+          <a:chExt cx="0" cy="0"/>
+        </a:xfrm>
+      </p:grpSpPr>
+      <p:sp>
+        <p:nvSpPr>
+          <p:cNvPr id="2" name="Slide Image Placeholder 1"/>
+          <p:cNvSpPr>
+            <a:spLocks noGrp="1" noRot="1" noChangeAspect="1"/>
+          </p:cNvSpPr>
+          <p:nvPr>
+            <p:ph type="sldImg"/>
+          </p:nvPr>
+        </p:nvSpPr>
+        <p:spPr/>
+      </p:sp>
+      <p:sp>
+        <p:nvSpPr>
+          <p:cNvPr id="3" name="Notes Placeholder 2"/>
+          <p:cNvSpPr>
+            <a:spLocks noGrp="1"/>
+          </p:cNvSpPr>
+          <p:nvPr>
+            <p:ph type="body" idx="1"/>
+          </p:nvPr>
+        </p:nvSpPr>
+        <p:spPr/>
+        <p:txBody>
+          <a:bodyPr/>
+          <a:lstStyle/>
+          <a:p>
+            <a:endParaRPr lang="en-US"/>
+          </a:p>
+        </p:txBody>
+      </p:sp>
+      <p:sp>
+        <p:nvSpPr>
+          <p:cNvPr id="4" name="Slide Number Placeholder 3"/>
+          <p:cNvSpPr>
+            <a:spLocks noGrp="1"/>
+          </p:cNvSpPr>
+          <p:nvPr>
+            <p:ph type="sldNum" sz="quarter" idx="5"/>
+          </p:nvPr>
+        </p:nvSpPr>
+        <p:spPr/>
+        <p:txBody>
+          <a:bodyPr/>
+          <a:lstStyle/>
+          <a:p>
+            <a:fld id="{0A330D19-CF36-894D-9497-944CAF9A330D}" type="slidenum">
+              <a:rPr lang="en-US" smtClean="0"/>
+              <a:t>4</a:t>
+            </a:fld>
+            <a:endParaRPr lang="en-US"/>
+          </a:p>
+        </p:txBody>
+      </p:sp>
+    </p:spTree>
+    <p:extLst>
+      <p:ext uri="{BB962C8B-B14F-4D97-AF65-F5344CB8AC3E}">
+        <p14:creationId xmlns:p14="http://schemas.microsoft.com/office/powerpoint/2010/main" val="3029309906"/>
+      </p:ext>
+    </p:extLst>
+  </p:cSld>
+  <p:clrMapOvr>
+    <a:masterClrMapping/>
+  </p:clrMapOvr>
+</p:notes>
+</file>
+
+<file path=ppt/notesSlides/notesSlide20.xml><?xml version="1.0" encoding="utf-8"?>
+<p:notes xmlns:a="http://schemas.openxmlformats.org/drawingml/2006/main" xmlns:r="http://schemas.openxmlformats.org/officeDocument/2006/relationships" xmlns:p="http://schemas.openxmlformats.org/presentationml/2006/main">
+  <p:cSld>
+    <p:spTree>
+      <p:nvGrpSpPr>
+        <p:cNvPr id="1" name=""/>
+        <p:cNvGrpSpPr/>
+        <p:nvPr/>
+      </p:nvGrpSpPr>
+      <p:grpSpPr>
+        <a:xfrm>
+          <a:off x="0" y="0"/>
+          <a:ext cx="0" cy="0"/>
+          <a:chOff x="0" y="0"/>
+          <a:chExt cx="0" cy="0"/>
+        </a:xfrm>
+      </p:grpSpPr>
+      <p:sp>
+        <p:nvSpPr>
+          <p:cNvPr id="2" name="Slide Image Placeholder 1"/>
+          <p:cNvSpPr>
+            <a:spLocks noGrp="1" noRot="1" noChangeAspect="1"/>
+          </p:cNvSpPr>
+          <p:nvPr>
+            <p:ph type="sldImg"/>
+          </p:nvPr>
+        </p:nvSpPr>
+        <p:spPr/>
+      </p:sp>
+      <p:sp>
+        <p:nvSpPr>
+          <p:cNvPr id="3" name="Notes Placeholder 2"/>
+          <p:cNvSpPr>
+            <a:spLocks noGrp="1"/>
+          </p:cNvSpPr>
+          <p:nvPr>
+            <p:ph type="body" idx="1"/>
+          </p:nvPr>
+        </p:nvSpPr>
+        <p:spPr/>
+        <p:txBody>
+          <a:bodyPr/>
+          <a:lstStyle/>
+          <a:p>
+            <a:endParaRPr lang="en-US"/>
+          </a:p>
+        </p:txBody>
+      </p:sp>
+      <p:sp>
+        <p:nvSpPr>
+          <p:cNvPr id="4" name="Slide Number Placeholder 3"/>
+          <p:cNvSpPr>
+            <a:spLocks noGrp="1"/>
+          </p:cNvSpPr>
+          <p:nvPr>
+            <p:ph type="sldNum" sz="quarter" idx="5"/>
+          </p:nvPr>
+        </p:nvSpPr>
+        <p:spPr/>
+        <p:txBody>
+          <a:bodyPr/>
+          <a:lstStyle/>
+          <a:p>
+            <a:fld id="{0A330D19-CF36-894D-9497-944CAF9A330D}" type="slidenum">
+              <a:rPr lang="en-US" smtClean="0"/>
+              <a:t>22</a:t>
+            </a:fld>
+            <a:endParaRPr lang="en-US"/>
+          </a:p>
+        </p:txBody>
+      </p:sp>
+    </p:spTree>
+    <p:extLst>
+      <p:ext uri="{BB962C8B-B14F-4D97-AF65-F5344CB8AC3E}">
+        <p14:creationId xmlns:p14="http://schemas.microsoft.com/office/powerpoint/2010/main" val="1564283278"/>
+      </p:ext>
+    </p:extLst>
+  </p:cSld>
+  <p:clrMapOvr>
+    <a:masterClrMapping/>
+  </p:clrMapOvr>
+</p:notes>
+</file>
+
+<file path=ppt/notesSlides/notesSlide21.xml><?xml version="1.0" encoding="utf-8"?>
+<p:notes xmlns:a="http://schemas.openxmlformats.org/drawingml/2006/main" xmlns:r="http://schemas.openxmlformats.org/officeDocument/2006/relationships" xmlns:p="http://schemas.openxmlformats.org/presentationml/2006/main">
+  <p:cSld>
+    <p:spTree>
+      <p:nvGrpSpPr>
+        <p:cNvPr id="1" name=""/>
+        <p:cNvGrpSpPr/>
+        <p:nvPr/>
+      </p:nvGrpSpPr>
+      <p:grpSpPr>
+        <a:xfrm>
+          <a:off x="0" y="0"/>
+          <a:ext cx="0" cy="0"/>
+          <a:chOff x="0" y="0"/>
+          <a:chExt cx="0" cy="0"/>
+        </a:xfrm>
+      </p:grpSpPr>
+      <p:sp>
+        <p:nvSpPr>
+          <p:cNvPr id="2" name="Slide Image Placeholder 1"/>
+          <p:cNvSpPr>
+            <a:spLocks noGrp="1" noRot="1" noChangeAspect="1"/>
+          </p:cNvSpPr>
+          <p:nvPr>
+            <p:ph type="sldImg"/>
+          </p:nvPr>
+        </p:nvSpPr>
+        <p:spPr/>
+      </p:sp>
+      <p:sp>
+        <p:nvSpPr>
+          <p:cNvPr id="3" name="Notes Placeholder 2"/>
+          <p:cNvSpPr>
+            <a:spLocks noGrp="1"/>
+          </p:cNvSpPr>
+          <p:nvPr>
+            <p:ph type="body" idx="1"/>
+          </p:nvPr>
+        </p:nvSpPr>
+        <p:spPr/>
+        <p:txBody>
+          <a:bodyPr/>
+          <a:lstStyle/>
+          <a:p>
+            <a:endParaRPr lang="en-US"/>
+          </a:p>
+        </p:txBody>
+      </p:sp>
+      <p:sp>
+        <p:nvSpPr>
+          <p:cNvPr id="4" name="Slide Number Placeholder 3"/>
+          <p:cNvSpPr>
+            <a:spLocks noGrp="1"/>
+          </p:cNvSpPr>
+          <p:nvPr>
+            <p:ph type="sldNum" sz="quarter" idx="5"/>
+          </p:nvPr>
+        </p:nvSpPr>
+        <p:spPr/>
+        <p:txBody>
+          <a:bodyPr/>
+          <a:lstStyle/>
+          <a:p>
+            <a:fld id="{0A330D19-CF36-894D-9497-944CAF9A330D}" type="slidenum">
+              <a:rPr lang="en-US" smtClean="0"/>
+              <a:t>23</a:t>
+            </a:fld>
+            <a:endParaRPr lang="en-US"/>
+          </a:p>
+        </p:txBody>
+      </p:sp>
+    </p:spTree>
+    <p:extLst>
+      <p:ext uri="{BB962C8B-B14F-4D97-AF65-F5344CB8AC3E}">
+        <p14:creationId xmlns:p14="http://schemas.microsoft.com/office/powerpoint/2010/main" val="1311607454"/>
+      </p:ext>
+    </p:extLst>
+  </p:cSld>
+  <p:clrMapOvr>
+    <a:masterClrMapping/>
+  </p:clrMapOvr>
+</p:notes>
+</file>
+
+<file path=ppt/notesSlides/notesSlide22.xml><?xml version="1.0" encoding="utf-8"?>
+<p:notes xmlns:a="http://schemas.openxmlformats.org/drawingml/2006/main" xmlns:r="http://schemas.openxmlformats.org/officeDocument/2006/relationships" xmlns:p="http://schemas.openxmlformats.org/presentationml/2006/main">
+  <p:cSld>
+    <p:spTree>
+      <p:nvGrpSpPr>
+        <p:cNvPr id="1" name=""/>
+        <p:cNvGrpSpPr/>
+        <p:nvPr/>
+      </p:nvGrpSpPr>
+      <p:grpSpPr>
+        <a:xfrm>
+          <a:off x="0" y="0"/>
+          <a:ext cx="0" cy="0"/>
+          <a:chOff x="0" y="0"/>
+          <a:chExt cx="0" cy="0"/>
+        </a:xfrm>
+      </p:grpSpPr>
+      <p:sp>
+        <p:nvSpPr>
+          <p:cNvPr id="2" name="Slide Image Placeholder 1"/>
+          <p:cNvSpPr>
+            <a:spLocks noGrp="1" noRot="1" noChangeAspect="1"/>
+          </p:cNvSpPr>
+          <p:nvPr>
+            <p:ph type="sldImg"/>
+          </p:nvPr>
+        </p:nvSpPr>
+        <p:spPr/>
+      </p:sp>
+      <p:sp>
+        <p:nvSpPr>
+          <p:cNvPr id="3" name="Notes Placeholder 2"/>
+          <p:cNvSpPr>
+            <a:spLocks noGrp="1"/>
+          </p:cNvSpPr>
+          <p:nvPr>
+            <p:ph type="body" idx="1"/>
+          </p:nvPr>
+        </p:nvSpPr>
+        <p:spPr/>
+        <p:txBody>
+          <a:bodyPr/>
+          <a:lstStyle/>
+          <a:p>
+            <a:endParaRPr lang="en-US"/>
+          </a:p>
+        </p:txBody>
+      </p:sp>
+      <p:sp>
+        <p:nvSpPr>
+          <p:cNvPr id="4" name="Slide Number Placeholder 3"/>
+          <p:cNvSpPr>
+            <a:spLocks noGrp="1"/>
+          </p:cNvSpPr>
+          <p:nvPr>
+            <p:ph type="sldNum" sz="quarter" idx="5"/>
+          </p:nvPr>
+        </p:nvSpPr>
+        <p:spPr/>
+        <p:txBody>
+          <a:bodyPr/>
+          <a:lstStyle/>
+          <a:p>
+            <a:fld id="{0A330D19-CF36-894D-9497-944CAF9A330D}" type="slidenum">
+              <a:rPr lang="en-US" smtClean="0"/>
+              <a:t>24</a:t>
+            </a:fld>
+            <a:endParaRPr lang="en-US"/>
+          </a:p>
+        </p:txBody>
+      </p:sp>
+    </p:spTree>
+    <p:extLst>
+      <p:ext uri="{BB962C8B-B14F-4D97-AF65-F5344CB8AC3E}">
+        <p14:creationId xmlns:p14="http://schemas.microsoft.com/office/powerpoint/2010/main" val="1298249179"/>
+      </p:ext>
+    </p:extLst>
+  </p:cSld>
+  <p:clrMapOvr>
+    <a:masterClrMapping/>
+  </p:clrMapOvr>
+</p:notes>
+</file>
+
+<file path=ppt/notesSlides/notesSlide23.xml><?xml version="1.0" encoding="utf-8"?>
+<p:notes xmlns:a="http://schemas.openxmlformats.org/drawingml/2006/main" xmlns:r="http://schemas.openxmlformats.org/officeDocument/2006/relationships" xmlns:p="http://schemas.openxmlformats.org/presentationml/2006/main">
+  <p:cSld>
+    <p:spTree>
+      <p:nvGrpSpPr>
+        <p:cNvPr id="1" name=""/>
+        <p:cNvGrpSpPr/>
+        <p:nvPr/>
+      </p:nvGrpSpPr>
+      <p:grpSpPr>
+        <a:xfrm>
+          <a:off x="0" y="0"/>
+          <a:ext cx="0" cy="0"/>
+          <a:chOff x="0" y="0"/>
+          <a:chExt cx="0" cy="0"/>
+        </a:xfrm>
+      </p:grpSpPr>
+      <p:sp>
+        <p:nvSpPr>
+          <p:cNvPr id="2" name="Slide Image Placeholder 1"/>
+          <p:cNvSpPr>
+            <a:spLocks noGrp="1" noRot="1" noChangeAspect="1"/>
+          </p:cNvSpPr>
+          <p:nvPr>
+            <p:ph type="sldImg"/>
+          </p:nvPr>
+        </p:nvSpPr>
+        <p:spPr/>
+      </p:sp>
+      <p:sp>
+        <p:nvSpPr>
+          <p:cNvPr id="3" name="Notes Placeholder 2"/>
+          <p:cNvSpPr>
+            <a:spLocks noGrp="1"/>
+          </p:cNvSpPr>
+          <p:nvPr>
+            <p:ph type="body" idx="1"/>
+          </p:nvPr>
+        </p:nvSpPr>
+        <p:spPr/>
+        <p:txBody>
+          <a:bodyPr/>
+          <a:lstStyle/>
+          <a:p>
+            <a:endParaRPr lang="en-US"/>
+          </a:p>
+        </p:txBody>
+      </p:sp>
+      <p:sp>
+        <p:nvSpPr>
+          <p:cNvPr id="4" name="Slide Number Placeholder 3"/>
+          <p:cNvSpPr>
+            <a:spLocks noGrp="1"/>
+          </p:cNvSpPr>
+          <p:nvPr>
+            <p:ph type="sldNum" sz="quarter" idx="5"/>
+          </p:nvPr>
+        </p:nvSpPr>
+        <p:spPr/>
+        <p:txBody>
+          <a:bodyPr/>
+          <a:lstStyle/>
+          <a:p>
+            <a:fld id="{0A330D19-CF36-894D-9497-944CAF9A330D}" type="slidenum">
+              <a:rPr lang="en-US" smtClean="0"/>
+              <a:t>25</a:t>
+            </a:fld>
+            <a:endParaRPr lang="en-US"/>
+          </a:p>
+        </p:txBody>
+      </p:sp>
+    </p:spTree>
+    <p:extLst>
+      <p:ext uri="{BB962C8B-B14F-4D97-AF65-F5344CB8AC3E}">
+        <p14:creationId xmlns:p14="http://schemas.microsoft.com/office/powerpoint/2010/main" val="3645033688"/>
+      </p:ext>
+    </p:extLst>
+  </p:cSld>
+  <p:clrMapOvr>
+    <a:masterClrMapping/>
+  </p:clrMapOvr>
+</p:notes>
+</file>
+
+<file path=ppt/notesSlides/notesSlide24.xml><?xml version="1.0" encoding="utf-8"?>
+<p:notes xmlns:a="http://schemas.openxmlformats.org/drawingml/2006/main" xmlns:r="http://schemas.openxmlformats.org/officeDocument/2006/relationships" xmlns:p="http://schemas.openxmlformats.org/presentationml/2006/main">
+  <p:cSld>
+    <p:spTree>
+      <p:nvGrpSpPr>
+        <p:cNvPr id="1" name=""/>
+        <p:cNvGrpSpPr/>
+        <p:nvPr/>
+      </p:nvGrpSpPr>
+      <p:grpSpPr>
+        <a:xfrm>
+          <a:off x="0" y="0"/>
+          <a:ext cx="0" cy="0"/>
+          <a:chOff x="0" y="0"/>
+          <a:chExt cx="0" cy="0"/>
+        </a:xfrm>
+      </p:grpSpPr>
+      <p:sp>
+        <p:nvSpPr>
+          <p:cNvPr id="2" name="Slide Image Placeholder 1"/>
+          <p:cNvSpPr>
+            <a:spLocks noGrp="1" noRot="1" noChangeAspect="1"/>
+          </p:cNvSpPr>
+          <p:nvPr>
+            <p:ph type="sldImg"/>
+          </p:nvPr>
+        </p:nvSpPr>
+        <p:spPr/>
+      </p:sp>
+      <p:sp>
+        <p:nvSpPr>
+          <p:cNvPr id="3" name="Notes Placeholder 2"/>
+          <p:cNvSpPr>
+            <a:spLocks noGrp="1"/>
+          </p:cNvSpPr>
+          <p:nvPr>
+            <p:ph type="body" idx="1"/>
+          </p:nvPr>
+        </p:nvSpPr>
+        <p:spPr/>
+        <p:txBody>
+          <a:bodyPr/>
+          <a:lstStyle/>
+          <a:p>
+            <a:endParaRPr lang="en-US"/>
+          </a:p>
+        </p:txBody>
+      </p:sp>
+      <p:sp>
+        <p:nvSpPr>
+          <p:cNvPr id="4" name="Slide Number Placeholder 3"/>
+          <p:cNvSpPr>
+            <a:spLocks noGrp="1"/>
+          </p:cNvSpPr>
+          <p:nvPr>
+            <p:ph type="sldNum" sz="quarter" idx="5"/>
+          </p:nvPr>
+        </p:nvSpPr>
+        <p:spPr/>
+        <p:txBody>
+          <a:bodyPr/>
+          <a:lstStyle/>
+          <a:p>
+            <a:fld id="{0A330D19-CF36-894D-9497-944CAF9A330D}" type="slidenum">
+              <a:rPr lang="en-US" smtClean="0"/>
+              <a:t>26</a:t>
+            </a:fld>
+            <a:endParaRPr lang="en-US"/>
+          </a:p>
+        </p:txBody>
+      </p:sp>
+    </p:spTree>
+    <p:extLst>
+      <p:ext uri="{BB962C8B-B14F-4D97-AF65-F5344CB8AC3E}">
+        <p14:creationId xmlns:p14="http://schemas.microsoft.com/office/powerpoint/2010/main" val="4170278812"/>
+      </p:ext>
+    </p:extLst>
+  </p:cSld>
+  <p:clrMapOvr>
+    <a:masterClrMapping/>
+  </p:clrMapOvr>
+</p:notes>
+</file>
+
+<file path=ppt/notesSlides/notesSlide25.xml><?xml version="1.0" encoding="utf-8"?>
+<p:notes xmlns:a="http://schemas.openxmlformats.org/drawingml/2006/main" xmlns:r="http://schemas.openxmlformats.org/officeDocument/2006/relationships" xmlns:p="http://schemas.openxmlformats.org/presentationml/2006/main">
+  <p:cSld>
+    <p:spTree>
+      <p:nvGrpSpPr>
+        <p:cNvPr id="1" name=""/>
+        <p:cNvGrpSpPr/>
+        <p:nvPr/>
+      </p:nvGrpSpPr>
+      <p:grpSpPr>
+        <a:xfrm>
+          <a:off x="0" y="0"/>
+          <a:ext cx="0" cy="0"/>
+          <a:chOff x="0" y="0"/>
+          <a:chExt cx="0" cy="0"/>
+        </a:xfrm>
+      </p:grpSpPr>
+      <p:sp>
+        <p:nvSpPr>
+          <p:cNvPr id="2" name="Slide Image Placeholder 1"/>
+          <p:cNvSpPr>
+            <a:spLocks noGrp="1" noRot="1" noChangeAspect="1"/>
+          </p:cNvSpPr>
+          <p:nvPr>
+            <p:ph type="sldImg"/>
+          </p:nvPr>
+        </p:nvSpPr>
+        <p:spPr/>
+      </p:sp>
+      <p:sp>
+        <p:nvSpPr>
+          <p:cNvPr id="3" name="Notes Placeholder 2"/>
+          <p:cNvSpPr>
+            <a:spLocks noGrp="1"/>
+          </p:cNvSpPr>
+          <p:nvPr>
+            <p:ph type="body" idx="1"/>
+          </p:nvPr>
+        </p:nvSpPr>
+        <p:spPr/>
+        <p:txBody>
+          <a:bodyPr/>
+          <a:lstStyle/>
+          <a:p>
+            <a:endParaRPr lang="en-US"/>
+          </a:p>
+        </p:txBody>
+      </p:sp>
+      <p:sp>
+        <p:nvSpPr>
+          <p:cNvPr id="4" name="Slide Number Placeholder 3"/>
+          <p:cNvSpPr>
+            <a:spLocks noGrp="1"/>
+          </p:cNvSpPr>
+          <p:nvPr>
+            <p:ph type="sldNum" sz="quarter" idx="5"/>
+          </p:nvPr>
+        </p:nvSpPr>
+        <p:spPr/>
+        <p:txBody>
+          <a:bodyPr/>
+          <a:lstStyle/>
+          <a:p>
+            <a:fld id="{0A330D19-CF36-894D-9497-944CAF9A330D}" type="slidenum">
+              <a:rPr lang="en-US" smtClean="0"/>
+              <a:t>27</a:t>
+            </a:fld>
+            <a:endParaRPr lang="en-US"/>
+          </a:p>
+        </p:txBody>
+      </p:sp>
+    </p:spTree>
+    <p:extLst>
+      <p:ext uri="{BB962C8B-B14F-4D97-AF65-F5344CB8AC3E}">
+        <p14:creationId xmlns:p14="http://schemas.microsoft.com/office/powerpoint/2010/main" val="1848265922"/>
+      </p:ext>
+    </p:extLst>
+  </p:cSld>
+  <p:clrMapOvr>
+    <a:masterClrMapping/>
+  </p:clrMapOvr>
+</p:notes>
+</file>
+
+<file path=ppt/notesSlides/notesSlide26.xml><?xml version="1.0" encoding="utf-8"?>
+<p:notes xmlns:a="http://schemas.openxmlformats.org/drawingml/2006/main" xmlns:r="http://schemas.openxmlformats.org/officeDocument/2006/relationships" xmlns:p="http://schemas.openxmlformats.org/presentationml/2006/main">
+  <p:cSld>
+    <p:spTree>
+      <p:nvGrpSpPr>
+        <p:cNvPr id="1" name=""/>
+        <p:cNvGrpSpPr/>
+        <p:nvPr/>
+      </p:nvGrpSpPr>
+      <p:grpSpPr>
+        <a:xfrm>
+          <a:off x="0" y="0"/>
+          <a:ext cx="0" cy="0"/>
+          <a:chOff x="0" y="0"/>
+          <a:chExt cx="0" cy="0"/>
+        </a:xfrm>
+      </p:grpSpPr>
+      <p:sp>
+        <p:nvSpPr>
+          <p:cNvPr id="2" name="Slide Image Placeholder 1"/>
+          <p:cNvSpPr>
+            <a:spLocks noGrp="1" noRot="1" noChangeAspect="1"/>
+          </p:cNvSpPr>
+          <p:nvPr>
+            <p:ph type="sldImg"/>
+          </p:nvPr>
+        </p:nvSpPr>
+        <p:spPr/>
+      </p:sp>
+      <p:sp>
+        <p:nvSpPr>
+          <p:cNvPr id="3" name="Notes Placeholder 2"/>
+          <p:cNvSpPr>
+            <a:spLocks noGrp="1"/>
+          </p:cNvSpPr>
+          <p:nvPr>
+            <p:ph type="body" idx="1"/>
+          </p:nvPr>
+        </p:nvSpPr>
+        <p:spPr/>
+        <p:txBody>
+          <a:bodyPr/>
+          <a:lstStyle/>
+          <a:p>
+            <a:endParaRPr lang="en-US"/>
+          </a:p>
+        </p:txBody>
+      </p:sp>
+      <p:sp>
+        <p:nvSpPr>
+          <p:cNvPr id="4" name="Slide Number Placeholder 3"/>
+          <p:cNvSpPr>
+            <a:spLocks noGrp="1"/>
+          </p:cNvSpPr>
+          <p:nvPr>
+            <p:ph type="sldNum" sz="quarter" idx="5"/>
+          </p:nvPr>
+        </p:nvSpPr>
+        <p:spPr/>
+        <p:txBody>
+          <a:bodyPr/>
+          <a:lstStyle/>
+          <a:p>
+            <a:fld id="{0A330D19-CF36-894D-9497-944CAF9A330D}" type="slidenum">
+              <a:rPr lang="en-US" smtClean="0"/>
+              <a:t>28</a:t>
+            </a:fld>
+            <a:endParaRPr lang="en-US"/>
+          </a:p>
+        </p:txBody>
+      </p:sp>
+    </p:spTree>
+    <p:extLst>
+      <p:ext uri="{BB962C8B-B14F-4D97-AF65-F5344CB8AC3E}">
+        <p14:creationId xmlns:p14="http://schemas.microsoft.com/office/powerpoint/2010/main" val="3786264537"/>
+      </p:ext>
+    </p:extLst>
+  </p:cSld>
+  <p:clrMapOvr>
+    <a:masterClrMapping/>
+  </p:clrMapOvr>
+</p:notes>
+</file>
+
+<file path=ppt/notesSlides/notesSlide27.xml><?xml version="1.0" encoding="utf-8"?>
+<p:notes xmlns:a="http://schemas.openxmlformats.org/drawingml/2006/main" xmlns:r="http://schemas.openxmlformats.org/officeDocument/2006/relationships" xmlns:p="http://schemas.openxmlformats.org/presentationml/2006/main">
+  <p:cSld>
+    <p:spTree>
+      <p:nvGrpSpPr>
+        <p:cNvPr id="1" name=""/>
+        <p:cNvGrpSpPr/>
+        <p:nvPr/>
+      </p:nvGrpSpPr>
+      <p:grpSpPr>
+        <a:xfrm>
+          <a:off x="0" y="0"/>
+          <a:ext cx="0" cy="0"/>
+          <a:chOff x="0" y="0"/>
+          <a:chExt cx="0" cy="0"/>
+        </a:xfrm>
+      </p:grpSpPr>
+      <p:sp>
+        <p:nvSpPr>
+          <p:cNvPr id="2" name="Slide Image Placeholder 1"/>
+          <p:cNvSpPr>
+            <a:spLocks noGrp="1" noRot="1" noChangeAspect="1"/>
+          </p:cNvSpPr>
+          <p:nvPr>
+            <p:ph type="sldImg"/>
+          </p:nvPr>
+        </p:nvSpPr>
+        <p:spPr/>
+      </p:sp>
+      <p:sp>
+        <p:nvSpPr>
+          <p:cNvPr id="3" name="Notes Placeholder 2"/>
+          <p:cNvSpPr>
+            <a:spLocks noGrp="1"/>
+          </p:cNvSpPr>
+          <p:nvPr>
+            <p:ph type="body" idx="1"/>
+          </p:nvPr>
+        </p:nvSpPr>
+        <p:spPr/>
+        <p:txBody>
+          <a:bodyPr/>
+          <a:lstStyle/>
+          <a:p>
+            <a:endParaRPr lang="en-US"/>
+          </a:p>
+        </p:txBody>
+      </p:sp>
+      <p:sp>
+        <p:nvSpPr>
+          <p:cNvPr id="4" name="Slide Number Placeholder 3"/>
+          <p:cNvSpPr>
+            <a:spLocks noGrp="1"/>
+          </p:cNvSpPr>
+          <p:nvPr>
+            <p:ph type="sldNum" sz="quarter" idx="5"/>
+          </p:nvPr>
+        </p:nvSpPr>
+        <p:spPr/>
+        <p:txBody>
+          <a:bodyPr/>
+          <a:lstStyle/>
+          <a:p>
+            <a:fld id="{0A330D19-CF36-894D-9497-944CAF9A330D}" type="slidenum">
+              <a:rPr lang="en-US" smtClean="0"/>
+              <a:t>29</a:t>
+            </a:fld>
+            <a:endParaRPr lang="en-US"/>
+          </a:p>
+        </p:txBody>
+      </p:sp>
+    </p:spTree>
+    <p:extLst>
+      <p:ext uri="{BB962C8B-B14F-4D97-AF65-F5344CB8AC3E}">
+        <p14:creationId xmlns:p14="http://schemas.microsoft.com/office/powerpoint/2010/main" val="4085903660"/>
+      </p:ext>
+    </p:extLst>
+  </p:cSld>
+  <p:clrMapOvr>
+    <a:masterClrMapping/>
+  </p:clrMapOvr>
+</p:notes>
+</file>
+
+<file path=ppt/notesSlides/notesSlide28.xml><?xml version="1.0" encoding="utf-8"?>
+<p:notes xmlns:a="http://schemas.openxmlformats.org/drawingml/2006/main" xmlns:r="http://schemas.openxmlformats.org/officeDocument/2006/relationships" xmlns:p="http://schemas.openxmlformats.org/presentationml/2006/main">
+  <p:cSld>
+    <p:spTree>
+      <p:nvGrpSpPr>
+        <p:cNvPr id="1" name=""/>
+        <p:cNvGrpSpPr/>
+        <p:nvPr/>
+      </p:nvGrpSpPr>
+      <p:grpSpPr>
+        <a:xfrm>
+          <a:off x="0" y="0"/>
+          <a:ext cx="0" cy="0"/>
+          <a:chOff x="0" y="0"/>
+          <a:chExt cx="0" cy="0"/>
+        </a:xfrm>
+      </p:grpSpPr>
+      <p:sp>
+        <p:nvSpPr>
+          <p:cNvPr id="2" name="Slide Image Placeholder 1"/>
+          <p:cNvSpPr>
+            <a:spLocks noGrp="1" noRot="1" noChangeAspect="1"/>
+          </p:cNvSpPr>
+          <p:nvPr>
+            <p:ph type="sldImg"/>
+          </p:nvPr>
+        </p:nvSpPr>
+        <p:spPr/>
+      </p:sp>
+      <p:sp>
+        <p:nvSpPr>
+          <p:cNvPr id="3" name="Notes Placeholder 2"/>
+          <p:cNvSpPr>
+            <a:spLocks noGrp="1"/>
+          </p:cNvSpPr>
+          <p:nvPr>
+            <p:ph type="body" idx="1"/>
+          </p:nvPr>
+        </p:nvSpPr>
+        <p:spPr/>
+        <p:txBody>
+          <a:bodyPr/>
+          <a:lstStyle/>
+          <a:p>
+            <a:endParaRPr lang="en-US"/>
+          </a:p>
+        </p:txBody>
+      </p:sp>
+      <p:sp>
+        <p:nvSpPr>
+          <p:cNvPr id="4" name="Slide Number Placeholder 3"/>
+          <p:cNvSpPr>
+            <a:spLocks noGrp="1"/>
+          </p:cNvSpPr>
+          <p:nvPr>
+            <p:ph type="sldNum" sz="quarter" idx="5"/>
+          </p:nvPr>
+        </p:nvSpPr>
+        <p:spPr/>
+        <p:txBody>
+          <a:bodyPr/>
+          <a:lstStyle/>
+          <a:p>
+            <a:fld id="{0A330D19-CF36-894D-9497-944CAF9A330D}" type="slidenum">
+              <a:rPr lang="en-US" smtClean="0"/>
+              <a:t>30</a:t>
+            </a:fld>
+            <a:endParaRPr lang="en-US"/>
+          </a:p>
+        </p:txBody>
+      </p:sp>
+    </p:spTree>
+    <p:extLst>
+      <p:ext uri="{BB962C8B-B14F-4D97-AF65-F5344CB8AC3E}">
+        <p14:creationId xmlns:p14="http://schemas.microsoft.com/office/powerpoint/2010/main" val="680971071"/>
+      </p:ext>
+    </p:extLst>
+  </p:cSld>
+  <p:clrMapOvr>
+    <a:masterClrMapping/>
+  </p:clrMapOvr>
+</p:notes>
+</file>
+
+<file path=ppt/notesSlides/notesSlide29.xml><?xml version="1.0" encoding="utf-8"?>
+<p:notes xmlns:a="http://schemas.openxmlformats.org/drawingml/2006/main" xmlns:r="http://schemas.openxmlformats.org/officeDocument/2006/relationships" xmlns:p="http://schemas.openxmlformats.org/presentationml/2006/main">
+  <p:cSld>
+    <p:spTree>
+      <p:nvGrpSpPr>
+        <p:cNvPr id="1" name=""/>
+        <p:cNvGrpSpPr/>
+        <p:nvPr/>
+      </p:nvGrpSpPr>
+      <p:grpSpPr>
+        <a:xfrm>
+          <a:off x="0" y="0"/>
+          <a:ext cx="0" cy="0"/>
+          <a:chOff x="0" y="0"/>
+          <a:chExt cx="0" cy="0"/>
+        </a:xfrm>
+      </p:grpSpPr>
+      <p:sp>
+        <p:nvSpPr>
+          <p:cNvPr id="2" name="Slide Image Placeholder 1"/>
+          <p:cNvSpPr>
+            <a:spLocks noGrp="1" noRot="1" noChangeAspect="1"/>
+          </p:cNvSpPr>
+          <p:nvPr>
+            <p:ph type="sldImg"/>
+          </p:nvPr>
+        </p:nvSpPr>
+        <p:spPr/>
+      </p:sp>
+      <p:sp>
+        <p:nvSpPr>
+          <p:cNvPr id="3" name="Notes Placeholder 2"/>
+          <p:cNvSpPr>
+            <a:spLocks noGrp="1"/>
+          </p:cNvSpPr>
+          <p:nvPr>
+            <p:ph type="body" idx="1"/>
+          </p:nvPr>
+        </p:nvSpPr>
+        <p:spPr/>
+        <p:txBody>
+          <a:bodyPr/>
+          <a:lstStyle/>
+          <a:p>
+            <a:endParaRPr lang="en-US"/>
+          </a:p>
+        </p:txBody>
+      </p:sp>
+      <p:sp>
+        <p:nvSpPr>
+          <p:cNvPr id="4" name="Slide Number Placeholder 3"/>
+          <p:cNvSpPr>
+            <a:spLocks noGrp="1"/>
+          </p:cNvSpPr>
+          <p:nvPr>
+            <p:ph type="sldNum" sz="quarter" idx="5"/>
+          </p:nvPr>
+        </p:nvSpPr>
+        <p:spPr/>
+        <p:txBody>
+          <a:bodyPr/>
+          <a:lstStyle/>
+          <a:p>
+            <a:fld id="{0A330D19-CF36-894D-9497-944CAF9A330D}" type="slidenum">
+              <a:rPr lang="en-US" smtClean="0"/>
+              <a:t>31</a:t>
+            </a:fld>
+            <a:endParaRPr lang="en-US"/>
+          </a:p>
+        </p:txBody>
+      </p:sp>
+    </p:spTree>
+    <p:extLst>
+      <p:ext uri="{BB962C8B-B14F-4D97-AF65-F5344CB8AC3E}">
+        <p14:creationId xmlns:p14="http://schemas.microsoft.com/office/powerpoint/2010/main" val="927657104"/>
+      </p:ext>
+    </p:extLst>
+  </p:cSld>
+  <p:clrMapOvr>
+    <a:masterClrMapping/>
+  </p:clrMapOvr>
+</p:notes>
+</file>
+
+<file path=ppt/notesSlides/notesSlide3.xml><?xml version="1.0" encoding="utf-8"?>
+<p:notes xmlns:a="http://schemas.openxmlformats.org/drawingml/2006/main" xmlns:r="http://schemas.openxmlformats.org/officeDocument/2006/relationships" xmlns:p="http://schemas.openxmlformats.org/presentationml/2006/main">
+  <p:cSld>
+    <p:spTree>
+      <p:nvGrpSpPr>
+        <p:cNvPr id="1" name=""/>
+        <p:cNvGrpSpPr/>
+        <p:nvPr/>
+      </p:nvGrpSpPr>
+      <p:grpSpPr>
+        <a:xfrm>
+          <a:off x="0" y="0"/>
+          <a:ext cx="0" cy="0"/>
+          <a:chOff x="0" y="0"/>
+          <a:chExt cx="0" cy="0"/>
+        </a:xfrm>
+      </p:grpSpPr>
+      <p:sp>
+        <p:nvSpPr>
+          <p:cNvPr id="2" name="Slide Image Placeholder 1"/>
+          <p:cNvSpPr>
+            <a:spLocks noGrp="1" noRot="1" noChangeAspect="1"/>
+          </p:cNvSpPr>
+          <p:nvPr>
+            <p:ph type="sldImg"/>
+          </p:nvPr>
+        </p:nvSpPr>
+        <p:spPr/>
+      </p:sp>
+      <p:sp>
+        <p:nvSpPr>
+          <p:cNvPr id="3" name="Notes Placeholder 2"/>
+          <p:cNvSpPr>
+            <a:spLocks noGrp="1"/>
+          </p:cNvSpPr>
+          <p:nvPr>
+            <p:ph type="body" idx="1"/>
+          </p:nvPr>
+        </p:nvSpPr>
+        <p:spPr/>
+        <p:txBody>
+          <a:bodyPr/>
+          <a:lstStyle/>
+          <a:p>
+            <a:endParaRPr lang="en-US"/>
+          </a:p>
+        </p:txBody>
+      </p:sp>
+      <p:sp>
+        <p:nvSpPr>
+          <p:cNvPr id="4" name="Slide Number Placeholder 3"/>
+          <p:cNvSpPr>
+            <a:spLocks noGrp="1"/>
+          </p:cNvSpPr>
+          <p:nvPr>
+            <p:ph type="sldNum" sz="quarter" idx="5"/>
+          </p:nvPr>
+        </p:nvSpPr>
+        <p:spPr/>
+        <p:txBody>
+          <a:bodyPr/>
+          <a:lstStyle/>
+          <a:p>
+            <a:fld id="{0A330D19-CF36-894D-9497-944CAF9A330D}" type="slidenum">
+              <a:rPr lang="en-US" smtClean="0"/>
+              <a:t>5</a:t>
+            </a:fld>
+            <a:endParaRPr lang="en-US"/>
+          </a:p>
+        </p:txBody>
+      </p:sp>
+    </p:spTree>
+    <p:extLst>
+      <p:ext uri="{BB962C8B-B14F-4D97-AF65-F5344CB8AC3E}">
+        <p14:creationId xmlns:p14="http://schemas.microsoft.com/office/powerpoint/2010/main" val="2713591357"/>
+      </p:ext>
+    </p:extLst>
+  </p:cSld>
+  <p:clrMapOvr>
+    <a:masterClrMapping/>
+  </p:clrMapOvr>
+</p:notes>
+</file>
+
+<file path=ppt/notesSlides/notesSlide30.xml><?xml version="1.0" encoding="utf-8"?>
+<p:notes xmlns:a="http://schemas.openxmlformats.org/drawingml/2006/main" xmlns:r="http://schemas.openxmlformats.org/officeDocument/2006/relationships" xmlns:p="http://schemas.openxmlformats.org/presentationml/2006/main">
+  <p:cSld>
+    <p:spTree>
+      <p:nvGrpSpPr>
+        <p:cNvPr id="1" name=""/>
+        <p:cNvGrpSpPr/>
+        <p:nvPr/>
+      </p:nvGrpSpPr>
+      <p:grpSpPr>
+        <a:xfrm>
+          <a:off x="0" y="0"/>
+          <a:ext cx="0" cy="0"/>
+          <a:chOff x="0" y="0"/>
+          <a:chExt cx="0" cy="0"/>
+        </a:xfrm>
+      </p:grpSpPr>
+      <p:sp>
+        <p:nvSpPr>
+          <p:cNvPr id="2" name="Slide Image Placeholder 1"/>
+          <p:cNvSpPr>
+            <a:spLocks noGrp="1" noRot="1" noChangeAspect="1"/>
+          </p:cNvSpPr>
+          <p:nvPr>
+            <p:ph type="sldImg"/>
+          </p:nvPr>
+        </p:nvSpPr>
+        <p:spPr/>
+      </p:sp>
+      <p:sp>
+        <p:nvSpPr>
+          <p:cNvPr id="3" name="Notes Placeholder 2"/>
+          <p:cNvSpPr>
+            <a:spLocks noGrp="1"/>
+          </p:cNvSpPr>
+          <p:nvPr>
+            <p:ph type="body" idx="1"/>
+          </p:nvPr>
+        </p:nvSpPr>
+        <p:spPr/>
+        <p:txBody>
+          <a:bodyPr/>
+          <a:lstStyle/>
+          <a:p>
+            <a:endParaRPr lang="en-US"/>
+          </a:p>
+        </p:txBody>
+      </p:sp>
+      <p:sp>
+        <p:nvSpPr>
+          <p:cNvPr id="4" name="Slide Number Placeholder 3"/>
+          <p:cNvSpPr>
+            <a:spLocks noGrp="1"/>
+          </p:cNvSpPr>
+          <p:nvPr>
+            <p:ph type="sldNum" sz="quarter" idx="5"/>
+          </p:nvPr>
+        </p:nvSpPr>
+        <p:spPr/>
+        <p:txBody>
+          <a:bodyPr/>
+          <a:lstStyle/>
+          <a:p>
+            <a:fld id="{0A330D19-CF36-894D-9497-944CAF9A330D}" type="slidenum">
+              <a:rPr lang="en-US" smtClean="0"/>
+              <a:t>32</a:t>
+            </a:fld>
+            <a:endParaRPr lang="en-US"/>
+          </a:p>
+        </p:txBody>
+      </p:sp>
+    </p:spTree>
+    <p:extLst>
+      <p:ext uri="{BB962C8B-B14F-4D97-AF65-F5344CB8AC3E}">
+        <p14:creationId xmlns:p14="http://schemas.microsoft.com/office/powerpoint/2010/main" val="3128593625"/>
+      </p:ext>
+    </p:extLst>
+  </p:cSld>
+  <p:clrMapOvr>
+    <a:masterClrMapping/>
+  </p:clrMapOvr>
+</p:notes>
+</file>
+
+<file path=ppt/notesSlides/notesSlide4.xml><?xml version="1.0" encoding="utf-8"?>
+<p:notes xmlns:a="http://schemas.openxmlformats.org/drawingml/2006/main" xmlns:r="http://schemas.openxmlformats.org/officeDocument/2006/relationships" xmlns:p="http://schemas.openxmlformats.org/presentationml/2006/main">
+  <p:cSld>
+    <p:spTree>
+      <p:nvGrpSpPr>
+        <p:cNvPr id="1" name=""/>
+        <p:cNvGrpSpPr/>
+        <p:nvPr/>
+      </p:nvGrpSpPr>
+      <p:grpSpPr>
+        <a:xfrm>
+          <a:off x="0" y="0"/>
+          <a:ext cx="0" cy="0"/>
+          <a:chOff x="0" y="0"/>
+          <a:chExt cx="0" cy="0"/>
+        </a:xfrm>
+      </p:grpSpPr>
+      <p:sp>
+        <p:nvSpPr>
+          <p:cNvPr id="2" name="Slide Image Placeholder 1"/>
+          <p:cNvSpPr>
+            <a:spLocks noGrp="1" noRot="1" noChangeAspect="1"/>
+          </p:cNvSpPr>
+          <p:nvPr>
+            <p:ph type="sldImg"/>
+          </p:nvPr>
+        </p:nvSpPr>
+        <p:spPr/>
+      </p:sp>
+      <p:sp>
+        <p:nvSpPr>
+          <p:cNvPr id="3" name="Notes Placeholder 2"/>
+          <p:cNvSpPr>
+            <a:spLocks noGrp="1"/>
+          </p:cNvSpPr>
+          <p:nvPr>
+            <p:ph type="body" idx="1"/>
+          </p:nvPr>
+        </p:nvSpPr>
+        <p:spPr/>
+        <p:txBody>
+          <a:bodyPr/>
+          <a:lstStyle/>
+          <a:p>
+            <a:endParaRPr lang="en-US"/>
+          </a:p>
+        </p:txBody>
+      </p:sp>
+      <p:sp>
+        <p:nvSpPr>
+          <p:cNvPr id="4" name="Slide Number Placeholder 3"/>
+          <p:cNvSpPr>
+            <a:spLocks noGrp="1"/>
+          </p:cNvSpPr>
+          <p:nvPr>
+            <p:ph type="sldNum" sz="quarter" idx="5"/>
+          </p:nvPr>
+        </p:nvSpPr>
+        <p:spPr/>
+        <p:txBody>
+          <a:bodyPr/>
+          <a:lstStyle/>
+          <a:p>
+            <a:fld id="{0A330D19-CF36-894D-9497-944CAF9A330D}" type="slidenum">
+              <a:rPr lang="en-US" smtClean="0"/>
+              <a:t>6</a:t>
+            </a:fld>
+            <a:endParaRPr lang="en-US"/>
+          </a:p>
+        </p:txBody>
+      </p:sp>
+    </p:spTree>
+    <p:extLst>
+      <p:ext uri="{BB962C8B-B14F-4D97-AF65-F5344CB8AC3E}">
+        <p14:creationId xmlns:p14="http://schemas.microsoft.com/office/powerpoint/2010/main" val="4286984368"/>
+      </p:ext>
+    </p:extLst>
+  </p:cSld>
+  <p:clrMapOvr>
+    <a:masterClrMapping/>
+  </p:clrMapOvr>
+</p:notes>
+</file>
+
+<file path=ppt/notesSlides/notesSlide5.xml><?xml version="1.0" encoding="utf-8"?>
+<p:notes xmlns:a="http://schemas.openxmlformats.org/drawingml/2006/main" xmlns:r="http://schemas.openxmlformats.org/officeDocument/2006/relationships" xmlns:p="http://schemas.openxmlformats.org/presentationml/2006/main">
+  <p:cSld>
+    <p:spTree>
+      <p:nvGrpSpPr>
+        <p:cNvPr id="1" name=""/>
+        <p:cNvGrpSpPr/>
+        <p:nvPr/>
+      </p:nvGrpSpPr>
+      <p:grpSpPr>
+        <a:xfrm>
+          <a:off x="0" y="0"/>
+          <a:ext cx="0" cy="0"/>
+          <a:chOff x="0" y="0"/>
+          <a:chExt cx="0" cy="0"/>
+        </a:xfrm>
+      </p:grpSpPr>
+      <p:sp>
+        <p:nvSpPr>
+          <p:cNvPr id="2" name="Slide Image Placeholder 1"/>
+          <p:cNvSpPr>
+            <a:spLocks noGrp="1" noRot="1" noChangeAspect="1"/>
+          </p:cNvSpPr>
+          <p:nvPr>
+            <p:ph type="sldImg"/>
+          </p:nvPr>
+        </p:nvSpPr>
+        <p:spPr/>
+      </p:sp>
+      <p:sp>
+        <p:nvSpPr>
+          <p:cNvPr id="3" name="Notes Placeholder 2"/>
+          <p:cNvSpPr>
+            <a:spLocks noGrp="1"/>
+          </p:cNvSpPr>
+          <p:nvPr>
+            <p:ph type="body" idx="1"/>
+          </p:nvPr>
+        </p:nvSpPr>
+        <p:spPr/>
+        <p:txBody>
+          <a:bodyPr/>
+          <a:lstStyle/>
+          <a:p>
+            <a:endParaRPr lang="en-US"/>
+          </a:p>
+        </p:txBody>
+      </p:sp>
+      <p:sp>
+        <p:nvSpPr>
+          <p:cNvPr id="4" name="Slide Number Placeholder 3"/>
+          <p:cNvSpPr>
+            <a:spLocks noGrp="1"/>
+          </p:cNvSpPr>
+          <p:nvPr>
+            <p:ph type="sldNum" sz="quarter" idx="5"/>
+          </p:nvPr>
+        </p:nvSpPr>
+        <p:spPr/>
+        <p:txBody>
+          <a:bodyPr/>
+          <a:lstStyle/>
+          <a:p>
+            <a:fld id="{0A330D19-CF36-894D-9497-944CAF9A330D}" type="slidenum">
+              <a:rPr lang="en-US" smtClean="0"/>
+              <a:t>7</a:t>
+            </a:fld>
+            <a:endParaRPr lang="en-US"/>
+          </a:p>
+        </p:txBody>
+      </p:sp>
+    </p:spTree>
+    <p:extLst>
+      <p:ext uri="{BB962C8B-B14F-4D97-AF65-F5344CB8AC3E}">
+        <p14:creationId xmlns:p14="http://schemas.microsoft.com/office/powerpoint/2010/main" val="3418946004"/>
+      </p:ext>
+    </p:extLst>
+  </p:cSld>
+  <p:clrMapOvr>
+    <a:masterClrMapping/>
+  </p:clrMapOvr>
+</p:notes>
+</file>
+
+<file path=ppt/notesSlides/notesSlide6.xml><?xml version="1.0" encoding="utf-8"?>
+<p:notes xmlns:a="http://schemas.openxmlformats.org/drawingml/2006/main" xmlns:r="http://schemas.openxmlformats.org/officeDocument/2006/relationships" xmlns:p="http://schemas.openxmlformats.org/presentationml/2006/main">
+  <p:cSld>
+    <p:spTree>
+      <p:nvGrpSpPr>
+        <p:cNvPr id="1" name=""/>
+        <p:cNvGrpSpPr/>
+        <p:nvPr/>
+      </p:nvGrpSpPr>
+      <p:grpSpPr>
+        <a:xfrm>
+          <a:off x="0" y="0"/>
+          <a:ext cx="0" cy="0"/>
+          <a:chOff x="0" y="0"/>
+          <a:chExt cx="0" cy="0"/>
+        </a:xfrm>
+      </p:grpSpPr>
+      <p:sp>
+        <p:nvSpPr>
+          <p:cNvPr id="2" name="Slide Image Placeholder 1"/>
+          <p:cNvSpPr>
+            <a:spLocks noGrp="1" noRot="1" noChangeAspect="1"/>
+          </p:cNvSpPr>
+          <p:nvPr>
+            <p:ph type="sldImg"/>
+          </p:nvPr>
+        </p:nvSpPr>
+        <p:spPr/>
+      </p:sp>
+      <p:sp>
+        <p:nvSpPr>
+          <p:cNvPr id="3" name="Notes Placeholder 2"/>
+          <p:cNvSpPr>
+            <a:spLocks noGrp="1"/>
+          </p:cNvSpPr>
+          <p:nvPr>
+            <p:ph type="body" idx="1"/>
+          </p:nvPr>
+        </p:nvSpPr>
+        <p:spPr/>
+        <p:txBody>
+          <a:bodyPr/>
+          <a:lstStyle/>
+          <a:p>
+            <a:endParaRPr lang="en-US"/>
+          </a:p>
+        </p:txBody>
+      </p:sp>
+      <p:sp>
+        <p:nvSpPr>
+          <p:cNvPr id="4" name="Slide Number Placeholder 3"/>
+          <p:cNvSpPr>
+            <a:spLocks noGrp="1"/>
+          </p:cNvSpPr>
+          <p:nvPr>
+            <p:ph type="sldNum" sz="quarter" idx="5"/>
+          </p:nvPr>
+        </p:nvSpPr>
+        <p:spPr/>
+        <p:txBody>
+          <a:bodyPr/>
+          <a:lstStyle/>
+          <a:p>
+            <a:fld id="{0A330D19-CF36-894D-9497-944CAF9A330D}" type="slidenum">
+              <a:rPr lang="en-US" smtClean="0"/>
+              <a:t>8</a:t>
+            </a:fld>
+            <a:endParaRPr lang="en-US"/>
+          </a:p>
+        </p:txBody>
+      </p:sp>
+    </p:spTree>
+    <p:extLst>
+      <p:ext uri="{BB962C8B-B14F-4D97-AF65-F5344CB8AC3E}">
+        <p14:creationId xmlns:p14="http://schemas.microsoft.com/office/powerpoint/2010/main" val="1146040035"/>
+      </p:ext>
+    </p:extLst>
+  </p:cSld>
+  <p:clrMapOvr>
+    <a:masterClrMapping/>
+  </p:clrMapOvr>
+</p:notes>
+</file>
+
+<file path=ppt/notesSlides/notesSlide7.xml><?xml version="1.0" encoding="utf-8"?>
+<p:notes xmlns:a="http://schemas.openxmlformats.org/drawingml/2006/main" xmlns:r="http://schemas.openxmlformats.org/officeDocument/2006/relationships" xmlns:p="http://schemas.openxmlformats.org/presentationml/2006/main">
+  <p:cSld>
+    <p:spTree>
+      <p:nvGrpSpPr>
+        <p:cNvPr id="1" name=""/>
+        <p:cNvGrpSpPr/>
+        <p:nvPr/>
+      </p:nvGrpSpPr>
+      <p:grpSpPr>
+        <a:xfrm>
+          <a:off x="0" y="0"/>
+          <a:ext cx="0" cy="0"/>
+          <a:chOff x="0" y="0"/>
+          <a:chExt cx="0" cy="0"/>
+        </a:xfrm>
+      </p:grpSpPr>
+      <p:sp>
+        <p:nvSpPr>
+          <p:cNvPr id="2" name="Slide Image Placeholder 1"/>
+          <p:cNvSpPr>
+            <a:spLocks noGrp="1" noRot="1" noChangeAspect="1"/>
+          </p:cNvSpPr>
+          <p:nvPr>
+            <p:ph type="sldImg"/>
+          </p:nvPr>
+        </p:nvSpPr>
+        <p:spPr/>
+      </p:sp>
+      <p:sp>
+        <p:nvSpPr>
+          <p:cNvPr id="3" name="Notes Placeholder 2"/>
+          <p:cNvSpPr>
+            <a:spLocks noGrp="1"/>
+          </p:cNvSpPr>
+          <p:nvPr>
+            <p:ph type="body" idx="1"/>
+          </p:nvPr>
+        </p:nvSpPr>
+        <p:spPr/>
+        <p:txBody>
+          <a:bodyPr/>
+          <a:lstStyle/>
+          <a:p>
+            <a:endParaRPr lang="en-US"/>
+          </a:p>
+        </p:txBody>
+      </p:sp>
+      <p:sp>
+        <p:nvSpPr>
+          <p:cNvPr id="4" name="Slide Number Placeholder 3"/>
+          <p:cNvSpPr>
+            <a:spLocks noGrp="1"/>
+          </p:cNvSpPr>
+          <p:nvPr>
+            <p:ph type="sldNum" sz="quarter" idx="5"/>
+          </p:nvPr>
+        </p:nvSpPr>
+        <p:spPr/>
+        <p:txBody>
+          <a:bodyPr/>
+          <a:lstStyle/>
+          <a:p>
+            <a:fld id="{0A330D19-CF36-894D-9497-944CAF9A330D}" type="slidenum">
+              <a:rPr lang="en-US" smtClean="0"/>
+              <a:t>9</a:t>
+            </a:fld>
+            <a:endParaRPr lang="en-US"/>
+          </a:p>
+        </p:txBody>
+      </p:sp>
+    </p:spTree>
+    <p:extLst>
+      <p:ext uri="{BB962C8B-B14F-4D97-AF65-F5344CB8AC3E}">
+        <p14:creationId xmlns:p14="http://schemas.microsoft.com/office/powerpoint/2010/main" val="162595882"/>
+      </p:ext>
+    </p:extLst>
+  </p:cSld>
+  <p:clrMapOvr>
+    <a:masterClrMapping/>
+  </p:clrMapOvr>
+</p:notes>
+</file>
+
+<file path=ppt/notesSlides/notesSlide8.xml><?xml version="1.0" encoding="utf-8"?>
+<p:notes xmlns:a="http://schemas.openxmlformats.org/drawingml/2006/main" xmlns:r="http://schemas.openxmlformats.org/officeDocument/2006/relationships" xmlns:p="http://schemas.openxmlformats.org/presentationml/2006/main">
+  <p:cSld>
+    <p:spTree>
+      <p:nvGrpSpPr>
+        <p:cNvPr id="1" name=""/>
+        <p:cNvGrpSpPr/>
+        <p:nvPr/>
+      </p:nvGrpSpPr>
+      <p:grpSpPr>
+        <a:xfrm>
+          <a:off x="0" y="0"/>
+          <a:ext cx="0" cy="0"/>
+          <a:chOff x="0" y="0"/>
+          <a:chExt cx="0" cy="0"/>
+        </a:xfrm>
+      </p:grpSpPr>
+      <p:sp>
+        <p:nvSpPr>
+          <p:cNvPr id="2" name="Slide Image Placeholder 1"/>
+          <p:cNvSpPr>
+            <a:spLocks noGrp="1" noRot="1" noChangeAspect="1"/>
+          </p:cNvSpPr>
+          <p:nvPr>
+            <p:ph type="sldImg"/>
+          </p:nvPr>
+        </p:nvSpPr>
+        <p:spPr/>
+      </p:sp>
+      <p:sp>
+        <p:nvSpPr>
+          <p:cNvPr id="3" name="Notes Placeholder 2"/>
+          <p:cNvSpPr>
+            <a:spLocks noGrp="1"/>
+          </p:cNvSpPr>
+          <p:nvPr>
+            <p:ph type="body" idx="1"/>
+          </p:nvPr>
+        </p:nvSpPr>
+        <p:spPr/>
+        <p:txBody>
+          <a:bodyPr/>
+          <a:lstStyle/>
+          <a:p>
+            <a:endParaRPr lang="en-US"/>
+          </a:p>
+        </p:txBody>
+      </p:sp>
+      <p:sp>
+        <p:nvSpPr>
+          <p:cNvPr id="4" name="Slide Number Placeholder 3"/>
+          <p:cNvSpPr>
+            <a:spLocks noGrp="1"/>
+          </p:cNvSpPr>
+          <p:nvPr>
+            <p:ph type="sldNum" sz="quarter" idx="5"/>
+          </p:nvPr>
+        </p:nvSpPr>
+        <p:spPr/>
+        <p:txBody>
+          <a:bodyPr/>
+          <a:lstStyle/>
+          <a:p>
+            <a:fld id="{0A330D19-CF36-894D-9497-944CAF9A330D}" type="slidenum">
+              <a:rPr lang="en-US" smtClean="0"/>
+              <a:t>10</a:t>
+            </a:fld>
+            <a:endParaRPr lang="en-US"/>
+          </a:p>
+        </p:txBody>
+      </p:sp>
+    </p:spTree>
+    <p:extLst>
+      <p:ext uri="{BB962C8B-B14F-4D97-AF65-F5344CB8AC3E}">
+        <p14:creationId xmlns:p14="http://schemas.microsoft.com/office/powerpoint/2010/main" val="359393878"/>
+      </p:ext>
+    </p:extLst>
+  </p:cSld>
+  <p:clrMapOvr>
+    <a:masterClrMapping/>
+  </p:clrMapOvr>
+</p:notes>
+</file>
+
+<file path=ppt/notesSlides/notesSlide9.xml><?xml version="1.0" encoding="utf-8"?>
+<p:notes xmlns:a="http://schemas.openxmlformats.org/drawingml/2006/main" xmlns:r="http://schemas.openxmlformats.org/officeDocument/2006/relationships" xmlns:p="http://schemas.openxmlformats.org/presentationml/2006/main">
+  <p:cSld>
+    <p:spTree>
+      <p:nvGrpSpPr>
+        <p:cNvPr id="1" name=""/>
+        <p:cNvGrpSpPr/>
+        <p:nvPr/>
+      </p:nvGrpSpPr>
+      <p:grpSpPr>
+        <a:xfrm>
+          <a:off x="0" y="0"/>
+          <a:ext cx="0" cy="0"/>
+          <a:chOff x="0" y="0"/>
+          <a:chExt cx="0" cy="0"/>
+        </a:xfrm>
+      </p:grpSpPr>
+      <p:sp>
+        <p:nvSpPr>
+          <p:cNvPr id="2" name="Slide Image Placeholder 1"/>
+          <p:cNvSpPr>
+            <a:spLocks noGrp="1" noRot="1" noChangeAspect="1"/>
+          </p:cNvSpPr>
+          <p:nvPr>
+            <p:ph type="sldImg"/>
+          </p:nvPr>
+        </p:nvSpPr>
+        <p:spPr/>
+      </p:sp>
+      <p:sp>
+        <p:nvSpPr>
+          <p:cNvPr id="3" name="Notes Placeholder 2"/>
+          <p:cNvSpPr>
+            <a:spLocks noGrp="1"/>
+          </p:cNvSpPr>
+          <p:nvPr>
+            <p:ph type="body" idx="1"/>
+          </p:nvPr>
+        </p:nvSpPr>
+        <p:spPr/>
+        <p:txBody>
+          <a:bodyPr/>
+          <a:lstStyle/>
+          <a:p>
+            <a:endParaRPr lang="en-US"/>
+          </a:p>
+        </p:txBody>
+      </p:sp>
+      <p:sp>
+        <p:nvSpPr>
+          <p:cNvPr id="4" name="Slide Number Placeholder 3"/>
+          <p:cNvSpPr>
+            <a:spLocks noGrp="1"/>
+          </p:cNvSpPr>
+          <p:nvPr>
+            <p:ph type="sldNum" sz="quarter" idx="5"/>
+          </p:nvPr>
+        </p:nvSpPr>
+        <p:spPr/>
+        <p:txBody>
+          <a:bodyPr/>
+          <a:lstStyle/>
+          <a:p>
+            <a:fld id="{0A330D19-CF36-894D-9497-944CAF9A330D}" type="slidenum">
+              <a:rPr lang="en-US" smtClean="0"/>
+              <a:t>11</a:t>
+            </a:fld>
+            <a:endParaRPr lang="en-US"/>
+          </a:p>
+        </p:txBody>
+      </p:sp>
+    </p:spTree>
+    <p:extLst>
+      <p:ext uri="{BB962C8B-B14F-4D97-AF65-F5344CB8AC3E}">
+        <p14:creationId xmlns:p14="http://schemas.microsoft.com/office/powerpoint/2010/main" val="2303555968"/>
+      </p:ext>
+    </p:extLst>
+  </p:cSld>
+  <p:clrMapOvr>
+    <a:masterClrMapping/>
+  </p:clrMapOvr>
+</p:notes>
+</file>
+
 <file path=ppt/slideLayouts/slideLayout1.xml><?xml version="1.0" encoding="utf-8"?>
 <p:sldLayout xmlns:a="http://schemas.openxmlformats.org/drawingml/2006/main" xmlns:r="http://schemas.openxmlformats.org/officeDocument/2006/relationships" xmlns:p="http://schemas.openxmlformats.org/presentationml/2006/main" type="title" preserve="1">
   <p:cSld name="Title Slide">
@@ -307,7 +3179,7 @@
           <a:p>
             <a:fld id="{220BD450-5107-424A-9054-544A25915243}" type="datetimeFigureOut">
               <a:rPr lang="en-US" smtClean="0"/>
-              <a:t>3/30/26</a:t>
+              <a:t>3/31/26</a:t>
             </a:fld>
             <a:endParaRPr lang="en-US"/>
           </a:p>
@@ -505,7 +3377,7 @@
           <a:p>
             <a:fld id="{220BD450-5107-424A-9054-544A25915243}" type="datetimeFigureOut">
               <a:rPr lang="en-US" smtClean="0"/>
-              <a:t>3/30/26</a:t>
+              <a:t>3/31/26</a:t>
             </a:fld>
             <a:endParaRPr lang="en-US"/>
           </a:p>
@@ -713,7 +3585,7 @@
           <a:p>
             <a:fld id="{220BD450-5107-424A-9054-544A25915243}" type="datetimeFigureOut">
               <a:rPr lang="en-US" smtClean="0"/>
-              <a:t>3/30/26</a:t>
+              <a:t>3/31/26</a:t>
             </a:fld>
             <a:endParaRPr lang="en-US"/>
           </a:p>
@@ -911,7 +3783,7 @@
           <a:p>
             <a:fld id="{220BD450-5107-424A-9054-544A25915243}" type="datetimeFigureOut">
               <a:rPr lang="en-US" smtClean="0"/>
-              <a:t>3/30/26</a:t>
+              <a:t>3/31/26</a:t>
             </a:fld>
             <a:endParaRPr lang="en-US"/>
           </a:p>
@@ -1186,7 +4058,7 @@
           <a:p>
             <a:fld id="{220BD450-5107-424A-9054-544A25915243}" type="datetimeFigureOut">
               <a:rPr lang="en-US" smtClean="0"/>
-              <a:t>3/30/26</a:t>
+              <a:t>3/31/26</a:t>
             </a:fld>
             <a:endParaRPr lang="en-US"/>
           </a:p>
@@ -1451,7 +4323,7 @@
           <a:p>
             <a:fld id="{220BD450-5107-424A-9054-544A25915243}" type="datetimeFigureOut">
               <a:rPr lang="en-US" smtClean="0"/>
-              <a:t>3/30/26</a:t>
+              <a:t>3/31/26</a:t>
             </a:fld>
             <a:endParaRPr lang="en-US"/>
           </a:p>
@@ -1863,7 +4735,7 @@
           <a:p>
             <a:fld id="{220BD450-5107-424A-9054-544A25915243}" type="datetimeFigureOut">
               <a:rPr lang="en-US" smtClean="0"/>
-              <a:t>3/30/26</a:t>
+              <a:t>3/31/26</a:t>
             </a:fld>
             <a:endParaRPr lang="en-US"/>
           </a:p>
@@ -2004,7 +4876,7 @@
           <a:p>
             <a:fld id="{220BD450-5107-424A-9054-544A25915243}" type="datetimeFigureOut">
               <a:rPr lang="en-US" smtClean="0"/>
-              <a:t>3/30/26</a:t>
+              <a:t>3/31/26</a:t>
             </a:fld>
             <a:endParaRPr lang="en-US"/>
           </a:p>
@@ -2117,7 +4989,7 @@
           <a:p>
             <a:fld id="{220BD450-5107-424A-9054-544A25915243}" type="datetimeFigureOut">
               <a:rPr lang="en-US" smtClean="0"/>
-              <a:t>3/30/26</a:t>
+              <a:t>3/31/26</a:t>
             </a:fld>
             <a:endParaRPr lang="en-US"/>
           </a:p>
@@ -2428,7 +5300,7 @@
           <a:p>
             <a:fld id="{220BD450-5107-424A-9054-544A25915243}" type="datetimeFigureOut">
               <a:rPr lang="en-US" smtClean="0"/>
-              <a:t>3/30/26</a:t>
+              <a:t>3/31/26</a:t>
             </a:fld>
             <a:endParaRPr lang="en-US"/>
           </a:p>
@@ -2716,7 +5588,7 @@
           <a:p>
             <a:fld id="{220BD450-5107-424A-9054-544A25915243}" type="datetimeFigureOut">
               <a:rPr lang="en-US" smtClean="0"/>
-              <a:t>3/30/26</a:t>
+              <a:t>3/31/26</a:t>
             </a:fld>
             <a:endParaRPr lang="en-US"/>
           </a:p>
@@ -2957,7 +5829,7 @@
           <a:p>
             <a:fld id="{220BD450-5107-424A-9054-544A25915243}" type="datetimeFigureOut">
               <a:rPr lang="en-US" smtClean="0"/>
-              <a:t>3/30/26</a:t>
+              <a:t>3/31/26</a:t>
             </a:fld>
             <a:endParaRPr lang="en-US"/>
           </a:p>
@@ -3934,7 +6806,7 @@
           <p:nvPr/>
         </p:nvPicPr>
         <p:blipFill>
-          <a:blip r:embed="rId2">
+          <a:blip r:embed="rId3">
             <a:extLst>
               <a:ext uri="{28A0092B-C50C-407E-A947-70E740481C1C}">
                 <a14:useLocalDpi xmlns:a14="http://schemas.microsoft.com/office/drawing/2010/main" val="0"/>
@@ -4924,7 +7796,7 @@
           <p:nvPr/>
         </p:nvPicPr>
         <p:blipFill>
-          <a:blip r:embed="rId2"/>
+          <a:blip r:embed="rId3"/>
           <a:stretch>
             <a:fillRect/>
           </a:stretch>
@@ -5428,7 +8300,7 @@
           <p:nvPr/>
         </p:nvPicPr>
         <p:blipFill>
-          <a:blip r:embed="rId2"/>
+          <a:blip r:embed="rId3"/>
           <a:stretch>
             <a:fillRect/>
           </a:stretch>
@@ -5483,7 +8355,7 @@
           <p:nvPr/>
         </p:nvPicPr>
         <p:blipFill>
-          <a:blip r:embed="rId2"/>
+          <a:blip r:embed="rId3"/>
           <a:stretch>
             <a:fillRect/>
           </a:stretch>
@@ -6465,7 +9337,7 @@
           <p:nvPr/>
         </p:nvPicPr>
         <p:blipFill>
-          <a:blip r:embed="rId2"/>
+          <a:blip r:embed="rId3"/>
           <a:stretch>
             <a:fillRect/>
           </a:stretch>
@@ -6514,7 +9386,7 @@
           <p:nvPr/>
         </p:nvPicPr>
         <p:blipFill>
-          <a:blip r:embed="rId2"/>
+          <a:blip r:embed="rId3"/>
           <a:stretch>
             <a:fillRect/>
           </a:stretch>
@@ -7023,7 +9895,7 @@
           <p:nvPr/>
         </p:nvPicPr>
         <p:blipFill>
-          <a:blip r:embed="rId2"/>
+          <a:blip r:embed="rId3"/>
           <a:stretch>
             <a:fillRect/>
           </a:stretch>
@@ -7992,7 +10864,7 @@
           <p:nvPr/>
         </p:nvPicPr>
         <p:blipFill>
-          <a:blip r:embed="rId2"/>
+          <a:blip r:embed="rId3"/>
           <a:stretch>
             <a:fillRect/>
           </a:stretch>
@@ -8046,7 +10918,7 @@
           <p:nvPr/>
         </p:nvPicPr>
         <p:blipFill>
-          <a:blip r:embed="rId2"/>
+          <a:blip r:embed="rId3"/>
           <a:stretch>
             <a:fillRect/>
           </a:stretch>
@@ -8498,7 +11370,7 @@
           <p:nvPr/>
         </p:nvPicPr>
         <p:blipFill>
-          <a:blip r:embed="rId2"/>
+          <a:blip r:embed="rId3"/>
           <a:stretch>
             <a:fillRect/>
           </a:stretch>
@@ -9367,7 +12239,7 @@
           <p:nvPr/>
         </p:nvPicPr>
         <p:blipFill>
-          <a:blip r:embed="rId2"/>
+          <a:blip r:embed="rId3"/>
           <a:stretch>
             <a:fillRect/>
           </a:stretch>
@@ -9890,7 +12762,7 @@
           <p:nvPr/>
         </p:nvPicPr>
         <p:blipFill>
-          <a:blip r:embed="rId2">
+          <a:blip r:embed="rId3">
             <a:extLst>
               <a:ext uri="{28A0092B-C50C-407E-A947-70E740481C1C}">
                 <a14:useLocalDpi xmlns:a14="http://schemas.microsoft.com/office/drawing/2010/main" val="0"/>
@@ -10871,7 +13743,7 @@
           <p:nvPr/>
         </p:nvPicPr>
         <p:blipFill>
-          <a:blip r:embed="rId2"/>
+          <a:blip r:embed="rId3"/>
           <a:stretch>
             <a:fillRect/>
           </a:stretch>
@@ -11038,7 +13910,7 @@
           <p:nvPr/>
         </p:nvPicPr>
         <p:blipFill>
-          <a:blip r:embed="rId2">
+          <a:blip r:embed="rId3">
             <a:extLst>
               <a:ext uri="{28A0092B-C50C-407E-A947-70E740481C1C}">
                 <a14:useLocalDpi xmlns:a14="http://schemas.microsoft.com/office/drawing/2010/main" val="0"/>
@@ -11926,7 +14798,7 @@
           <p:nvPr/>
         </p:nvPicPr>
         <p:blipFill>
-          <a:blip r:embed="rId2"/>
+          <a:blip r:embed="rId3"/>
           <a:stretch>
             <a:fillRect/>
           </a:stretch>
@@ -12389,7 +15261,7 @@
           <p:nvPr/>
         </p:nvPicPr>
         <p:blipFill>
-          <a:blip r:embed="rId2"/>
+          <a:blip r:embed="rId3"/>
           <a:stretch>
             <a:fillRect/>
           </a:stretch>
@@ -12898,7 +15770,7 @@
           <p:nvPr/>
         </p:nvPicPr>
         <p:blipFill>
-          <a:blip r:embed="rId2"/>
+          <a:blip r:embed="rId3"/>
           <a:stretch>
             <a:fillRect/>
           </a:stretch>
@@ -13345,7 +16217,7 @@
           <p:nvPr/>
         </p:nvPicPr>
         <p:blipFill>
-          <a:blip r:embed="rId2"/>
+          <a:blip r:embed="rId3"/>
           <a:stretch>
             <a:fillRect/>
           </a:stretch>
@@ -13924,7 +16796,7 @@
           <p:nvPr/>
         </p:nvPicPr>
         <p:blipFill>
-          <a:blip r:embed="rId2"/>
+          <a:blip r:embed="rId3"/>
           <a:stretch>
             <a:fillRect/>
           </a:stretch>
@@ -14428,7 +17300,7 @@
           <p:nvPr/>
         </p:nvPicPr>
         <p:blipFill>
-          <a:blip r:embed="rId2"/>
+          <a:blip r:embed="rId3"/>
           <a:stretch>
             <a:fillRect/>
           </a:stretch>
@@ -14477,7 +17349,7 @@
           <p:nvPr/>
         </p:nvPicPr>
         <p:blipFill>
-          <a:blip r:embed="rId2"/>
+          <a:blip r:embed="rId3"/>
           <a:stretch>
             <a:fillRect/>
           </a:stretch>
@@ -15376,7 +18248,7 @@
           <p:nvPr/>
         </p:nvPicPr>
         <p:blipFill>
-          <a:blip r:embed="rId2"/>
+          <a:blip r:embed="rId3"/>
           <a:stretch>
             <a:fillRect/>
           </a:stretch>
@@ -15431,7 +18303,7 @@
           <p:nvPr/>
         </p:nvPicPr>
         <p:blipFill rotWithShape="1">
-          <a:blip r:embed="rId2">
+          <a:blip r:embed="rId3">
             <a:extLst>
               <a:ext uri="{28A0092B-C50C-407E-A947-70E740481C1C}">
                 <a14:useLocalDpi xmlns:a14="http://schemas.microsoft.com/office/drawing/2010/main" val="0"/>
@@ -16061,7 +18933,7 @@
           <p:nvPr/>
         </p:nvPicPr>
         <p:blipFill>
-          <a:blip r:embed="rId2"/>
+          <a:blip r:embed="rId3"/>
           <a:srcRect r="18671"/>
           <a:stretch>
             <a:fillRect/>
@@ -20054,7 +22926,7 @@
           <p:nvPr/>
         </p:nvPicPr>
         <p:blipFill>
-          <a:blip r:embed="rId2"/>
+          <a:blip r:embed="rId3"/>
           <a:stretch>
             <a:fillRect/>
           </a:stretch>
@@ -25677,7 +28549,7 @@
           <p:nvPr/>
         </p:nvPicPr>
         <p:blipFill>
-          <a:blip r:embed="rId2"/>
+          <a:blip r:embed="rId3"/>
           <a:stretch>
             <a:fillRect/>
           </a:stretch>
@@ -26192,7 +29064,7 @@
           <p:nvPr/>
         </p:nvPicPr>
         <p:blipFill>
-          <a:blip r:embed="rId2">
+          <a:blip r:embed="rId3">
             <a:extLst>
               <a:ext uri="{28A0092B-C50C-407E-A947-70E740481C1C}">
                 <a14:useLocalDpi xmlns:a14="http://schemas.microsoft.com/office/drawing/2010/main" val="0"/>
@@ -26718,7 +29590,7 @@
           <p:nvPr/>
         </p:nvPicPr>
         <p:blipFill>
-          <a:blip r:embed="rId2"/>
+          <a:blip r:embed="rId3"/>
           <a:stretch>
             <a:fillRect/>
           </a:stretch>
@@ -27555,7 +30427,7 @@
           <p:nvPr/>
         </p:nvPicPr>
         <p:blipFill>
-          <a:blip r:embed="rId2"/>
+          <a:blip r:embed="rId3"/>
           <a:stretch>
             <a:fillRect/>
           </a:stretch>
@@ -28080,7 +30952,7 @@
           <p:nvPr/>
         </p:nvPicPr>
         <p:blipFill>
-          <a:blip r:embed="rId2"/>
+          <a:blip r:embed="rId3"/>
           <a:stretch>
             <a:fillRect/>
           </a:stretch>
@@ -28416,4 +31288,319 @@
     </a:ext>
   </a:extLst>
 </a:theme>
+</file>
+
+<file path=ppt/theme/theme2.xml><?xml version="1.0" encoding="utf-8"?>
+<a:theme xmlns:a="http://schemas.openxmlformats.org/drawingml/2006/main" name="Office Theme">
+  <a:themeElements>
+    <a:clrScheme name="Office">
+      <a:dk1>
+        <a:sysClr val="windowText" lastClr="000000"/>
+      </a:dk1>
+      <a:lt1>
+        <a:sysClr val="window" lastClr="FFFFFF"/>
+      </a:lt1>
+      <a:dk2>
+        <a:srgbClr val="0E2841"/>
+      </a:dk2>
+      <a:lt2>
+        <a:srgbClr val="E8E8E8"/>
+      </a:lt2>
+      <a:accent1>
+        <a:srgbClr val="156082"/>
+      </a:accent1>
+      <a:accent2>
+        <a:srgbClr val="E97132"/>
+      </a:accent2>
+      <a:accent3>
+        <a:srgbClr val="196B24"/>
+      </a:accent3>
+      <a:accent4>
+        <a:srgbClr val="0F9ED5"/>
+      </a:accent4>
+      <a:accent5>
+        <a:srgbClr val="A02B93"/>
+      </a:accent5>
+      <a:accent6>
+        <a:srgbClr val="4EA72E"/>
+      </a:accent6>
+      <a:hlink>
+        <a:srgbClr val="467886"/>
+      </a:hlink>
+      <a:folHlink>
+        <a:srgbClr val="96607D"/>
+      </a:folHlink>
+    </a:clrScheme>
+    <a:fontScheme name="Office">
+      <a:majorFont>
+        <a:latin typeface="Aptos Display" panose="02110004020202020204"/>
+        <a:ea typeface=""/>
+        <a:cs typeface=""/>
+        <a:font script="Jpan" typeface="游ゴシック Light"/>
+        <a:font script="Hang" typeface="맑은 고딕"/>
+        <a:font script="Hans" typeface="等线 Light"/>
+        <a:font script="Hant" typeface="新細明體"/>
+        <a:font script="Arab" typeface="Times New Roman"/>
+        <a:font script="Hebr" typeface="Times New Roman"/>
+        <a:font script="Thai" typeface="Angsana New"/>
+        <a:font script="Ethi" typeface="Nyala"/>
+        <a:font script="Beng" typeface="Vrinda"/>
+        <a:font script="Gujr" typeface="Shruti"/>
+        <a:font script="Khmr" typeface="MoolBoran"/>
+        <a:font script="Knda" typeface="Tunga"/>
+        <a:font script="Guru" typeface="Raavi"/>
+        <a:font script="Cans" typeface="Euphemia"/>
+        <a:font script="Cher" typeface="Plantagenet Cherokee"/>
+        <a:font script="Yiii" typeface="Microsoft Yi Baiti"/>
+        <a:font script="Tibt" typeface="Microsoft Himalaya"/>
+        <a:font script="Thaa" typeface="MV Boli"/>
+        <a:font script="Deva" typeface="Mangal"/>
+        <a:font script="Telu" typeface="Gautami"/>
+        <a:font script="Taml" typeface="Latha"/>
+        <a:font script="Syrc" typeface="Estrangelo Edessa"/>
+        <a:font script="Orya" typeface="Kalinga"/>
+        <a:font script="Mlym" typeface="Kartika"/>
+        <a:font script="Laoo" typeface="DokChampa"/>
+        <a:font script="Sinh" typeface="Iskoola Pota"/>
+        <a:font script="Mong" typeface="Mongolian Baiti"/>
+        <a:font script="Viet" typeface="Times New Roman"/>
+        <a:font script="Uigh" typeface="Microsoft Uighur"/>
+        <a:font script="Geor" typeface="Sylfaen"/>
+        <a:font script="Armn" typeface="Arial"/>
+        <a:font script="Bugi" typeface="Leelawadee UI"/>
+        <a:font script="Bopo" typeface="Microsoft JhengHei"/>
+        <a:font script="Java" typeface="Javanese Text"/>
+        <a:font script="Lisu" typeface="Segoe UI"/>
+        <a:font script="Mymr" typeface="Myanmar Text"/>
+        <a:font script="Nkoo" typeface="Ebrima"/>
+        <a:font script="Olck" typeface="Nirmala UI"/>
+        <a:font script="Osma" typeface="Ebrima"/>
+        <a:font script="Phag" typeface="Phagspa"/>
+        <a:font script="Syrn" typeface="Estrangelo Edessa"/>
+        <a:font script="Syrj" typeface="Estrangelo Edessa"/>
+        <a:font script="Syre" typeface="Estrangelo Edessa"/>
+        <a:font script="Sora" typeface="Nirmala UI"/>
+        <a:font script="Tale" typeface="Microsoft Tai Le"/>
+        <a:font script="Talu" typeface="Microsoft New Tai Lue"/>
+        <a:font script="Tfng" typeface="Ebrima"/>
+      </a:majorFont>
+      <a:minorFont>
+        <a:latin typeface="Aptos" panose="02110004020202020204"/>
+        <a:ea typeface=""/>
+        <a:cs typeface=""/>
+        <a:font script="Jpan" typeface="游ゴシック"/>
+        <a:font script="Hang" typeface="맑은 고딕"/>
+        <a:font script="Hans" typeface="等线"/>
+        <a:font script="Hant" typeface="新細明體"/>
+        <a:font script="Arab" typeface="Arial"/>
+        <a:font script="Hebr" typeface="Arial"/>
+        <a:font script="Thai" typeface="Cordia New"/>
+        <a:font script="Ethi" typeface="Nyala"/>
+        <a:font script="Beng" typeface="Vrinda"/>
+        <a:font script="Gujr" typeface="Shruti"/>
+        <a:font script="Khmr" typeface="DaunPenh"/>
+        <a:font script="Knda" typeface="Tunga"/>
+        <a:font script="Guru" typeface="Raavi"/>
+        <a:font script="Cans" typeface="Euphemia"/>
+        <a:font script="Cher" typeface="Plantagenet Cherokee"/>
+        <a:font script="Yiii" typeface="Microsoft Yi Baiti"/>
+        <a:font script="Tibt" typeface="Microsoft Himalaya"/>
+        <a:font script="Thaa" typeface="MV Boli"/>
+        <a:font script="Deva" typeface="Mangal"/>
+        <a:font script="Telu" typeface="Gautami"/>
+        <a:font script="Taml" typeface="Latha"/>
+        <a:font script="Syrc" typeface="Estrangelo Edessa"/>
+        <a:font script="Orya" typeface="Kalinga"/>
+        <a:font script="Mlym" typeface="Kartika"/>
+        <a:font script="Laoo" typeface="DokChampa"/>
+        <a:font script="Sinh" typeface="Iskoola Pota"/>
+        <a:font script="Mong" typeface="Mongolian Baiti"/>
+        <a:font script="Viet" typeface="Arial"/>
+        <a:font script="Uigh" typeface="Microsoft Uighur"/>
+        <a:font script="Geor" typeface="Sylfaen"/>
+        <a:font script="Armn" typeface="Arial"/>
+        <a:font script="Bugi" typeface="Leelawadee UI"/>
+        <a:font script="Bopo" typeface="Microsoft JhengHei"/>
+        <a:font script="Java" typeface="Javanese Text"/>
+        <a:font script="Lisu" typeface="Segoe UI"/>
+        <a:font script="Mymr" typeface="Myanmar Text"/>
+        <a:font script="Nkoo" typeface="Ebrima"/>
+        <a:font script="Olck" typeface="Nirmala UI"/>
+        <a:font script="Osma" typeface="Ebrima"/>
+        <a:font script="Phag" typeface="Phagspa"/>
+        <a:font script="Syrn" typeface="Estrangelo Edessa"/>
+        <a:font script="Syrj" typeface="Estrangelo Edessa"/>
+        <a:font script="Syre" typeface="Estrangelo Edessa"/>
+        <a:font script="Sora" typeface="Nirmala UI"/>
+        <a:font script="Tale" typeface="Microsoft Tai Le"/>
+        <a:font script="Talu" typeface="Microsoft New Tai Lue"/>
+        <a:font script="Tfng" typeface="Ebrima"/>
+      </a:minorFont>
+    </a:fontScheme>
+    <a:fmtScheme name="Office">
+      <a:fillStyleLst>
+        <a:solidFill>
+          <a:schemeClr val="phClr"/>
+        </a:solidFill>
+        <a:gradFill rotWithShape="1">
+          <a:gsLst>
+            <a:gs pos="0">
+              <a:schemeClr val="phClr">
+                <a:lumMod val="110000"/>
+                <a:satMod val="105000"/>
+                <a:tint val="67000"/>
+              </a:schemeClr>
+            </a:gs>
+            <a:gs pos="50000">
+              <a:schemeClr val="phClr">
+                <a:lumMod val="105000"/>
+                <a:satMod val="103000"/>
+                <a:tint val="73000"/>
+              </a:schemeClr>
+            </a:gs>
+            <a:gs pos="100000">
+              <a:schemeClr val="phClr">
+                <a:lumMod val="105000"/>
+                <a:satMod val="109000"/>
+                <a:tint val="81000"/>
+              </a:schemeClr>
+            </a:gs>
+          </a:gsLst>
+          <a:lin ang="5400000" scaled="0"/>
+        </a:gradFill>
+        <a:gradFill rotWithShape="1">
+          <a:gsLst>
+            <a:gs pos="0">
+              <a:schemeClr val="phClr">
+                <a:satMod val="103000"/>
+                <a:lumMod val="102000"/>
+                <a:tint val="94000"/>
+              </a:schemeClr>
+            </a:gs>
+            <a:gs pos="50000">
+              <a:schemeClr val="phClr">
+                <a:satMod val="110000"/>
+                <a:lumMod val="100000"/>
+                <a:shade val="100000"/>
+              </a:schemeClr>
+            </a:gs>
+            <a:gs pos="100000">
+              <a:schemeClr val="phClr">
+                <a:lumMod val="99000"/>
+                <a:satMod val="120000"/>
+                <a:shade val="78000"/>
+              </a:schemeClr>
+            </a:gs>
+          </a:gsLst>
+          <a:lin ang="5400000" scaled="0"/>
+        </a:gradFill>
+      </a:fillStyleLst>
+      <a:lnStyleLst>
+        <a:ln w="12700" cap="flat" cmpd="sng" algn="ctr">
+          <a:solidFill>
+            <a:schemeClr val="phClr"/>
+          </a:solidFill>
+          <a:prstDash val="solid"/>
+          <a:miter lim="800000"/>
+        </a:ln>
+        <a:ln w="19050" cap="flat" cmpd="sng" algn="ctr">
+          <a:solidFill>
+            <a:schemeClr val="phClr"/>
+          </a:solidFill>
+          <a:prstDash val="solid"/>
+          <a:miter lim="800000"/>
+        </a:ln>
+        <a:ln w="25400" cap="flat" cmpd="sng" algn="ctr">
+          <a:solidFill>
+            <a:schemeClr val="phClr"/>
+          </a:solidFill>
+          <a:prstDash val="solid"/>
+          <a:miter lim="800000"/>
+        </a:ln>
+      </a:lnStyleLst>
+      <a:effectStyleLst>
+        <a:effectStyle>
+          <a:effectLst/>
+        </a:effectStyle>
+        <a:effectStyle>
+          <a:effectLst/>
+        </a:effectStyle>
+        <a:effectStyle>
+          <a:effectLst>
+            <a:outerShdw blurRad="57150" dist="19050" dir="5400000" algn="ctr" rotWithShape="0">
+              <a:srgbClr val="000000">
+                <a:alpha val="63000"/>
+              </a:srgbClr>
+            </a:outerShdw>
+          </a:effectLst>
+        </a:effectStyle>
+      </a:effectStyleLst>
+      <a:bgFillStyleLst>
+        <a:solidFill>
+          <a:schemeClr val="phClr"/>
+        </a:solidFill>
+        <a:solidFill>
+          <a:schemeClr val="phClr">
+            <a:tint val="95000"/>
+            <a:satMod val="170000"/>
+          </a:schemeClr>
+        </a:solidFill>
+        <a:gradFill rotWithShape="1">
+          <a:gsLst>
+            <a:gs pos="0">
+              <a:schemeClr val="phClr">
+                <a:tint val="93000"/>
+                <a:satMod val="150000"/>
+                <a:shade val="98000"/>
+                <a:lumMod val="102000"/>
+              </a:schemeClr>
+            </a:gs>
+            <a:gs pos="50000">
+              <a:schemeClr val="phClr">
+                <a:tint val="98000"/>
+                <a:satMod val="130000"/>
+                <a:shade val="90000"/>
+                <a:lumMod val="103000"/>
+              </a:schemeClr>
+            </a:gs>
+            <a:gs pos="100000">
+              <a:schemeClr val="phClr">
+                <a:shade val="63000"/>
+                <a:satMod val="120000"/>
+              </a:schemeClr>
+            </a:gs>
+          </a:gsLst>
+          <a:lin ang="5400000" scaled="0"/>
+        </a:gradFill>
+      </a:bgFillStyleLst>
+    </a:fmtScheme>
+  </a:themeElements>
+  <a:objectDefaults>
+    <a:lnDef>
+      <a:spPr/>
+      <a:bodyPr/>
+      <a:lstStyle/>
+      <a:style>
+        <a:lnRef idx="2">
+          <a:schemeClr val="accent1"/>
+        </a:lnRef>
+        <a:fillRef idx="0">
+          <a:schemeClr val="accent1"/>
+        </a:fillRef>
+        <a:effectRef idx="1">
+          <a:schemeClr val="accent1"/>
+        </a:effectRef>
+        <a:fontRef idx="minor">
+          <a:schemeClr val="tx1"/>
+        </a:fontRef>
+      </a:style>
+    </a:lnDef>
+  </a:objectDefaults>
+  <a:extraClrSchemeLst/>
+  <a:extLst>
+    <a:ext uri="{05A4C25C-085E-4340-85A3-A5531E510DB2}">
+      <thm15:themeFamily xmlns:thm15="http://schemas.microsoft.com/office/thememl/2012/main" name="Office Theme" id="{2E142A2C-CD16-42D6-873A-C26D2A0506FA}" vid="{1BDDFF52-6CD6-40A5-AB3C-68EB2F1E4D0A}"/>
+    </a:ext>
+  </a:extLst>
+</a:theme>
 </file>
--- a/Energy/Energy_Murders.pptx
+++ b/Energy/Energy_Murders.pptx
@@ -5,7 +5,7 @@
     <p:sldMasterId id="2147483648" r:id="rId1"/>
   </p:sldMasterIdLst>
   <p:notesMasterIdLst>
-    <p:notesMasterId r:id="rId51"/>
+    <p:notesMasterId r:id="rId50"/>
   </p:notesMasterIdLst>
   <p:sldIdLst>
     <p:sldId id="273" r:id="rId2"/>
@@ -47,16 +47,15 @@
     <p:sldId id="311" r:id="rId38"/>
     <p:sldId id="312" r:id="rId39"/>
     <p:sldId id="313" r:id="rId40"/>
-    <p:sldId id="314" r:id="rId41"/>
-    <p:sldId id="318" r:id="rId42"/>
-    <p:sldId id="307" r:id="rId43"/>
-    <p:sldId id="319" r:id="rId44"/>
-    <p:sldId id="293" r:id="rId45"/>
-    <p:sldId id="297" r:id="rId46"/>
-    <p:sldId id="320" r:id="rId47"/>
-    <p:sldId id="322" r:id="rId48"/>
-    <p:sldId id="305" r:id="rId49"/>
-    <p:sldId id="306" r:id="rId50"/>
+    <p:sldId id="318" r:id="rId41"/>
+    <p:sldId id="307" r:id="rId42"/>
+    <p:sldId id="319" r:id="rId43"/>
+    <p:sldId id="293" r:id="rId44"/>
+    <p:sldId id="297" r:id="rId45"/>
+    <p:sldId id="320" r:id="rId46"/>
+    <p:sldId id="322" r:id="rId47"/>
+    <p:sldId id="305" r:id="rId48"/>
+    <p:sldId id="306" r:id="rId49"/>
   </p:sldIdLst>
   <p:sldSz cx="12192000" cy="6858000"/>
   <p:notesSz cx="6858000" cy="9144000"/>
@@ -245,7 +244,7 @@
           <a:p>
             <a:fld id="{80B891FF-142D-154F-843C-7CB8EB458228}" type="datetimeFigureOut">
               <a:rPr lang="en-US" smtClean="0"/>
-              <a:t>3/31/26</a:t>
+              <a:t>4/2/26</a:t>
             </a:fld>
             <a:endParaRPr lang="en-US"/>
           </a:p>
@@ -3179,7 +3178,7 @@
           <a:p>
             <a:fld id="{220BD450-5107-424A-9054-544A25915243}" type="datetimeFigureOut">
               <a:rPr lang="en-US" smtClean="0"/>
-              <a:t>3/31/26</a:t>
+              <a:t>4/2/26</a:t>
             </a:fld>
             <a:endParaRPr lang="en-US"/>
           </a:p>
@@ -3377,7 +3376,7 @@
           <a:p>
             <a:fld id="{220BD450-5107-424A-9054-544A25915243}" type="datetimeFigureOut">
               <a:rPr lang="en-US" smtClean="0"/>
-              <a:t>3/31/26</a:t>
+              <a:t>4/2/26</a:t>
             </a:fld>
             <a:endParaRPr lang="en-US"/>
           </a:p>
@@ -3585,7 +3584,7 @@
           <a:p>
             <a:fld id="{220BD450-5107-424A-9054-544A25915243}" type="datetimeFigureOut">
               <a:rPr lang="en-US" smtClean="0"/>
-              <a:t>3/31/26</a:t>
+              <a:t>4/2/26</a:t>
             </a:fld>
             <a:endParaRPr lang="en-US"/>
           </a:p>
@@ -3783,7 +3782,7 @@
           <a:p>
             <a:fld id="{220BD450-5107-424A-9054-544A25915243}" type="datetimeFigureOut">
               <a:rPr lang="en-US" smtClean="0"/>
-              <a:t>3/31/26</a:t>
+              <a:t>4/2/26</a:t>
             </a:fld>
             <a:endParaRPr lang="en-US"/>
           </a:p>
@@ -4058,7 +4057,7 @@
           <a:p>
             <a:fld id="{220BD450-5107-424A-9054-544A25915243}" type="datetimeFigureOut">
               <a:rPr lang="en-US" smtClean="0"/>
-              <a:t>3/31/26</a:t>
+              <a:t>4/2/26</a:t>
             </a:fld>
             <a:endParaRPr lang="en-US"/>
           </a:p>
@@ -4323,7 +4322,7 @@
           <a:p>
             <a:fld id="{220BD450-5107-424A-9054-544A25915243}" type="datetimeFigureOut">
               <a:rPr lang="en-US" smtClean="0"/>
-              <a:t>3/31/26</a:t>
+              <a:t>4/2/26</a:t>
             </a:fld>
             <a:endParaRPr lang="en-US"/>
           </a:p>
@@ -4735,7 +4734,7 @@
           <a:p>
             <a:fld id="{220BD450-5107-424A-9054-544A25915243}" type="datetimeFigureOut">
               <a:rPr lang="en-US" smtClean="0"/>
-              <a:t>3/31/26</a:t>
+              <a:t>4/2/26</a:t>
             </a:fld>
             <a:endParaRPr lang="en-US"/>
           </a:p>
@@ -4876,7 +4875,7 @@
           <a:p>
             <a:fld id="{220BD450-5107-424A-9054-544A25915243}" type="datetimeFigureOut">
               <a:rPr lang="en-US" smtClean="0"/>
-              <a:t>3/31/26</a:t>
+              <a:t>4/2/26</a:t>
             </a:fld>
             <a:endParaRPr lang="en-US"/>
           </a:p>
@@ -4989,7 +4988,7 @@
           <a:p>
             <a:fld id="{220BD450-5107-424A-9054-544A25915243}" type="datetimeFigureOut">
               <a:rPr lang="en-US" smtClean="0"/>
-              <a:t>3/31/26</a:t>
+              <a:t>4/2/26</a:t>
             </a:fld>
             <a:endParaRPr lang="en-US"/>
           </a:p>
@@ -5300,7 +5299,7 @@
           <a:p>
             <a:fld id="{220BD450-5107-424A-9054-544A25915243}" type="datetimeFigureOut">
               <a:rPr lang="en-US" smtClean="0"/>
-              <a:t>3/31/26</a:t>
+              <a:t>4/2/26</a:t>
             </a:fld>
             <a:endParaRPr lang="en-US"/>
           </a:p>
@@ -5588,7 +5587,7 @@
           <a:p>
             <a:fld id="{220BD450-5107-424A-9054-544A25915243}" type="datetimeFigureOut">
               <a:rPr lang="en-US" smtClean="0"/>
-              <a:t>3/31/26</a:t>
+              <a:t>4/2/26</a:t>
             </a:fld>
             <a:endParaRPr lang="en-US"/>
           </a:p>
@@ -5829,7 +5828,7 @@
           <a:p>
             <a:fld id="{220BD450-5107-424A-9054-544A25915243}" type="datetimeFigureOut">
               <a:rPr lang="en-US" smtClean="0"/>
-              <a:t>3/31/26</a:t>
+              <a:t>4/2/26</a:t>
             </a:fld>
             <a:endParaRPr lang="en-US"/>
           </a:p>
@@ -7838,6 +7837,104 @@
       </p:grpSpPr>
       <p:sp>
         <p:nvSpPr>
+          <p:cNvPr id="10" name="TextBox 9">
+            <a:extLst>
+              <a:ext uri="{FF2B5EF4-FFF2-40B4-BE49-F238E27FC236}">
+                <a16:creationId xmlns:a16="http://schemas.microsoft.com/office/drawing/2014/main" id="{5FA0D8B2-6B55-D3DC-BCBB-6FEAD86B9E72}"/>
+              </a:ext>
+            </a:extLst>
+          </p:cNvPr>
+          <p:cNvSpPr txBox="1"/>
+          <p:nvPr/>
+        </p:nvSpPr>
+        <p:spPr>
+          <a:xfrm>
+            <a:off x="237467" y="1912953"/>
+            <a:ext cx="7627232" cy="3477875"/>
+          </a:xfrm>
+          <a:prstGeom prst="rect">
+            <a:avLst/>
+          </a:prstGeom>
+          <a:solidFill>
+            <a:schemeClr val="bg1">
+              <a:alpha val="84400"/>
+            </a:schemeClr>
+          </a:solidFill>
+        </p:spPr>
+        <p:txBody>
+          <a:bodyPr wrap="square" rtlCol="0">
+            <a:spAutoFit/>
+          </a:bodyPr>
+          <a:lstStyle/>
+          <a:p>
+            <a:pPr marL="285750" indent="-285750">
+              <a:spcBef>
+                <a:spcPts val="1200"/>
+              </a:spcBef>
+              <a:buFont typeface="Arial" panose="020B0604020202020204" pitchFamily="34" charset="0"/>
+              <a:buChar char="•"/>
+            </a:pPr>
+            <a:r>
+              <a:rPr dirty="0"/>
+              <a:t>Lockheed Martin senior scientist with 26 patents and a 40-year defense career — waited until his DEATHBED to talk.</a:t>
+            </a:r>
+          </a:p>
+          <a:p>
+            <a:pPr marL="285750" indent="-285750">
+              <a:spcBef>
+                <a:spcPts val="1200"/>
+              </a:spcBef>
+              <a:buFont typeface="Arial" panose="020B0604020202020204" pitchFamily="34" charset="0"/>
+              <a:buChar char="•"/>
+            </a:pPr>
+            <a:r>
+              <a:rPr dirty="0"/>
+              <a:t>Recorded a video claiming direct involvement in ANTIGRAVITY research and reverse-engineering exotic propulsion at Area 51.</a:t>
+            </a:r>
+          </a:p>
+          <a:p>
+            <a:pPr marL="285750" indent="-285750">
+              <a:spcBef>
+                <a:spcPts val="1200"/>
+              </a:spcBef>
+              <a:buFont typeface="Arial" panose="020B0604020202020204" pitchFamily="34" charset="0"/>
+              <a:buChar char="•"/>
+            </a:pPr>
+            <a:r>
+              <a:rPr dirty="0"/>
+              <a:t>He was so AFRAID of retaliation that he stayed silent his entire career — only spoke when he was already dying.</a:t>
+            </a:r>
+          </a:p>
+          <a:p>
+            <a:pPr marL="285750" indent="-285750">
+              <a:spcBef>
+                <a:spcPts val="1200"/>
+              </a:spcBef>
+              <a:buFont typeface="Arial" panose="020B0604020202020204" pitchFamily="34" charset="0"/>
+              <a:buChar char="•"/>
+            </a:pPr>
+            <a:r>
+              <a:rPr dirty="0"/>
+              <a:t>His claims align with David Grusch's 2023 congressional testimony about secret reverse-engineering programs.</a:t>
+            </a:r>
+          </a:p>
+          <a:p>
+            <a:pPr marL="285750" indent="-285750">
+              <a:spcBef>
+                <a:spcPts val="1200"/>
+              </a:spcBef>
+              <a:buFont typeface="Arial" panose="020B0604020202020204" pitchFamily="34" charset="0"/>
+              <a:buChar char="•"/>
+            </a:pPr>
+            <a:r>
+              <a:rPr dirty="0"/>
+              <a:t>Died at 78 of natural causes. The suppression isn't always murder — sometimes it's a LIFETIME OF SILENCE.</a:t>
+            </a:r>
+          </a:p>
+        </p:txBody>
+      </p:sp>
+      <p:sp>
+        <p:nvSpPr>
           <p:cNvPr id="15" name="TextBox 14">
             <a:extLst>
               <a:ext uri="{FF2B5EF4-FFF2-40B4-BE49-F238E27FC236}">
@@ -8195,99 +8292,6 @@
               <a:cs typeface="Arial"/>
               <a:sym typeface="Arial"/>
             </a:endParaRPr>
-          </a:p>
-        </p:txBody>
-      </p:sp>
-      <p:sp>
-        <p:nvSpPr>
-          <p:cNvPr id="10" name="TextBox 9">
-            <a:extLst>
-              <a:ext uri="{FF2B5EF4-FFF2-40B4-BE49-F238E27FC236}">
-                <a16:creationId xmlns:a16="http://schemas.microsoft.com/office/drawing/2014/main" id="{5FA0D8B2-6B55-D3DC-BCBB-6FEAD86B9E72}"/>
-              </a:ext>
-            </a:extLst>
-          </p:cNvPr>
-          <p:cNvSpPr txBox="1"/>
-          <p:nvPr/>
-        </p:nvSpPr>
-        <p:spPr>
-          <a:xfrm>
-            <a:off x="312431" y="2175372"/>
-            <a:ext cx="6987941" cy="3046988"/>
-          </a:xfrm>
-          <a:prstGeom prst="rect">
-            <a:avLst/>
-          </a:prstGeom>
-          <a:solidFill>
-            <a:schemeClr val="bg1">
-              <a:alpha val="84400"/>
-            </a:schemeClr>
-          </a:solidFill>
-        </p:spPr>
-        <p:txBody>
-          <a:bodyPr wrap="square" rtlCol="0">
-            <a:spAutoFit/>
-          </a:bodyPr>
-          <a:lstStyle/>
-          <a:p>
-            <a:pPr marL="285750" indent="-285750">
-              <a:spcBef>
-                <a:spcPts val="1200"/>
-              </a:spcBef>
-              <a:buFont typeface="Arial" panose="020B0604020202020204" pitchFamily="34" charset="0"/>
-              <a:buChar char="•"/>
-            </a:pPr>
-            <a:r>
-              <a:t>Lockheed Martin senior scientist with 26 patents and a 40-year defense career — waited until his DEATHBED to talk.</a:t>
-            </a:r>
-          </a:p>
-          <a:p>
-            <a:pPr marL="285750" indent="-285750">
-              <a:spcBef>
-                <a:spcPts val="1200"/>
-              </a:spcBef>
-              <a:buFont typeface="Arial" panose="020B0604020202020204" pitchFamily="34" charset="0"/>
-              <a:buChar char="•"/>
-            </a:pPr>
-            <a:r>
-              <a:t>Recorded a video claiming direct involvement in ANTIGRAVITY research and reverse-engineering exotic propulsion at Area 51.</a:t>
-            </a:r>
-          </a:p>
-          <a:p>
-            <a:pPr marL="285750" indent="-285750">
-              <a:spcBef>
-                <a:spcPts val="1200"/>
-              </a:spcBef>
-              <a:buFont typeface="Arial" panose="020B0604020202020204" pitchFamily="34" charset="0"/>
-              <a:buChar char="•"/>
-            </a:pPr>
-            <a:r>
-              <a:t>He was so AFRAID of retaliation that he stayed silent his entire career — only spoke when he was already dying.</a:t>
-            </a:r>
-          </a:p>
-          <a:p>
-            <a:pPr marL="285750" indent="-285750">
-              <a:spcBef>
-                <a:spcPts val="1200"/>
-              </a:spcBef>
-              <a:buFont typeface="Arial" panose="020B0604020202020204" pitchFamily="34" charset="0"/>
-              <a:buChar char="•"/>
-            </a:pPr>
-            <a:r>
-              <a:t>His claims align with David Grusch's 2023 congressional testimony about secret reverse-engineering programs.</a:t>
-            </a:r>
-          </a:p>
-          <a:p>
-            <a:pPr marL="285750" indent="-285750">
-              <a:spcBef>
-                <a:spcPts val="1200"/>
-              </a:spcBef>
-              <a:buFont typeface="Arial" panose="020B0604020202020204" pitchFamily="34" charset="0"/>
-              <a:buChar char="•"/>
-            </a:pPr>
-            <a:r>
-              <a:t>Died at 78 of natural causes. The suppression isn't always murder — sometimes it's a LIFETIME OF SILENCE.</a:t>
-            </a:r>
           </a:p>
         </p:txBody>
       </p:sp>
@@ -15525,10 +15529,10 @@
       </p:sp>
       <p:sp>
         <p:nvSpPr>
-          <p:cNvPr id="7" name="Google Shape;170;p31">
-            <a:extLst>
-              <a:ext uri="{FF2B5EF4-FFF2-40B4-BE49-F238E27FC236}">
-                <a16:creationId xmlns:a16="http://schemas.microsoft.com/office/drawing/2014/main" id="{4B582382-76AA-B49E-C611-39A37CE591B9}"/>
+          <p:cNvPr id="8" name="Google Shape;170;p31">
+            <a:extLst>
+              <a:ext uri="{FF2B5EF4-FFF2-40B4-BE49-F238E27FC236}">
+                <a16:creationId xmlns:a16="http://schemas.microsoft.com/office/drawing/2014/main" id="{D328ABDE-E232-3EB7-C3F2-B4BB7B64262F}"/>
               </a:ext>
             </a:extLst>
           </p:cNvPr>
@@ -15537,8 +15541,8 @@
         </p:nvSpPr>
         <p:spPr>
           <a:xfrm>
-            <a:off x="7506336" y="4925186"/>
-            <a:ext cx="4550222" cy="869505"/>
+            <a:off x="7534478" y="5850810"/>
+            <a:ext cx="4550222" cy="548230"/>
           </a:xfrm>
           <a:prstGeom prst="rect">
             <a:avLst/>
@@ -15574,14 +15578,14 @@
               <a:buNone/>
             </a:pPr>
             <a:r>
-              <a:rPr lang="en-US" sz="4800" dirty="0">
+              <a:rPr lang="en-US" sz="3600" dirty="0">
                 <a:solidFill>
                   <a:schemeClr val="lt1"/>
                 </a:solidFill>
               </a:rPr>
-              <a:t>Karen Silkwood</a:t>
-            </a:r>
-            <a:endParaRPr sz="3200" b="0" i="0" u="none" strike="noStrike" cap="none" dirty="0">
+              <a:t>Dead at Age 28</a:t>
+            </a:r>
+            <a:endParaRPr sz="2000" b="0" i="0" u="none" strike="noStrike" cap="none" dirty="0">
               <a:solidFill>
                 <a:srgbClr val="000000"/>
               </a:solidFill>
@@ -15595,76 +15599,6 @@
       </p:sp>
       <p:sp>
         <p:nvSpPr>
-          <p:cNvPr id="8" name="Google Shape;170;p31">
-            <a:extLst>
-              <a:ext uri="{FF2B5EF4-FFF2-40B4-BE49-F238E27FC236}">
-                <a16:creationId xmlns:a16="http://schemas.microsoft.com/office/drawing/2014/main" id="{D328ABDE-E232-3EB7-C3F2-B4BB7B64262F}"/>
-              </a:ext>
-            </a:extLst>
-          </p:cNvPr>
-          <p:cNvSpPr/>
-          <p:nvPr/>
-        </p:nvSpPr>
-        <p:spPr>
-          <a:xfrm>
-            <a:off x="7526107" y="5681420"/>
-            <a:ext cx="4550222" cy="548230"/>
-          </a:xfrm>
-          <a:prstGeom prst="rect">
-            <a:avLst/>
-          </a:prstGeom>
-          <a:solidFill>
-            <a:srgbClr val="C00000"/>
-          </a:solidFill>
-          <a:ln>
-            <a:noFill/>
-          </a:ln>
-        </p:spPr>
-        <p:txBody>
-          <a:bodyPr spcFirstLastPara="1" wrap="square" lIns="91425" tIns="45700" rIns="91425" bIns="45700" anchor="ctr" anchorCtr="0">
-            <a:noAutofit/>
-          </a:bodyPr>
-          <a:lstStyle/>
-          <a:p>
-            <a:pPr marL="0" marR="0" lvl="0" indent="0" algn="ctr" rtl="0">
-              <a:lnSpc>
-                <a:spcPct val="100000"/>
-              </a:lnSpc>
-              <a:spcBef>
-                <a:spcPts val="0"/>
-              </a:spcBef>
-              <a:spcAft>
-                <a:spcPts val="0"/>
-              </a:spcAft>
-              <a:buClr>
-                <a:srgbClr val="000000"/>
-              </a:buClr>
-              <a:buSzPts val="1600"/>
-              <a:buFont typeface="Arial"/>
-              <a:buNone/>
-            </a:pPr>
-            <a:r>
-              <a:rPr lang="en-US" sz="3600" dirty="0">
-                <a:solidFill>
-                  <a:schemeClr val="lt1"/>
-                </a:solidFill>
-              </a:rPr>
-              <a:t>Dead at Age 28</a:t>
-            </a:r>
-            <a:endParaRPr sz="2000" b="0" i="0" u="none" strike="noStrike" cap="none" dirty="0">
-              <a:solidFill>
-                <a:srgbClr val="000000"/>
-              </a:solidFill>
-              <a:latin typeface="Arial"/>
-              <a:ea typeface="Arial"/>
-              <a:cs typeface="Arial"/>
-              <a:sym typeface="Arial"/>
-            </a:endParaRPr>
-          </a:p>
-        </p:txBody>
-      </p:sp>
-      <p:sp>
-        <p:nvSpPr>
           <p:cNvPr id="10" name="TextBox 9">
             <a:extLst>
               <a:ext uri="{FF2B5EF4-FFF2-40B4-BE49-F238E27FC236}">
@@ -15678,7 +15612,7 @@
         <p:spPr>
           <a:xfrm>
             <a:off x="237467" y="1937976"/>
-            <a:ext cx="7713527" cy="3477875"/>
+            <a:ext cx="8691885" cy="3477875"/>
           </a:xfrm>
           <a:prstGeom prst="rect">
             <a:avLst/>
@@ -15756,7 +15690,14 @@
             </a:pPr>
             <a:r>
               <a:rPr dirty="0"/>
-              <a:t>Her family sued Kerr-McGee and settled for $1.38 million. The company never admitted a thing.</a:t>
+              <a:t>Her family sued Kerr-McGee and settled for $1.38 million. </a:t>
+            </a:r>
+            <a:br>
+              <a:rPr lang="en-US" dirty="0"/>
+            </a:br>
+            <a:r>
+              <a:rPr dirty="0"/>
+              <a:t>The company never admitted a thing.</a:t>
             </a:r>
           </a:p>
         </p:txBody>
@@ -15777,7 +15718,7 @@
         </p:blipFill>
         <p:spPr>
           <a:xfrm>
-            <a:off x="8231149" y="1100088"/>
+            <a:off x="9382218" y="1100088"/>
             <a:ext cx="2819668" cy="3884876"/>
           </a:xfrm>
           <a:prstGeom prst="rect">
@@ -15785,6 +15726,76 @@
           </a:prstGeom>
         </p:spPr>
       </p:pic>
+      <p:sp>
+        <p:nvSpPr>
+          <p:cNvPr id="7" name="Google Shape;170;p31">
+            <a:extLst>
+              <a:ext uri="{FF2B5EF4-FFF2-40B4-BE49-F238E27FC236}">
+                <a16:creationId xmlns:a16="http://schemas.microsoft.com/office/drawing/2014/main" id="{4B582382-76AA-B49E-C611-39A37CE591B9}"/>
+              </a:ext>
+            </a:extLst>
+          </p:cNvPr>
+          <p:cNvSpPr/>
+          <p:nvPr/>
+        </p:nvSpPr>
+        <p:spPr>
+          <a:xfrm>
+            <a:off x="7534478" y="5043106"/>
+            <a:ext cx="4550222" cy="869505"/>
+          </a:xfrm>
+          <a:prstGeom prst="rect">
+            <a:avLst/>
+          </a:prstGeom>
+          <a:solidFill>
+            <a:srgbClr val="C00000"/>
+          </a:solidFill>
+          <a:ln>
+            <a:noFill/>
+          </a:ln>
+        </p:spPr>
+        <p:txBody>
+          <a:bodyPr spcFirstLastPara="1" wrap="square" lIns="91425" tIns="45700" rIns="91425" bIns="45700" anchor="ctr" anchorCtr="0">
+            <a:noAutofit/>
+          </a:bodyPr>
+          <a:lstStyle/>
+          <a:p>
+            <a:pPr marL="0" marR="0" lvl="0" indent="0" algn="ctr" rtl="0">
+              <a:lnSpc>
+                <a:spcPct val="100000"/>
+              </a:lnSpc>
+              <a:spcBef>
+                <a:spcPts val="0"/>
+              </a:spcBef>
+              <a:spcAft>
+                <a:spcPts val="0"/>
+              </a:spcAft>
+              <a:buClr>
+                <a:srgbClr val="000000"/>
+              </a:buClr>
+              <a:buSzPts val="1600"/>
+              <a:buFont typeface="Arial"/>
+              <a:buNone/>
+            </a:pPr>
+            <a:r>
+              <a:rPr lang="en-US" sz="4800" dirty="0">
+                <a:solidFill>
+                  <a:schemeClr val="lt1"/>
+                </a:solidFill>
+              </a:rPr>
+              <a:t>Karen Silkwood</a:t>
+            </a:r>
+            <a:endParaRPr sz="3200" b="0" i="0" u="none" strike="noStrike" cap="none" dirty="0">
+              <a:solidFill>
+                <a:srgbClr val="000000"/>
+              </a:solidFill>
+              <a:latin typeface="Arial"/>
+              <a:ea typeface="Arial"/>
+              <a:cs typeface="Arial"/>
+              <a:sym typeface="Arial"/>
+            </a:endParaRPr>
+          </a:p>
+        </p:txBody>
+      </p:sp>
     </p:spTree>
   </p:cSld>
   <p:clrMapOvr>
@@ -23428,6 +23439,139 @@
       </p:grpSpPr>
       <p:sp>
         <p:nvSpPr>
+          <p:cNvPr id="10" name="TextBox 9">
+            <a:extLst>
+              <a:ext uri="{FF2B5EF4-FFF2-40B4-BE49-F238E27FC236}">
+                <a16:creationId xmlns:a16="http://schemas.microsoft.com/office/drawing/2014/main" id="{5FA0D8B2-6B55-D3DC-BCBB-6FEAD86B9E72}"/>
+              </a:ext>
+            </a:extLst>
+          </p:cNvPr>
+          <p:cNvSpPr txBox="1"/>
+          <p:nvPr/>
+        </p:nvSpPr>
+        <p:spPr>
+          <a:xfrm>
+            <a:off x="191731" y="1904367"/>
+            <a:ext cx="6987941" cy="3908762"/>
+          </a:xfrm>
+          <a:prstGeom prst="rect">
+            <a:avLst/>
+          </a:prstGeom>
+          <a:solidFill>
+            <a:schemeClr val="bg1">
+              <a:alpha val="84400"/>
+            </a:schemeClr>
+          </a:solidFill>
+        </p:spPr>
+        <p:txBody>
+          <a:bodyPr wrap="square" rtlCol="0">
+            <a:spAutoFit/>
+          </a:bodyPr>
+          <a:lstStyle/>
+          <a:p>
+            <a:pPr marL="285750" indent="-285750">
+              <a:spcBef>
+                <a:spcPts val="1200"/>
+              </a:spcBef>
+              <a:buFont typeface="Arial" panose="020B0604020202020204" pitchFamily="34" charset="0"/>
+              <a:buChar char="•"/>
+            </a:pPr>
+            <a:r>
+              <a:rPr dirty="0"/>
+              <a:t>Austrian inventor of "implosion" vortex energy technology — brought to the U.S. and COERCED into signing away all rights.</a:t>
+            </a:r>
+          </a:p>
+          <a:p>
+            <a:pPr marL="285750" indent="-285750">
+              <a:spcBef>
+                <a:spcPts val="1200"/>
+              </a:spcBef>
+              <a:buFont typeface="Arial" panose="020B0604020202020204" pitchFamily="34" charset="0"/>
+              <a:buChar char="•"/>
+            </a:pPr>
+            <a:r>
+              <a:rPr dirty="0"/>
+              <a:t>Held for THREE MONTHS in America. Forced to sign documents forbidding him from continuing his research.</a:t>
+            </a:r>
+          </a:p>
+          <a:p>
+            <a:pPr marL="285750" indent="-285750">
+              <a:spcBef>
+                <a:spcPts val="1200"/>
+              </a:spcBef>
+              <a:buFont typeface="Arial" panose="020B0604020202020204" pitchFamily="34" charset="0"/>
+              <a:buChar char="•"/>
+            </a:pPr>
+            <a:r>
+              <a:rPr dirty="0"/>
+              <a:t>All his documents and models were CONFISCATED.</a:t>
+            </a:r>
+          </a:p>
+          <a:p>
+            <a:pPr marL="285750" indent="-285750">
+              <a:spcBef>
+                <a:spcPts val="1200"/>
+              </a:spcBef>
+              <a:buFont typeface="Arial" panose="020B0604020202020204" pitchFamily="34" charset="0"/>
+              <a:buChar char="•"/>
+            </a:pPr>
+            <a:r>
+              <a:rPr dirty="0"/>
+              <a:t>DIED FIVE DAYS after returning to Austria. His son described </a:t>
+            </a:r>
+            <a:br>
+              <a:rPr lang="en-US" dirty="0"/>
+            </a:br>
+            <a:r>
+              <a:rPr dirty="0"/>
+              <a:t>him as "a very disillusioned man."</a:t>
+            </a:r>
+          </a:p>
+          <a:p>
+            <a:pPr marL="285750" indent="-285750">
+              <a:spcBef>
+                <a:spcPts val="1200"/>
+              </a:spcBef>
+              <a:buFont typeface="Arial" panose="020B0604020202020204" pitchFamily="34" charset="0"/>
+              <a:buChar char="•"/>
+            </a:pPr>
+            <a:r>
+              <a:rPr dirty="0"/>
+              <a:t>They took everything — his technology, his documents, his </a:t>
+            </a:r>
+            <a:br>
+              <a:rPr lang="en-US" dirty="0"/>
+            </a:br>
+            <a:r>
+              <a:rPr dirty="0"/>
+              <a:t>rights. He died five days later of a broken heart.</a:t>
+            </a:r>
+            <a:endParaRPr lang="en-US" dirty="0"/>
+          </a:p>
+          <a:p>
+            <a:pPr marL="285750" indent="-285750">
+              <a:spcBef>
+                <a:spcPts val="1200"/>
+              </a:spcBef>
+              <a:buFont typeface="Arial" panose="020B0604020202020204" pitchFamily="34" charset="0"/>
+              <a:buChar char="•"/>
+            </a:pPr>
+            <a:r>
+              <a:rPr lang="en-US" dirty="0"/>
+              <a:t>His last words: "They have taken everything from me. I don't even </a:t>
+            </a:r>
+            <a:br>
+              <a:rPr lang="en-US" dirty="0"/>
+            </a:br>
+            <a:r>
+              <a:rPr lang="en-US" dirty="0"/>
+              <a:t>own myself anymore."</a:t>
+            </a:r>
+          </a:p>
+        </p:txBody>
+      </p:sp>
+      <p:sp>
+        <p:nvSpPr>
           <p:cNvPr id="15" name="TextBox 14">
             <a:extLst>
               <a:ext uri="{FF2B5EF4-FFF2-40B4-BE49-F238E27FC236}">
@@ -23441,7 +23585,7 @@
         <p:spPr>
           <a:xfrm>
             <a:off x="312432" y="1288262"/>
-            <a:ext cx="6494294" cy="584775"/>
+            <a:ext cx="7250106" cy="584775"/>
           </a:xfrm>
           <a:prstGeom prst="rect">
             <a:avLst/>
@@ -23464,7 +23608,7 @@
                   <a:schemeClr val="accent5"/>
                 </a:solidFill>
               </a:rPr>
-              <a:t>Why / How they Thomas Bearden:</a:t>
+              <a:t>Why / How they Viktor Schauberger:</a:t>
             </a:r>
           </a:p>
         </p:txBody>
@@ -23623,7 +23767,7 @@
         </p:nvSpPr>
         <p:spPr>
           <a:xfrm>
-            <a:off x="107300" y="6229650"/>
+            <a:off x="92310" y="6285727"/>
             <a:ext cx="11685989" cy="461665"/>
           </a:xfrm>
           <a:prstGeom prst="rect">
@@ -23650,10 +23794,10 @@
       </p:sp>
       <p:sp>
         <p:nvSpPr>
-          <p:cNvPr id="8" name="Google Shape;170;p31">
-            <a:extLst>
-              <a:ext uri="{FF2B5EF4-FFF2-40B4-BE49-F238E27FC236}">
-                <a16:creationId xmlns:a16="http://schemas.microsoft.com/office/drawing/2014/main" id="{D328ABDE-E232-3EB7-C3F2-B4BB7B64262F}"/>
+          <p:cNvPr id="7" name="Google Shape;170;p31">
+            <a:extLst>
+              <a:ext uri="{FF2B5EF4-FFF2-40B4-BE49-F238E27FC236}">
+                <a16:creationId xmlns:a16="http://schemas.microsoft.com/office/drawing/2014/main" id="{4B582382-76AA-B49E-C611-39A37CE591B9}"/>
               </a:ext>
             </a:extLst>
           </p:cNvPr>
@@ -23662,8 +23806,8 @@
         </p:nvSpPr>
         <p:spPr>
           <a:xfrm>
-            <a:off x="7554249" y="6309770"/>
-            <a:ext cx="4550222" cy="548230"/>
+            <a:off x="7506336" y="4860562"/>
+            <a:ext cx="4550222" cy="1425166"/>
           </a:xfrm>
           <a:prstGeom prst="rect">
             <a:avLst/>
@@ -23699,14 +23843,14 @@
               <a:buNone/>
             </a:pPr>
             <a:r>
-              <a:rPr lang="en-US" sz="3600" dirty="0">
+              <a:rPr lang="en-US" sz="4800" dirty="0">
                 <a:solidFill>
                   <a:schemeClr val="lt1"/>
                 </a:solidFill>
               </a:rPr>
-              <a:t>Dead at Age 91</a:t>
-            </a:r>
-            <a:endParaRPr sz="2000" b="0" i="0" u="none" strike="noStrike" cap="none" dirty="0">
+              <a:t>Viktor Schauberger</a:t>
+            </a:r>
+            <a:endParaRPr sz="3200" b="0" i="0" u="none" strike="noStrike" cap="none" dirty="0">
               <a:solidFill>
                 <a:srgbClr val="000000"/>
               </a:solidFill>
@@ -23720,154 +23864,10 @@
       </p:sp>
       <p:sp>
         <p:nvSpPr>
-          <p:cNvPr id="10" name="TextBox 9">
-            <a:extLst>
-              <a:ext uri="{FF2B5EF4-FFF2-40B4-BE49-F238E27FC236}">
-                <a16:creationId xmlns:a16="http://schemas.microsoft.com/office/drawing/2014/main" id="{5FA0D8B2-6B55-D3DC-BCBB-6FEAD86B9E72}"/>
-              </a:ext>
-            </a:extLst>
-          </p:cNvPr>
-          <p:cNvSpPr txBox="1"/>
-          <p:nvPr/>
-        </p:nvSpPr>
-        <p:spPr>
-          <a:xfrm>
-            <a:off x="135442" y="1878198"/>
-            <a:ext cx="8307768" cy="3200876"/>
-          </a:xfrm>
-          <a:prstGeom prst="rect">
-            <a:avLst/>
-          </a:prstGeom>
-          <a:solidFill>
-            <a:schemeClr val="bg1">
-              <a:alpha val="84400"/>
-            </a:schemeClr>
-          </a:solidFill>
-        </p:spPr>
-        <p:txBody>
-          <a:bodyPr wrap="square" rtlCol="0">
-            <a:spAutoFit/>
-          </a:bodyPr>
-          <a:lstStyle/>
-          <a:p>
-            <a:pPr marL="285750" indent="-285750">
-              <a:spcBef>
-                <a:spcPts val="1200"/>
-              </a:spcBef>
-              <a:buFont typeface="Arial" panose="020B0604020202020204" pitchFamily="34" charset="0"/>
-              <a:buChar char="•"/>
-            </a:pPr>
-            <a:r>
-              <a:rPr dirty="0"/>
-              <a:t>Retired Army Lt. Colonel who invented the Motionless Electromagnetic Generator — US Patent 6,362,718.</a:t>
-            </a:r>
-          </a:p>
-          <a:p>
-            <a:pPr marL="285750" indent="-285750">
-              <a:spcBef>
-                <a:spcPts val="1200"/>
-              </a:spcBef>
-              <a:buFont typeface="Arial" panose="020B0604020202020204" pitchFamily="34" charset="0"/>
-              <a:buChar char="•"/>
-            </a:pPr>
-            <a:r>
-              <a:rPr dirty="0"/>
-              <a:t>Spent DECADES advocating for zero-point energy extraction and scalar electromagnetics.</a:t>
-            </a:r>
-          </a:p>
-          <a:p>
-            <a:pPr marL="285750" indent="-285750">
-              <a:spcBef>
-                <a:spcPts val="1200"/>
-              </a:spcBef>
-              <a:buFont typeface="Arial" panose="020B0604020202020204" pitchFamily="34" charset="0"/>
-              <a:buChar char="•"/>
-            </a:pPr>
-            <a:r>
-              <a:rPr dirty="0"/>
-              <a:t>Collaborated with John Bedini for over 20 years on free energy research.</a:t>
-            </a:r>
-          </a:p>
-          <a:p>
-            <a:pPr marL="285750" indent="-285750">
-              <a:spcBef>
-                <a:spcPts val="1200"/>
-              </a:spcBef>
-              <a:buFont typeface="Arial" panose="020B0604020202020204" pitchFamily="34" charset="0"/>
-              <a:buChar char="•"/>
-            </a:pPr>
-            <a:r>
-              <a:rPr dirty="0"/>
-              <a:t>His MEG had NO moving parts and allegedly extracted energy from the quantum vacuum.</a:t>
-            </a:r>
-          </a:p>
-          <a:p>
-            <a:pPr marL="285750" indent="-285750">
-              <a:spcBef>
-                <a:spcPts val="1200"/>
-              </a:spcBef>
-              <a:buFont typeface="Arial" panose="020B0604020202020204" pitchFamily="34" charset="0"/>
-              <a:buChar char="•"/>
-            </a:pPr>
-            <a:r>
-              <a:rPr dirty="0"/>
-              <a:t>Died at 91 after a lengthy illness in Huntsville, Alabama. A lifetime of advocacy, zero commercialization.</a:t>
-            </a:r>
-          </a:p>
-        </p:txBody>
-      </p:sp>
-      <p:pic>
-        <p:nvPicPr>
-          <p:cNvPr id="2050" name="Picture 2" descr="RET Lt. Col Thomas Eugene Bearden obituary, 1930-2022, Huntsville, AL">
-            <a:extLst>
-              <a:ext uri="{FF2B5EF4-FFF2-40B4-BE49-F238E27FC236}">
-                <a16:creationId xmlns:a16="http://schemas.microsoft.com/office/drawing/2014/main" id="{FE8FA63B-5FEC-6D9A-9943-30B188CD86EF}"/>
-              </a:ext>
-            </a:extLst>
-          </p:cNvPr>
-          <p:cNvPicPr>
-            <a:picLocks noChangeAspect="1" noChangeArrowheads="1"/>
-          </p:cNvPicPr>
-          <p:nvPr/>
-        </p:nvPicPr>
-        <p:blipFill>
-          <a:blip r:embed="rId2">
-            <a:extLst>
-              <a:ext uri="{28A0092B-C50C-407E-A947-70E740481C1C}">
-                <a14:useLocalDpi xmlns:a14="http://schemas.microsoft.com/office/drawing/2010/main" val="0"/>
-              </a:ext>
-            </a:extLst>
-          </a:blip>
-          <a:srcRect/>
-          <a:stretch>
-            <a:fillRect/>
-          </a:stretch>
-        </p:blipFill>
-        <p:spPr bwMode="auto">
-          <a:xfrm>
-            <a:off x="8720528" y="1100088"/>
-            <a:ext cx="3471472" cy="3527919"/>
-          </a:xfrm>
-          <a:prstGeom prst="rect">
-            <a:avLst/>
-          </a:prstGeom>
-          <a:extLst>
-            <a:ext uri="{909E8E84-426E-40DD-AFC4-6F175D3DCCD1}">
-              <a14:hiddenFill xmlns:a14="http://schemas.microsoft.com/office/drawing/2010/main">
-                <a:solidFill>
-                  <a:srgbClr val="FFFFFF"/>
-                </a:solidFill>
-              </a14:hiddenFill>
-            </a:ext>
-          </a:extLst>
-        </p:spPr>
-      </p:pic>
-      <p:sp>
-        <p:nvSpPr>
-          <p:cNvPr id="7" name="Google Shape;170;p31">
-            <a:extLst>
-              <a:ext uri="{FF2B5EF4-FFF2-40B4-BE49-F238E27FC236}">
-                <a16:creationId xmlns:a16="http://schemas.microsoft.com/office/drawing/2014/main" id="{4B582382-76AA-B49E-C611-39A37CE591B9}"/>
+          <p:cNvPr id="8" name="Google Shape;170;p31">
+            <a:extLst>
+              <a:ext uri="{FF2B5EF4-FFF2-40B4-BE49-F238E27FC236}">
+                <a16:creationId xmlns:a16="http://schemas.microsoft.com/office/drawing/2014/main" id="{D328ABDE-E232-3EB7-C3F2-B4BB7B64262F}"/>
               </a:ext>
             </a:extLst>
           </p:cNvPr>
@@ -23876,8 +23876,8 @@
         </p:nvSpPr>
         <p:spPr>
           <a:xfrm>
-            <a:off x="7534478" y="4852086"/>
-            <a:ext cx="4550222" cy="1570955"/>
+            <a:off x="7641778" y="6285727"/>
+            <a:ext cx="4550222" cy="548230"/>
           </a:xfrm>
           <a:prstGeom prst="rect">
             <a:avLst/>
@@ -23913,14 +23913,14 @@
               <a:buNone/>
             </a:pPr>
             <a:r>
-              <a:rPr lang="en-US" sz="4800" dirty="0">
+              <a:rPr lang="en-US" sz="3600" dirty="0">
                 <a:solidFill>
                   <a:schemeClr val="lt1"/>
                 </a:solidFill>
               </a:rPr>
-              <a:t>Thomas Bearden</a:t>
-            </a:r>
-            <a:endParaRPr sz="3200" b="0" i="0" u="none" strike="noStrike" cap="none" dirty="0">
+              <a:t>Dead at Age 73</a:t>
+            </a:r>
+            <a:endParaRPr sz="2000" b="0" i="0" u="none" strike="noStrike" cap="none" dirty="0">
               <a:solidFill>
                 <a:srgbClr val="000000"/>
               </a:solidFill>
@@ -23932,6 +23932,30 @@
           </a:p>
         </p:txBody>
       </p:sp>
+      <p:pic>
+        <p:nvPicPr>
+          <p:cNvPr id="16" name="Picture 15" descr="Viktor_Schauberger.jpg"/>
+          <p:cNvPicPr>
+            <a:picLocks noChangeAspect="1"/>
+          </p:cNvPicPr>
+          <p:nvPr/>
+        </p:nvPicPr>
+        <p:blipFill>
+          <a:blip r:embed="rId2"/>
+          <a:stretch>
+            <a:fillRect/>
+          </a:stretch>
+        </p:blipFill>
+        <p:spPr>
+          <a:xfrm>
+            <a:off x="7506336" y="1354550"/>
+            <a:ext cx="5387784" cy="3367365"/>
+          </a:xfrm>
+          <a:prstGeom prst="rect">
+            <a:avLst/>
+          </a:prstGeom>
+        </p:spPr>
+      </p:pic>
     </p:spTree>
   </p:cSld>
   <p:clrMapOvr>
@@ -23957,9 +23981,469 @@
           <a:chExt cx="0" cy="0"/>
         </a:xfrm>
       </p:grpSpPr>
+      <p:sp>
+        <p:nvSpPr>
+          <p:cNvPr id="15" name="TextBox 14">
+            <a:extLst>
+              <a:ext uri="{FF2B5EF4-FFF2-40B4-BE49-F238E27FC236}">
+                <a16:creationId xmlns:a16="http://schemas.microsoft.com/office/drawing/2014/main" id="{E478240E-251B-5BA6-3C45-7E6620400769}"/>
+              </a:ext>
+            </a:extLst>
+          </p:cNvPr>
+          <p:cNvSpPr txBox="1"/>
+          <p:nvPr/>
+        </p:nvSpPr>
+        <p:spPr>
+          <a:xfrm>
+            <a:off x="312432" y="1288262"/>
+            <a:ext cx="6494294" cy="584775"/>
+          </a:xfrm>
+          <a:prstGeom prst="rect">
+            <a:avLst/>
+          </a:prstGeom>
+          <a:solidFill>
+            <a:schemeClr val="bg1">
+              <a:alpha val="84400"/>
+            </a:schemeClr>
+          </a:solidFill>
+        </p:spPr>
+        <p:txBody>
+          <a:bodyPr wrap="square" rtlCol="0">
+            <a:spAutoFit/>
+          </a:bodyPr>
+          <a:lstStyle/>
+          <a:p>
+            <a:r>
+              <a:rPr lang="en-US" sz="3200" b="1" dirty="0">
+                <a:solidFill>
+                  <a:schemeClr val="accent5"/>
+                </a:solidFill>
+              </a:rPr>
+              <a:t>Why / How they Paul Bennewitz:</a:t>
+            </a:r>
+          </a:p>
+        </p:txBody>
+      </p:sp>
+      <p:sp>
+        <p:nvSpPr>
+          <p:cNvPr id="3" name="Google Shape;170;p31">
+            <a:extLst>
+              <a:ext uri="{FF2B5EF4-FFF2-40B4-BE49-F238E27FC236}">
+                <a16:creationId xmlns:a16="http://schemas.microsoft.com/office/drawing/2014/main" id="{A4695FE5-0AA5-AB05-98B1-B5B8E3FA8CBE}"/>
+              </a:ext>
+            </a:extLst>
+          </p:cNvPr>
+          <p:cNvSpPr/>
+          <p:nvPr/>
+        </p:nvSpPr>
+        <p:spPr>
+          <a:xfrm>
+            <a:off x="191731" y="5732890"/>
+            <a:ext cx="3431270" cy="496760"/>
+          </a:xfrm>
+          <a:prstGeom prst="rect">
+            <a:avLst/>
+          </a:prstGeom>
+          <a:solidFill>
+            <a:schemeClr val="accent5"/>
+          </a:solidFill>
+          <a:ln>
+            <a:noFill/>
+          </a:ln>
+        </p:spPr>
+        <p:txBody>
+          <a:bodyPr spcFirstLastPara="1" wrap="square" lIns="91425" tIns="45700" rIns="91425" bIns="45700" anchor="ctr" anchorCtr="0">
+            <a:noAutofit/>
+          </a:bodyPr>
+          <a:lstStyle/>
+          <a:p>
+            <a:pPr marL="0" marR="0" lvl="0" indent="0" algn="ctr" rtl="0">
+              <a:lnSpc>
+                <a:spcPct val="100000"/>
+              </a:lnSpc>
+              <a:spcBef>
+                <a:spcPts val="0"/>
+              </a:spcBef>
+              <a:spcAft>
+                <a:spcPts val="0"/>
+              </a:spcAft>
+              <a:buClr>
+                <a:srgbClr val="000000"/>
+              </a:buClr>
+              <a:buSzPts val="1600"/>
+              <a:buFont typeface="Arial"/>
+              <a:buNone/>
+            </a:pPr>
+            <a:r>
+              <a:rPr lang="en-US" sz="3600" dirty="0">
+                <a:solidFill>
+                  <a:schemeClr val="lt1"/>
+                </a:solidFill>
+              </a:rPr>
+              <a:t>Read List Here:</a:t>
+            </a:r>
+            <a:endParaRPr sz="2000" b="0" i="0" u="none" strike="noStrike" cap="none" dirty="0">
+              <a:solidFill>
+                <a:srgbClr val="000000"/>
+              </a:solidFill>
+              <a:latin typeface="Arial"/>
+              <a:ea typeface="Arial"/>
+              <a:cs typeface="Arial"/>
+              <a:sym typeface="Arial"/>
+            </a:endParaRPr>
+          </a:p>
+        </p:txBody>
+      </p:sp>
+      <p:sp>
+        <p:nvSpPr>
+          <p:cNvPr id="5" name="Google Shape;170;p31">
+            <a:extLst>
+              <a:ext uri="{FF2B5EF4-FFF2-40B4-BE49-F238E27FC236}">
+                <a16:creationId xmlns:a16="http://schemas.microsoft.com/office/drawing/2014/main" id="{98132413-6ED2-8B36-74B6-3C503B1A4634}"/>
+              </a:ext>
+            </a:extLst>
+          </p:cNvPr>
+          <p:cNvSpPr/>
+          <p:nvPr/>
+        </p:nvSpPr>
+        <p:spPr>
+          <a:xfrm>
+            <a:off x="0" y="-31518"/>
+            <a:ext cx="12192000" cy="1131606"/>
+          </a:xfrm>
+          <a:prstGeom prst="rect">
+            <a:avLst/>
+          </a:prstGeom>
+          <a:solidFill>
+            <a:srgbClr val="C00000"/>
+          </a:solidFill>
+          <a:ln>
+            <a:noFill/>
+          </a:ln>
+        </p:spPr>
+        <p:txBody>
+          <a:bodyPr spcFirstLastPara="1" wrap="square" lIns="91425" tIns="45700" rIns="91425" bIns="45700" anchor="ctr" anchorCtr="0">
+            <a:noAutofit/>
+          </a:bodyPr>
+          <a:lstStyle/>
+          <a:p>
+            <a:pPr marL="0" marR="0" lvl="0" indent="0" rtl="0">
+              <a:lnSpc>
+                <a:spcPct val="100000"/>
+              </a:lnSpc>
+              <a:spcBef>
+                <a:spcPts val="0"/>
+              </a:spcBef>
+              <a:spcAft>
+                <a:spcPts val="0"/>
+              </a:spcAft>
+              <a:buClr>
+                <a:srgbClr val="000000"/>
+              </a:buClr>
+              <a:buSzPts val="1600"/>
+              <a:buFont typeface="Arial"/>
+              <a:buNone/>
+            </a:pPr>
+            <a:r>
+              <a:rPr lang="en-US" sz="4800" dirty="0">
+                <a:solidFill>
+                  <a:schemeClr val="lt1"/>
+                </a:solidFill>
+              </a:rPr>
+              <a:t> 60+ Murdered: Energy Inventors Silenced</a:t>
+            </a:r>
+            <a:endParaRPr sz="3200" b="0" i="0" u="none" strike="noStrike" cap="none" dirty="0">
+              <a:solidFill>
+                <a:srgbClr val="000000"/>
+              </a:solidFill>
+              <a:latin typeface="Arial"/>
+              <a:ea typeface="Arial"/>
+              <a:cs typeface="Arial"/>
+              <a:sym typeface="Arial"/>
+            </a:endParaRPr>
+          </a:p>
+        </p:txBody>
+      </p:sp>
+      <p:sp>
+        <p:nvSpPr>
+          <p:cNvPr id="4" name="TextBox 3">
+            <a:extLst>
+              <a:ext uri="{FF2B5EF4-FFF2-40B4-BE49-F238E27FC236}">
+                <a16:creationId xmlns:a16="http://schemas.microsoft.com/office/drawing/2014/main" id="{50D7621F-9D36-7894-7117-9F831EF5EFA6}"/>
+              </a:ext>
+            </a:extLst>
+          </p:cNvPr>
+          <p:cNvSpPr txBox="1"/>
+          <p:nvPr/>
+        </p:nvSpPr>
+        <p:spPr>
+          <a:xfrm>
+            <a:off x="107300" y="6229650"/>
+            <a:ext cx="11685989" cy="461665"/>
+          </a:xfrm>
+          <a:prstGeom prst="rect">
+            <a:avLst/>
+          </a:prstGeom>
+          <a:solidFill>
+            <a:schemeClr val="bg1">
+              <a:alpha val="84400"/>
+            </a:schemeClr>
+          </a:solidFill>
+        </p:spPr>
+        <p:txBody>
+          <a:bodyPr wrap="square" rtlCol="0">
+            <a:spAutoFit/>
+          </a:bodyPr>
+          <a:lstStyle/>
+          <a:p>
+            <a:r>
+              <a:rPr lang="en-US" sz="2400" dirty="0"/>
+              <a:t>https://uapmurders.com/energy</a:t>
+            </a:r>
+          </a:p>
+        </p:txBody>
+      </p:sp>
+      <p:sp>
+        <p:nvSpPr>
+          <p:cNvPr id="7" name="Google Shape;170;p31">
+            <a:extLst>
+              <a:ext uri="{FF2B5EF4-FFF2-40B4-BE49-F238E27FC236}">
+                <a16:creationId xmlns:a16="http://schemas.microsoft.com/office/drawing/2014/main" id="{4B582382-76AA-B49E-C611-39A37CE591B9}"/>
+              </a:ext>
+            </a:extLst>
+          </p:cNvPr>
+          <p:cNvSpPr/>
+          <p:nvPr/>
+        </p:nvSpPr>
+        <p:spPr>
+          <a:xfrm>
+            <a:off x="7621666" y="5584213"/>
+            <a:ext cx="4550222" cy="869505"/>
+          </a:xfrm>
+          <a:prstGeom prst="rect">
+            <a:avLst/>
+          </a:prstGeom>
+          <a:solidFill>
+            <a:srgbClr val="C00000"/>
+          </a:solidFill>
+          <a:ln>
+            <a:noFill/>
+          </a:ln>
+        </p:spPr>
+        <p:txBody>
+          <a:bodyPr spcFirstLastPara="1" wrap="square" lIns="91425" tIns="45700" rIns="91425" bIns="45700" anchor="ctr" anchorCtr="0">
+            <a:noAutofit/>
+          </a:bodyPr>
+          <a:lstStyle/>
+          <a:p>
+            <a:pPr marL="0" marR="0" lvl="0" indent="0" algn="ctr" rtl="0">
+              <a:lnSpc>
+                <a:spcPct val="100000"/>
+              </a:lnSpc>
+              <a:spcBef>
+                <a:spcPts val="0"/>
+              </a:spcBef>
+              <a:spcAft>
+                <a:spcPts val="0"/>
+              </a:spcAft>
+              <a:buClr>
+                <a:srgbClr val="000000"/>
+              </a:buClr>
+              <a:buSzPts val="1600"/>
+              <a:buFont typeface="Arial"/>
+              <a:buNone/>
+            </a:pPr>
+            <a:r>
+              <a:rPr lang="en-US" sz="4800" dirty="0">
+                <a:solidFill>
+                  <a:schemeClr val="lt1"/>
+                </a:solidFill>
+              </a:rPr>
+              <a:t>Paul Bennewitz</a:t>
+            </a:r>
+            <a:endParaRPr sz="3200" b="0" i="0" u="none" strike="noStrike" cap="none" dirty="0">
+              <a:solidFill>
+                <a:srgbClr val="000000"/>
+              </a:solidFill>
+              <a:latin typeface="Arial"/>
+              <a:ea typeface="Arial"/>
+              <a:cs typeface="Arial"/>
+              <a:sym typeface="Arial"/>
+            </a:endParaRPr>
+          </a:p>
+        </p:txBody>
+      </p:sp>
+      <p:sp>
+        <p:nvSpPr>
+          <p:cNvPr id="8" name="Google Shape;170;p31">
+            <a:extLst>
+              <a:ext uri="{FF2B5EF4-FFF2-40B4-BE49-F238E27FC236}">
+                <a16:creationId xmlns:a16="http://schemas.microsoft.com/office/drawing/2014/main" id="{D328ABDE-E232-3EB7-C3F2-B4BB7B64262F}"/>
+              </a:ext>
+            </a:extLst>
+          </p:cNvPr>
+          <p:cNvSpPr/>
+          <p:nvPr/>
+        </p:nvSpPr>
+        <p:spPr>
+          <a:xfrm>
+            <a:off x="7641437" y="6340447"/>
+            <a:ext cx="4550222" cy="548230"/>
+          </a:xfrm>
+          <a:prstGeom prst="rect">
+            <a:avLst/>
+          </a:prstGeom>
+          <a:solidFill>
+            <a:srgbClr val="C00000"/>
+          </a:solidFill>
+          <a:ln>
+            <a:noFill/>
+          </a:ln>
+        </p:spPr>
+        <p:txBody>
+          <a:bodyPr spcFirstLastPara="1" wrap="square" lIns="91425" tIns="45700" rIns="91425" bIns="45700" anchor="ctr" anchorCtr="0">
+            <a:noAutofit/>
+          </a:bodyPr>
+          <a:lstStyle/>
+          <a:p>
+            <a:pPr marL="0" marR="0" lvl="0" indent="0" algn="ctr" rtl="0">
+              <a:lnSpc>
+                <a:spcPct val="100000"/>
+              </a:lnSpc>
+              <a:spcBef>
+                <a:spcPts val="0"/>
+              </a:spcBef>
+              <a:spcAft>
+                <a:spcPts val="0"/>
+              </a:spcAft>
+              <a:buClr>
+                <a:srgbClr val="000000"/>
+              </a:buClr>
+              <a:buSzPts val="1600"/>
+              <a:buFont typeface="Arial"/>
+              <a:buNone/>
+            </a:pPr>
+            <a:r>
+              <a:rPr lang="en-US" sz="3600" dirty="0">
+                <a:solidFill>
+                  <a:schemeClr val="lt1"/>
+                </a:solidFill>
+              </a:rPr>
+              <a:t>Dead at Age 75</a:t>
+            </a:r>
+            <a:endParaRPr sz="2000" b="0" i="0" u="none" strike="noStrike" cap="none" dirty="0">
+              <a:solidFill>
+                <a:srgbClr val="000000"/>
+              </a:solidFill>
+              <a:latin typeface="Arial"/>
+              <a:ea typeface="Arial"/>
+              <a:cs typeface="Arial"/>
+              <a:sym typeface="Arial"/>
+            </a:endParaRPr>
+          </a:p>
+        </p:txBody>
+      </p:sp>
+      <p:sp>
+        <p:nvSpPr>
+          <p:cNvPr id="10" name="TextBox 9">
+            <a:extLst>
+              <a:ext uri="{FF2B5EF4-FFF2-40B4-BE49-F238E27FC236}">
+                <a16:creationId xmlns:a16="http://schemas.microsoft.com/office/drawing/2014/main" id="{5FA0D8B2-6B55-D3DC-BCBB-6FEAD86B9E72}"/>
+              </a:ext>
+            </a:extLst>
+          </p:cNvPr>
+          <p:cNvSpPr txBox="1"/>
+          <p:nvPr/>
+        </p:nvSpPr>
+        <p:spPr>
+          <a:xfrm>
+            <a:off x="157713" y="1925931"/>
+            <a:ext cx="7906705" cy="3477875"/>
+          </a:xfrm>
+          <a:prstGeom prst="rect">
+            <a:avLst/>
+          </a:prstGeom>
+          <a:solidFill>
+            <a:schemeClr val="bg1">
+              <a:alpha val="84400"/>
+            </a:schemeClr>
+          </a:solidFill>
+        </p:spPr>
+        <p:txBody>
+          <a:bodyPr wrap="square" rtlCol="0">
+            <a:spAutoFit/>
+          </a:bodyPr>
+          <a:lstStyle/>
+          <a:p>
+            <a:pPr marL="285750" indent="-285750">
+              <a:spcBef>
+                <a:spcPts val="1200"/>
+              </a:spcBef>
+              <a:buFont typeface="Arial" panose="020B0604020202020204" pitchFamily="34" charset="0"/>
+              <a:buChar char="•"/>
+            </a:pPr>
+            <a:r>
+              <a:rPr dirty="0"/>
+              <a:t>Electrical engineer DELIBERATELY DRIVEN TO A MENTAL BREAKDOWN by a coordinated Air Force disinformation campaign.</a:t>
+            </a:r>
+          </a:p>
+          <a:p>
+            <a:pPr marL="285750" indent="-285750">
+              <a:spcBef>
+                <a:spcPts val="1200"/>
+              </a:spcBef>
+              <a:buFont typeface="Arial" panose="020B0604020202020204" pitchFamily="34" charset="0"/>
+              <a:buChar char="•"/>
+            </a:pPr>
+            <a:r>
+              <a:rPr dirty="0"/>
+              <a:t>He intercepted classified military signals near Kirtland AFB — so they DESTROYED HIS MIND instead of briefing him.</a:t>
+            </a:r>
+          </a:p>
+          <a:p>
+            <a:pPr marL="285750" indent="-285750">
+              <a:spcBef>
+                <a:spcPts val="1200"/>
+              </a:spcBef>
+              <a:buFont typeface="Arial" panose="020B0604020202020204" pitchFamily="34" charset="0"/>
+              <a:buChar char="•"/>
+            </a:pPr>
+            <a:r>
+              <a:rPr dirty="0"/>
+              <a:t>Built precision instruments for NASA and the military through his company Thunder Scientific Corporation.</a:t>
+            </a:r>
+          </a:p>
+          <a:p>
+            <a:pPr marL="285750" indent="-285750">
+              <a:spcBef>
+                <a:spcPts val="1200"/>
+              </a:spcBef>
+              <a:buFont typeface="Arial" panose="020B0604020202020204" pitchFamily="34" charset="0"/>
+              <a:buChar char="•"/>
+            </a:pPr>
+            <a:r>
+              <a:rPr dirty="0"/>
+              <a:t>AFOSI agent William Moore publicly CONFESSED to participating in the operation at a 1989 MUFON conference.</a:t>
+            </a:r>
+          </a:p>
+          <a:p>
+            <a:pPr marL="285750" indent="-285750">
+              <a:spcBef>
+                <a:spcPts val="1200"/>
+              </a:spcBef>
+              <a:buFont typeface="Arial" panose="020B0604020202020204" pitchFamily="34" charset="0"/>
+              <a:buChar char="•"/>
+            </a:pPr>
+            <a:r>
+              <a:rPr dirty="0"/>
+              <a:t>They didn't kill him. They made him crazy. A documented, confessed psychological operation against a U.S. civilian.</a:t>
+            </a:r>
+          </a:p>
+        </p:txBody>
+      </p:sp>
       <p:pic>
         <p:nvPicPr>
-          <p:cNvPr id="16" name="Picture 15" descr="Viktor_Schauberger.jpg"/>
+          <p:cNvPr id="16" name="Picture 15" descr="Paul_Bennewitz.jpg"/>
           <p:cNvPicPr>
             <a:picLocks noChangeAspect="1"/>
           </p:cNvPicPr>
@@ -23973,475 +24457,67 @@
         </p:blipFill>
         <p:spPr>
           <a:xfrm>
-            <a:off x="6947091" y="1358843"/>
-            <a:ext cx="5387784" cy="3367365"/>
+            <a:off x="8507170" y="1759115"/>
+            <a:ext cx="3884876" cy="3884876"/>
           </a:xfrm>
           <a:prstGeom prst="rect">
             <a:avLst/>
           </a:prstGeom>
         </p:spPr>
       </p:pic>
-      <p:sp>
-        <p:nvSpPr>
-          <p:cNvPr id="15" name="TextBox 14">
-            <a:extLst>
-              <a:ext uri="{FF2B5EF4-FFF2-40B4-BE49-F238E27FC236}">
-                <a16:creationId xmlns:a16="http://schemas.microsoft.com/office/drawing/2014/main" id="{E478240E-251B-5BA6-3C45-7E6620400769}"/>
-              </a:ext>
-            </a:extLst>
-          </p:cNvPr>
-          <p:cNvSpPr txBox="1"/>
-          <p:nvPr/>
-        </p:nvSpPr>
-        <p:spPr>
-          <a:xfrm>
-            <a:off x="312432" y="1288262"/>
-            <a:ext cx="7250106" cy="584775"/>
-          </a:xfrm>
-          <a:prstGeom prst="rect">
-            <a:avLst/>
-          </a:prstGeom>
-          <a:solidFill>
-            <a:schemeClr val="bg1">
-              <a:alpha val="84400"/>
-            </a:schemeClr>
-          </a:solidFill>
-        </p:spPr>
-        <p:txBody>
-          <a:bodyPr wrap="square" rtlCol="0">
-            <a:spAutoFit/>
-          </a:bodyPr>
-          <a:lstStyle/>
-          <a:p>
-            <a:r>
-              <a:rPr lang="en-US" sz="3200" b="1" dirty="0">
+      <p:pic>
+        <p:nvPicPr>
+          <p:cNvPr id="9218" name="Picture 2" descr="undefined">
+            <a:extLst>
+              <a:ext uri="{FF2B5EF4-FFF2-40B4-BE49-F238E27FC236}">
+                <a16:creationId xmlns:a16="http://schemas.microsoft.com/office/drawing/2014/main" id="{FCC578E4-C0E0-F6C8-9C82-D3EE75321433}"/>
+              </a:ext>
+            </a:extLst>
+          </p:cNvPr>
+          <p:cNvPicPr>
+            <a:picLocks noChangeAspect="1" noChangeArrowheads="1"/>
+          </p:cNvPicPr>
+          <p:nvPr/>
+        </p:nvPicPr>
+        <p:blipFill>
+          <a:blip r:embed="rId3">
+            <a:extLst>
+              <a:ext uri="{28A0092B-C50C-407E-A947-70E740481C1C}">
+                <a14:useLocalDpi xmlns:a14="http://schemas.microsoft.com/office/drawing/2010/main" val="0"/>
+              </a:ext>
+            </a:extLst>
+          </a:blip>
+          <a:srcRect/>
+          <a:stretch>
+            <a:fillRect/>
+          </a:stretch>
+        </p:blipFill>
+        <p:spPr bwMode="auto">
+          <a:xfrm>
+            <a:off x="7776518" y="3679880"/>
+            <a:ext cx="2511941" cy="1904333"/>
+          </a:xfrm>
+          <a:prstGeom prst="rect">
+            <a:avLst/>
+          </a:prstGeom>
+          <a:noFill/>
+          <a:extLst>
+            <a:ext uri="{909E8E84-426E-40DD-AFC4-6F175D3DCCD1}">
+              <a14:hiddenFill xmlns:a14="http://schemas.microsoft.com/office/drawing/2010/main">
                 <a:solidFill>
-                  <a:schemeClr val="accent5"/>
+                  <a:srgbClr val="FFFFFF"/>
                 </a:solidFill>
-              </a:rPr>
-              <a:t>Why / How they Viktor Schauberger:</a:t>
-            </a:r>
-          </a:p>
-        </p:txBody>
-      </p:sp>
-      <p:sp>
-        <p:nvSpPr>
-          <p:cNvPr id="3" name="Google Shape;170;p31">
-            <a:extLst>
-              <a:ext uri="{FF2B5EF4-FFF2-40B4-BE49-F238E27FC236}">
-                <a16:creationId xmlns:a16="http://schemas.microsoft.com/office/drawing/2014/main" id="{A4695FE5-0AA5-AB05-98B1-B5B8E3FA8CBE}"/>
-              </a:ext>
-            </a:extLst>
-          </p:cNvPr>
-          <p:cNvSpPr/>
-          <p:nvPr/>
-        </p:nvSpPr>
-        <p:spPr>
-          <a:xfrm>
-            <a:off x="191731" y="5732890"/>
-            <a:ext cx="3431270" cy="496760"/>
-          </a:xfrm>
-          <a:prstGeom prst="rect">
-            <a:avLst/>
-          </a:prstGeom>
-          <a:solidFill>
-            <a:schemeClr val="accent5"/>
-          </a:solidFill>
-          <a:ln>
-            <a:noFill/>
-          </a:ln>
-        </p:spPr>
-        <p:txBody>
-          <a:bodyPr spcFirstLastPara="1" wrap="square" lIns="91425" tIns="45700" rIns="91425" bIns="45700" anchor="ctr" anchorCtr="0">
-            <a:noAutofit/>
-          </a:bodyPr>
-          <a:lstStyle/>
-          <a:p>
-            <a:pPr marL="0" marR="0" lvl="0" indent="0" algn="ctr" rtl="0">
-              <a:lnSpc>
-                <a:spcPct val="100000"/>
-              </a:lnSpc>
-              <a:spcBef>
-                <a:spcPts val="0"/>
-              </a:spcBef>
-              <a:spcAft>
-                <a:spcPts val="0"/>
-              </a:spcAft>
-              <a:buClr>
-                <a:srgbClr val="000000"/>
-              </a:buClr>
-              <a:buSzPts val="1600"/>
-              <a:buFont typeface="Arial"/>
-              <a:buNone/>
-            </a:pPr>
-            <a:r>
-              <a:rPr lang="en-US" sz="3600" dirty="0">
-                <a:solidFill>
-                  <a:schemeClr val="lt1"/>
-                </a:solidFill>
-              </a:rPr>
-              <a:t>Read List Here:</a:t>
-            </a:r>
-            <a:endParaRPr sz="2000" b="0" i="0" u="none" strike="noStrike" cap="none" dirty="0">
-              <a:solidFill>
-                <a:srgbClr val="000000"/>
-              </a:solidFill>
-              <a:latin typeface="Arial"/>
-              <a:ea typeface="Arial"/>
-              <a:cs typeface="Arial"/>
-              <a:sym typeface="Arial"/>
-            </a:endParaRPr>
-          </a:p>
-        </p:txBody>
-      </p:sp>
-      <p:sp>
-        <p:nvSpPr>
-          <p:cNvPr id="5" name="Google Shape;170;p31">
-            <a:extLst>
-              <a:ext uri="{FF2B5EF4-FFF2-40B4-BE49-F238E27FC236}">
-                <a16:creationId xmlns:a16="http://schemas.microsoft.com/office/drawing/2014/main" id="{98132413-6ED2-8B36-74B6-3C503B1A4634}"/>
-              </a:ext>
-            </a:extLst>
-          </p:cNvPr>
-          <p:cNvSpPr/>
-          <p:nvPr/>
-        </p:nvSpPr>
-        <p:spPr>
-          <a:xfrm>
-            <a:off x="0" y="-31518"/>
-            <a:ext cx="12192000" cy="1131606"/>
-          </a:xfrm>
-          <a:prstGeom prst="rect">
-            <a:avLst/>
-          </a:prstGeom>
-          <a:solidFill>
-            <a:srgbClr val="C00000"/>
-          </a:solidFill>
-          <a:ln>
-            <a:noFill/>
-          </a:ln>
-        </p:spPr>
-        <p:txBody>
-          <a:bodyPr spcFirstLastPara="1" wrap="square" lIns="91425" tIns="45700" rIns="91425" bIns="45700" anchor="ctr" anchorCtr="0">
-            <a:noAutofit/>
-          </a:bodyPr>
-          <a:lstStyle/>
-          <a:p>
-            <a:pPr marL="0" marR="0" lvl="0" indent="0" rtl="0">
-              <a:lnSpc>
-                <a:spcPct val="100000"/>
-              </a:lnSpc>
-              <a:spcBef>
-                <a:spcPts val="0"/>
-              </a:spcBef>
-              <a:spcAft>
-                <a:spcPts val="0"/>
-              </a:spcAft>
-              <a:buClr>
-                <a:srgbClr val="000000"/>
-              </a:buClr>
-              <a:buSzPts val="1600"/>
-              <a:buFont typeface="Arial"/>
-              <a:buNone/>
-            </a:pPr>
-            <a:r>
-              <a:rPr lang="en-US" sz="4800" dirty="0">
-                <a:solidFill>
-                  <a:schemeClr val="lt1"/>
-                </a:solidFill>
-              </a:rPr>
-              <a:t> 60+ Murdered: Energy Inventors Silenced</a:t>
-            </a:r>
-            <a:endParaRPr sz="3200" b="0" i="0" u="none" strike="noStrike" cap="none" dirty="0">
-              <a:solidFill>
-                <a:srgbClr val="000000"/>
-              </a:solidFill>
-              <a:latin typeface="Arial"/>
-              <a:ea typeface="Arial"/>
-              <a:cs typeface="Arial"/>
-              <a:sym typeface="Arial"/>
-            </a:endParaRPr>
-          </a:p>
-        </p:txBody>
-      </p:sp>
-      <p:sp>
-        <p:nvSpPr>
-          <p:cNvPr id="4" name="TextBox 3">
-            <a:extLst>
-              <a:ext uri="{FF2B5EF4-FFF2-40B4-BE49-F238E27FC236}">
-                <a16:creationId xmlns:a16="http://schemas.microsoft.com/office/drawing/2014/main" id="{50D7621F-9D36-7894-7117-9F831EF5EFA6}"/>
-              </a:ext>
-            </a:extLst>
-          </p:cNvPr>
-          <p:cNvSpPr txBox="1"/>
-          <p:nvPr/>
-        </p:nvSpPr>
-        <p:spPr>
-          <a:xfrm>
-            <a:off x="92310" y="6285727"/>
-            <a:ext cx="11685989" cy="461665"/>
-          </a:xfrm>
-          <a:prstGeom prst="rect">
-            <a:avLst/>
-          </a:prstGeom>
-          <a:solidFill>
-            <a:schemeClr val="bg1">
-              <a:alpha val="84400"/>
-            </a:schemeClr>
-          </a:solidFill>
-        </p:spPr>
-        <p:txBody>
-          <a:bodyPr wrap="square" rtlCol="0">
-            <a:spAutoFit/>
-          </a:bodyPr>
-          <a:lstStyle/>
-          <a:p>
-            <a:r>
-              <a:rPr lang="en-US" sz="2400" dirty="0"/>
-              <a:t>https://uapmurders.com/energy</a:t>
-            </a:r>
-          </a:p>
-        </p:txBody>
-      </p:sp>
-      <p:sp>
-        <p:nvSpPr>
-          <p:cNvPr id="7" name="Google Shape;170;p31">
-            <a:extLst>
-              <a:ext uri="{FF2B5EF4-FFF2-40B4-BE49-F238E27FC236}">
-                <a16:creationId xmlns:a16="http://schemas.microsoft.com/office/drawing/2014/main" id="{4B582382-76AA-B49E-C611-39A37CE591B9}"/>
-              </a:ext>
-            </a:extLst>
-          </p:cNvPr>
-          <p:cNvSpPr/>
-          <p:nvPr/>
-        </p:nvSpPr>
-        <p:spPr>
-          <a:xfrm>
-            <a:off x="7506336" y="4860562"/>
-            <a:ext cx="4550222" cy="1425166"/>
-          </a:xfrm>
-          <a:prstGeom prst="rect">
-            <a:avLst/>
-          </a:prstGeom>
-          <a:solidFill>
-            <a:srgbClr val="C00000"/>
-          </a:solidFill>
-          <a:ln>
-            <a:noFill/>
-          </a:ln>
-        </p:spPr>
-        <p:txBody>
-          <a:bodyPr spcFirstLastPara="1" wrap="square" lIns="91425" tIns="45700" rIns="91425" bIns="45700" anchor="ctr" anchorCtr="0">
-            <a:noAutofit/>
-          </a:bodyPr>
-          <a:lstStyle/>
-          <a:p>
-            <a:pPr marL="0" marR="0" lvl="0" indent="0" algn="ctr" rtl="0">
-              <a:lnSpc>
-                <a:spcPct val="100000"/>
-              </a:lnSpc>
-              <a:spcBef>
-                <a:spcPts val="0"/>
-              </a:spcBef>
-              <a:spcAft>
-                <a:spcPts val="0"/>
-              </a:spcAft>
-              <a:buClr>
-                <a:srgbClr val="000000"/>
-              </a:buClr>
-              <a:buSzPts val="1600"/>
-              <a:buFont typeface="Arial"/>
-              <a:buNone/>
-            </a:pPr>
-            <a:r>
-              <a:rPr lang="en-US" sz="4800" dirty="0">
-                <a:solidFill>
-                  <a:schemeClr val="lt1"/>
-                </a:solidFill>
-              </a:rPr>
-              <a:t>Viktor Schauberger</a:t>
-            </a:r>
-            <a:endParaRPr sz="3200" b="0" i="0" u="none" strike="noStrike" cap="none" dirty="0">
-              <a:solidFill>
-                <a:srgbClr val="000000"/>
-              </a:solidFill>
-              <a:latin typeface="Arial"/>
-              <a:ea typeface="Arial"/>
-              <a:cs typeface="Arial"/>
-              <a:sym typeface="Arial"/>
-            </a:endParaRPr>
-          </a:p>
-        </p:txBody>
-      </p:sp>
-      <p:sp>
-        <p:nvSpPr>
-          <p:cNvPr id="8" name="Google Shape;170;p31">
-            <a:extLst>
-              <a:ext uri="{FF2B5EF4-FFF2-40B4-BE49-F238E27FC236}">
-                <a16:creationId xmlns:a16="http://schemas.microsoft.com/office/drawing/2014/main" id="{D328ABDE-E232-3EB7-C3F2-B4BB7B64262F}"/>
-              </a:ext>
-            </a:extLst>
-          </p:cNvPr>
-          <p:cNvSpPr/>
-          <p:nvPr/>
-        </p:nvSpPr>
-        <p:spPr>
-          <a:xfrm>
-            <a:off x="7641778" y="6285727"/>
-            <a:ext cx="4550222" cy="548230"/>
-          </a:xfrm>
-          <a:prstGeom prst="rect">
-            <a:avLst/>
-          </a:prstGeom>
-          <a:solidFill>
-            <a:srgbClr val="C00000"/>
-          </a:solidFill>
-          <a:ln>
-            <a:noFill/>
-          </a:ln>
-        </p:spPr>
-        <p:txBody>
-          <a:bodyPr spcFirstLastPara="1" wrap="square" lIns="91425" tIns="45700" rIns="91425" bIns="45700" anchor="ctr" anchorCtr="0">
-            <a:noAutofit/>
-          </a:bodyPr>
-          <a:lstStyle/>
-          <a:p>
-            <a:pPr marL="0" marR="0" lvl="0" indent="0" algn="ctr" rtl="0">
-              <a:lnSpc>
-                <a:spcPct val="100000"/>
-              </a:lnSpc>
-              <a:spcBef>
-                <a:spcPts val="0"/>
-              </a:spcBef>
-              <a:spcAft>
-                <a:spcPts val="0"/>
-              </a:spcAft>
-              <a:buClr>
-                <a:srgbClr val="000000"/>
-              </a:buClr>
-              <a:buSzPts val="1600"/>
-              <a:buFont typeface="Arial"/>
-              <a:buNone/>
-            </a:pPr>
-            <a:r>
-              <a:rPr lang="en-US" sz="3600" dirty="0">
-                <a:solidFill>
-                  <a:schemeClr val="lt1"/>
-                </a:solidFill>
-              </a:rPr>
-              <a:t>Dead at Age 73</a:t>
-            </a:r>
-            <a:endParaRPr sz="2000" b="0" i="0" u="none" strike="noStrike" cap="none" dirty="0">
-              <a:solidFill>
-                <a:srgbClr val="000000"/>
-              </a:solidFill>
-              <a:latin typeface="Arial"/>
-              <a:ea typeface="Arial"/>
-              <a:cs typeface="Arial"/>
-              <a:sym typeface="Arial"/>
-            </a:endParaRPr>
-          </a:p>
-        </p:txBody>
-      </p:sp>
-      <p:sp>
-        <p:nvSpPr>
-          <p:cNvPr id="10" name="TextBox 9">
-            <a:extLst>
-              <a:ext uri="{FF2B5EF4-FFF2-40B4-BE49-F238E27FC236}">
-                <a16:creationId xmlns:a16="http://schemas.microsoft.com/office/drawing/2014/main" id="{5FA0D8B2-6B55-D3DC-BCBB-6FEAD86B9E72}"/>
-              </a:ext>
-            </a:extLst>
-          </p:cNvPr>
-          <p:cNvSpPr txBox="1"/>
-          <p:nvPr/>
-        </p:nvSpPr>
-        <p:spPr>
-          <a:xfrm>
-            <a:off x="191731" y="1912953"/>
-            <a:ext cx="6987941" cy="3046988"/>
-          </a:xfrm>
-          <a:prstGeom prst="rect">
-            <a:avLst/>
-          </a:prstGeom>
-          <a:solidFill>
-            <a:schemeClr val="bg1">
-              <a:alpha val="84400"/>
-            </a:schemeClr>
-          </a:solidFill>
-        </p:spPr>
-        <p:txBody>
-          <a:bodyPr wrap="square" rtlCol="0">
-            <a:spAutoFit/>
-          </a:bodyPr>
-          <a:lstStyle/>
-          <a:p>
-            <a:pPr marL="285750" indent="-285750">
-              <a:spcBef>
-                <a:spcPts val="1200"/>
-              </a:spcBef>
-              <a:buFont typeface="Arial" panose="020B0604020202020204" pitchFamily="34" charset="0"/>
-              <a:buChar char="•"/>
-            </a:pPr>
-            <a:r>
-              <a:rPr dirty="0"/>
-              <a:t>Austrian inventor of "implosion" vortex energy technology — brought to the U.S. and COERCED into signing away all rights.</a:t>
-            </a:r>
-          </a:p>
-          <a:p>
-            <a:pPr marL="285750" indent="-285750">
-              <a:spcBef>
-                <a:spcPts val="1200"/>
-              </a:spcBef>
-              <a:buFont typeface="Arial" panose="020B0604020202020204" pitchFamily="34" charset="0"/>
-              <a:buChar char="•"/>
-            </a:pPr>
-            <a:r>
-              <a:rPr dirty="0"/>
-              <a:t>Held for THREE MONTHS in America. Forced to sign documents forbidding him from continuing his research.</a:t>
-            </a:r>
-          </a:p>
-          <a:p>
-            <a:pPr marL="285750" indent="-285750">
-              <a:spcBef>
-                <a:spcPts val="1200"/>
-              </a:spcBef>
-              <a:buFont typeface="Arial" panose="020B0604020202020204" pitchFamily="34" charset="0"/>
-              <a:buChar char="•"/>
-            </a:pPr>
-            <a:r>
-              <a:rPr dirty="0"/>
-              <a:t>All his documents and models were CONFISCATED.</a:t>
-            </a:r>
-          </a:p>
-          <a:p>
-            <a:pPr marL="285750" indent="-285750">
-              <a:spcBef>
-                <a:spcPts val="1200"/>
-              </a:spcBef>
-              <a:buFont typeface="Arial" panose="020B0604020202020204" pitchFamily="34" charset="0"/>
-              <a:buChar char="•"/>
-            </a:pPr>
-            <a:r>
-              <a:rPr dirty="0"/>
-              <a:t>DIED FIVE DAYS after returning to Austria. His son described him as "a very disillusioned man."</a:t>
-            </a:r>
-          </a:p>
-          <a:p>
-            <a:pPr marL="285750" indent="-285750">
-              <a:spcBef>
-                <a:spcPts val="1200"/>
-              </a:spcBef>
-              <a:buFont typeface="Arial" panose="020B0604020202020204" pitchFamily="34" charset="0"/>
-              <a:buChar char="•"/>
-            </a:pPr>
-            <a:r>
-              <a:rPr dirty="0"/>
-              <a:t>They took everything — his technology, his documents, his rights. He died five days later of a broken heart.</a:t>
-            </a:r>
-          </a:p>
-        </p:txBody>
-      </p:sp>
+              </a14:hiddenFill>
+            </a:ext>
+          </a:extLst>
+        </p:spPr>
+      </p:pic>
     </p:spTree>
+    <p:extLst>
+      <p:ext uri="{BB962C8B-B14F-4D97-AF65-F5344CB8AC3E}">
+        <p14:creationId xmlns:p14="http://schemas.microsoft.com/office/powerpoint/2010/main" val="3256771910"/>
+      </p:ext>
+    </p:extLst>
   </p:cSld>
   <p:clrMapOvr>
     <a:masterClrMapping/>
@@ -24504,7 +24580,7 @@
                   <a:schemeClr val="accent5"/>
                 </a:solidFill>
               </a:rPr>
-              <a:t>Why / How they Paul Bennewitz:</a:t>
+              <a:t>Why / How they Wilbert Smith:</a:t>
             </a:r>
           </a:p>
         </p:txBody>
@@ -24702,7 +24778,7 @@
         </p:nvSpPr>
         <p:spPr>
           <a:xfrm>
-            <a:off x="7621666" y="5584213"/>
+            <a:off x="7506336" y="4925186"/>
             <a:ext cx="4550222" cy="869505"/>
           </a:xfrm>
           <a:prstGeom prst="rect">
@@ -24744,7 +24820,7 @@
                   <a:schemeClr val="lt1"/>
                 </a:solidFill>
               </a:rPr>
-              <a:t>Paul Bennewitz</a:t>
+              <a:t>Wilbert Smith</a:t>
             </a:r>
             <a:endParaRPr sz="3200" b="0" i="0" u="none" strike="noStrike" cap="none" dirty="0">
               <a:solidFill>
@@ -24772,7 +24848,7 @@
         </p:nvSpPr>
         <p:spPr>
           <a:xfrm>
-            <a:off x="7641437" y="6340447"/>
+            <a:off x="7526107" y="5681420"/>
             <a:ext cx="4550222" cy="548230"/>
           </a:xfrm>
           <a:prstGeom prst="rect">
@@ -24814,7 +24890,7 @@
                   <a:schemeClr val="lt1"/>
                 </a:solidFill>
               </a:rPr>
-              <a:t>Dead at Age 75</a:t>
+              <a:t>Dead at Age 52</a:t>
             </a:r>
             <a:endParaRPr sz="2000" b="0" i="0" u="none" strike="noStrike" cap="none" dirty="0">
               <a:solidFill>
@@ -24842,8 +24918,8 @@
         </p:nvSpPr>
         <p:spPr>
           <a:xfrm>
-            <a:off x="157713" y="1925931"/>
-            <a:ext cx="7906705" cy="3477875"/>
+            <a:off x="129030" y="1892995"/>
+            <a:ext cx="6987941" cy="3046988"/>
           </a:xfrm>
           <a:prstGeom prst="rect">
             <a:avLst/>
@@ -24869,7 +24945,7 @@
             </a:pPr>
             <a:r>
               <a:rPr dirty="0"/>
-              <a:t>Electrical engineer DELIBERATELY DRIVEN TO A MENTAL BREAKDOWN by a coordinated Air Force disinformation campaign.</a:t>
+              <a:t>Canadian government engineer who ran Project Magnet — Canada's official magnetic energy/propulsion program.</a:t>
             </a:r>
           </a:p>
           <a:p>
@@ -24882,7 +24958,7 @@
             </a:pPr>
             <a:r>
               <a:rPr dirty="0"/>
-              <a:t>He intercepted classified military signals near Kirtland AFB — so they DESTROYED HIS MIND instead of briefing him.</a:t>
+              <a:t>Died of cancer at age 52 after instructing his wife to HIDE all his research files.</a:t>
             </a:r>
           </a:p>
           <a:p>
@@ -24895,7 +24971,7 @@
             </a:pPr>
             <a:r>
               <a:rPr dirty="0"/>
-              <a:t>Built precision instruments for NASA and the military through his company Thunder Scientific Corporation.</a:t>
+              <a:t>Within DAYS of his death, intelligence representatives from THREE nations approached his wife seeking the files.</a:t>
             </a:r>
           </a:p>
           <a:p>
@@ -24908,7 +24984,7 @@
             </a:pPr>
             <a:r>
               <a:rPr dirty="0"/>
-              <a:t>AFOSI agent William Moore publicly CONFESSED to participating in the operation at a 1989 MUFON conference.</a:t>
+              <a:t>He knew they'd come for his research. His deathbed instruction was: HIDE EVERYTHING.</a:t>
             </a:r>
           </a:p>
           <a:p>
@@ -24921,14 +24997,14 @@
             </a:pPr>
             <a:r>
               <a:rPr dirty="0"/>
-              <a:t>They didn't kill him. They made him crazy. A documented, confessed psychological operation against a U.S. civilian.</a:t>
+              <a:t>When three countries' spies show up at your widow's door, you were working on something REAL.</a:t>
             </a:r>
           </a:p>
         </p:txBody>
       </p:sp>
       <p:pic>
         <p:nvPicPr>
-          <p:cNvPr id="16" name="Picture 15" descr="Paul_Bennewitz.jpg"/>
+          <p:cNvPr id="16" name="Picture 15" descr="Wilbert_Smith.jpg"/>
           <p:cNvPicPr>
             <a:picLocks noChangeAspect="1"/>
           </p:cNvPicPr>
@@ -24942,67 +25018,15 @@
         </p:blipFill>
         <p:spPr>
           <a:xfrm>
-            <a:off x="8507170" y="1759115"/>
-            <a:ext cx="3884876" cy="3884876"/>
-          </a:xfrm>
-          <a:prstGeom prst="rect">
-            <a:avLst/>
-          </a:prstGeom>
-        </p:spPr>
-      </p:pic>
-      <p:pic>
-        <p:nvPicPr>
-          <p:cNvPr id="9218" name="Picture 2" descr="undefined">
-            <a:extLst>
-              <a:ext uri="{FF2B5EF4-FFF2-40B4-BE49-F238E27FC236}">
-                <a16:creationId xmlns:a16="http://schemas.microsoft.com/office/drawing/2014/main" id="{FCC578E4-C0E0-F6C8-9C82-D3EE75321433}"/>
-              </a:ext>
-            </a:extLst>
-          </p:cNvPr>
-          <p:cNvPicPr>
-            <a:picLocks noChangeAspect="1" noChangeArrowheads="1"/>
-          </p:cNvPicPr>
-          <p:nvPr/>
-        </p:nvPicPr>
-        <p:blipFill>
-          <a:blip r:embed="rId3">
-            <a:extLst>
-              <a:ext uri="{28A0092B-C50C-407E-A947-70E740481C1C}">
-                <a14:useLocalDpi xmlns:a14="http://schemas.microsoft.com/office/drawing/2010/main" val="0"/>
-              </a:ext>
-            </a:extLst>
-          </a:blip>
-          <a:srcRect/>
-          <a:stretch>
-            <a:fillRect/>
-          </a:stretch>
-        </p:blipFill>
-        <p:spPr bwMode="auto">
-          <a:xfrm>
-            <a:off x="7776518" y="3679880"/>
-            <a:ext cx="2511941" cy="1904333"/>
-          </a:xfrm>
-          <a:prstGeom prst="rect">
-            <a:avLst/>
-          </a:prstGeom>
-          <a:noFill/>
-          <a:extLst>
-            <a:ext uri="{909E8E84-426E-40DD-AFC4-6F175D3DCCD1}">
-              <a14:hiddenFill xmlns:a14="http://schemas.microsoft.com/office/drawing/2010/main">
-                <a:solidFill>
-                  <a:srgbClr val="FFFFFF"/>
-                </a:solidFill>
-              </a14:hiddenFill>
-            </a:ext>
-          </a:extLst>
+            <a:off x="7198593" y="1100088"/>
+            <a:ext cx="4884780" cy="3884876"/>
+          </a:xfrm>
+          <a:prstGeom prst="rect">
+            <a:avLst/>
+          </a:prstGeom>
         </p:spPr>
       </p:pic>
     </p:spTree>
-    <p:extLst>
-      <p:ext uri="{BB962C8B-B14F-4D97-AF65-F5344CB8AC3E}">
-        <p14:creationId xmlns:p14="http://schemas.microsoft.com/office/powerpoint/2010/main" val="3256771910"/>
-      </p:ext>
-    </p:extLst>
   </p:cSld>
   <p:clrMapOvr>
     <a:masterClrMapping/>
@@ -25027,469 +25051,9 @@
           <a:chExt cx="0" cy="0"/>
         </a:xfrm>
       </p:grpSpPr>
-      <p:sp>
-        <p:nvSpPr>
-          <p:cNvPr id="15" name="TextBox 14">
-            <a:extLst>
-              <a:ext uri="{FF2B5EF4-FFF2-40B4-BE49-F238E27FC236}">
-                <a16:creationId xmlns:a16="http://schemas.microsoft.com/office/drawing/2014/main" id="{E478240E-251B-5BA6-3C45-7E6620400769}"/>
-              </a:ext>
-            </a:extLst>
-          </p:cNvPr>
-          <p:cNvSpPr txBox="1"/>
-          <p:nvPr/>
-        </p:nvSpPr>
-        <p:spPr>
-          <a:xfrm>
-            <a:off x="312432" y="1288262"/>
-            <a:ext cx="6494294" cy="584775"/>
-          </a:xfrm>
-          <a:prstGeom prst="rect">
-            <a:avLst/>
-          </a:prstGeom>
-          <a:solidFill>
-            <a:schemeClr val="bg1">
-              <a:alpha val="84400"/>
-            </a:schemeClr>
-          </a:solidFill>
-        </p:spPr>
-        <p:txBody>
-          <a:bodyPr wrap="square" rtlCol="0">
-            <a:spAutoFit/>
-          </a:bodyPr>
-          <a:lstStyle/>
-          <a:p>
-            <a:r>
-              <a:rPr lang="en-US" sz="3200" b="1" dirty="0">
-                <a:solidFill>
-                  <a:schemeClr val="accent5"/>
-                </a:solidFill>
-              </a:rPr>
-              <a:t>Why / How they Wilbert Smith:</a:t>
-            </a:r>
-          </a:p>
-        </p:txBody>
-      </p:sp>
-      <p:sp>
-        <p:nvSpPr>
-          <p:cNvPr id="3" name="Google Shape;170;p31">
-            <a:extLst>
-              <a:ext uri="{FF2B5EF4-FFF2-40B4-BE49-F238E27FC236}">
-                <a16:creationId xmlns:a16="http://schemas.microsoft.com/office/drawing/2014/main" id="{A4695FE5-0AA5-AB05-98B1-B5B8E3FA8CBE}"/>
-              </a:ext>
-            </a:extLst>
-          </p:cNvPr>
-          <p:cNvSpPr/>
-          <p:nvPr/>
-        </p:nvSpPr>
-        <p:spPr>
-          <a:xfrm>
-            <a:off x="191731" y="5732890"/>
-            <a:ext cx="3431270" cy="496760"/>
-          </a:xfrm>
-          <a:prstGeom prst="rect">
-            <a:avLst/>
-          </a:prstGeom>
-          <a:solidFill>
-            <a:schemeClr val="accent5"/>
-          </a:solidFill>
-          <a:ln>
-            <a:noFill/>
-          </a:ln>
-        </p:spPr>
-        <p:txBody>
-          <a:bodyPr spcFirstLastPara="1" wrap="square" lIns="91425" tIns="45700" rIns="91425" bIns="45700" anchor="ctr" anchorCtr="0">
-            <a:noAutofit/>
-          </a:bodyPr>
-          <a:lstStyle/>
-          <a:p>
-            <a:pPr marL="0" marR="0" lvl="0" indent="0" algn="ctr" rtl="0">
-              <a:lnSpc>
-                <a:spcPct val="100000"/>
-              </a:lnSpc>
-              <a:spcBef>
-                <a:spcPts val="0"/>
-              </a:spcBef>
-              <a:spcAft>
-                <a:spcPts val="0"/>
-              </a:spcAft>
-              <a:buClr>
-                <a:srgbClr val="000000"/>
-              </a:buClr>
-              <a:buSzPts val="1600"/>
-              <a:buFont typeface="Arial"/>
-              <a:buNone/>
-            </a:pPr>
-            <a:r>
-              <a:rPr lang="en-US" sz="3600" dirty="0">
-                <a:solidFill>
-                  <a:schemeClr val="lt1"/>
-                </a:solidFill>
-              </a:rPr>
-              <a:t>Read List Here:</a:t>
-            </a:r>
-            <a:endParaRPr sz="2000" b="0" i="0" u="none" strike="noStrike" cap="none" dirty="0">
-              <a:solidFill>
-                <a:srgbClr val="000000"/>
-              </a:solidFill>
-              <a:latin typeface="Arial"/>
-              <a:ea typeface="Arial"/>
-              <a:cs typeface="Arial"/>
-              <a:sym typeface="Arial"/>
-            </a:endParaRPr>
-          </a:p>
-        </p:txBody>
-      </p:sp>
-      <p:sp>
-        <p:nvSpPr>
-          <p:cNvPr id="5" name="Google Shape;170;p31">
-            <a:extLst>
-              <a:ext uri="{FF2B5EF4-FFF2-40B4-BE49-F238E27FC236}">
-                <a16:creationId xmlns:a16="http://schemas.microsoft.com/office/drawing/2014/main" id="{98132413-6ED2-8B36-74B6-3C503B1A4634}"/>
-              </a:ext>
-            </a:extLst>
-          </p:cNvPr>
-          <p:cNvSpPr/>
-          <p:nvPr/>
-        </p:nvSpPr>
-        <p:spPr>
-          <a:xfrm>
-            <a:off x="0" y="-31518"/>
-            <a:ext cx="12192000" cy="1131606"/>
-          </a:xfrm>
-          <a:prstGeom prst="rect">
-            <a:avLst/>
-          </a:prstGeom>
-          <a:solidFill>
-            <a:srgbClr val="C00000"/>
-          </a:solidFill>
-          <a:ln>
-            <a:noFill/>
-          </a:ln>
-        </p:spPr>
-        <p:txBody>
-          <a:bodyPr spcFirstLastPara="1" wrap="square" lIns="91425" tIns="45700" rIns="91425" bIns="45700" anchor="ctr" anchorCtr="0">
-            <a:noAutofit/>
-          </a:bodyPr>
-          <a:lstStyle/>
-          <a:p>
-            <a:pPr marL="0" marR="0" lvl="0" indent="0" rtl="0">
-              <a:lnSpc>
-                <a:spcPct val="100000"/>
-              </a:lnSpc>
-              <a:spcBef>
-                <a:spcPts val="0"/>
-              </a:spcBef>
-              <a:spcAft>
-                <a:spcPts val="0"/>
-              </a:spcAft>
-              <a:buClr>
-                <a:srgbClr val="000000"/>
-              </a:buClr>
-              <a:buSzPts val="1600"/>
-              <a:buFont typeface="Arial"/>
-              <a:buNone/>
-            </a:pPr>
-            <a:r>
-              <a:rPr lang="en-US" sz="4800" dirty="0">
-                <a:solidFill>
-                  <a:schemeClr val="lt1"/>
-                </a:solidFill>
-              </a:rPr>
-              <a:t> 60+ Murdered: Energy Inventors Silenced</a:t>
-            </a:r>
-            <a:endParaRPr sz="3200" b="0" i="0" u="none" strike="noStrike" cap="none" dirty="0">
-              <a:solidFill>
-                <a:srgbClr val="000000"/>
-              </a:solidFill>
-              <a:latin typeface="Arial"/>
-              <a:ea typeface="Arial"/>
-              <a:cs typeface="Arial"/>
-              <a:sym typeface="Arial"/>
-            </a:endParaRPr>
-          </a:p>
-        </p:txBody>
-      </p:sp>
-      <p:sp>
-        <p:nvSpPr>
-          <p:cNvPr id="4" name="TextBox 3">
-            <a:extLst>
-              <a:ext uri="{FF2B5EF4-FFF2-40B4-BE49-F238E27FC236}">
-                <a16:creationId xmlns:a16="http://schemas.microsoft.com/office/drawing/2014/main" id="{50D7621F-9D36-7894-7117-9F831EF5EFA6}"/>
-              </a:ext>
-            </a:extLst>
-          </p:cNvPr>
-          <p:cNvSpPr txBox="1"/>
-          <p:nvPr/>
-        </p:nvSpPr>
-        <p:spPr>
-          <a:xfrm>
-            <a:off x="107300" y="6229650"/>
-            <a:ext cx="11685989" cy="461665"/>
-          </a:xfrm>
-          <a:prstGeom prst="rect">
-            <a:avLst/>
-          </a:prstGeom>
-          <a:solidFill>
-            <a:schemeClr val="bg1">
-              <a:alpha val="84400"/>
-            </a:schemeClr>
-          </a:solidFill>
-        </p:spPr>
-        <p:txBody>
-          <a:bodyPr wrap="square" rtlCol="0">
-            <a:spAutoFit/>
-          </a:bodyPr>
-          <a:lstStyle/>
-          <a:p>
-            <a:r>
-              <a:rPr lang="en-US" sz="2400" dirty="0"/>
-              <a:t>https://uapmurders.com/energy</a:t>
-            </a:r>
-          </a:p>
-        </p:txBody>
-      </p:sp>
-      <p:sp>
-        <p:nvSpPr>
-          <p:cNvPr id="7" name="Google Shape;170;p31">
-            <a:extLst>
-              <a:ext uri="{FF2B5EF4-FFF2-40B4-BE49-F238E27FC236}">
-                <a16:creationId xmlns:a16="http://schemas.microsoft.com/office/drawing/2014/main" id="{4B582382-76AA-B49E-C611-39A37CE591B9}"/>
-              </a:ext>
-            </a:extLst>
-          </p:cNvPr>
-          <p:cNvSpPr/>
-          <p:nvPr/>
-        </p:nvSpPr>
-        <p:spPr>
-          <a:xfrm>
-            <a:off x="7506336" y="4925186"/>
-            <a:ext cx="4550222" cy="869505"/>
-          </a:xfrm>
-          <a:prstGeom prst="rect">
-            <a:avLst/>
-          </a:prstGeom>
-          <a:solidFill>
-            <a:srgbClr val="C00000"/>
-          </a:solidFill>
-          <a:ln>
-            <a:noFill/>
-          </a:ln>
-        </p:spPr>
-        <p:txBody>
-          <a:bodyPr spcFirstLastPara="1" wrap="square" lIns="91425" tIns="45700" rIns="91425" bIns="45700" anchor="ctr" anchorCtr="0">
-            <a:noAutofit/>
-          </a:bodyPr>
-          <a:lstStyle/>
-          <a:p>
-            <a:pPr marL="0" marR="0" lvl="0" indent="0" algn="ctr" rtl="0">
-              <a:lnSpc>
-                <a:spcPct val="100000"/>
-              </a:lnSpc>
-              <a:spcBef>
-                <a:spcPts val="0"/>
-              </a:spcBef>
-              <a:spcAft>
-                <a:spcPts val="0"/>
-              </a:spcAft>
-              <a:buClr>
-                <a:srgbClr val="000000"/>
-              </a:buClr>
-              <a:buSzPts val="1600"/>
-              <a:buFont typeface="Arial"/>
-              <a:buNone/>
-            </a:pPr>
-            <a:r>
-              <a:rPr lang="en-US" sz="4800" dirty="0">
-                <a:solidFill>
-                  <a:schemeClr val="lt1"/>
-                </a:solidFill>
-              </a:rPr>
-              <a:t>Wilbert Smith</a:t>
-            </a:r>
-            <a:endParaRPr sz="3200" b="0" i="0" u="none" strike="noStrike" cap="none" dirty="0">
-              <a:solidFill>
-                <a:srgbClr val="000000"/>
-              </a:solidFill>
-              <a:latin typeface="Arial"/>
-              <a:ea typeface="Arial"/>
-              <a:cs typeface="Arial"/>
-              <a:sym typeface="Arial"/>
-            </a:endParaRPr>
-          </a:p>
-        </p:txBody>
-      </p:sp>
-      <p:sp>
-        <p:nvSpPr>
-          <p:cNvPr id="8" name="Google Shape;170;p31">
-            <a:extLst>
-              <a:ext uri="{FF2B5EF4-FFF2-40B4-BE49-F238E27FC236}">
-                <a16:creationId xmlns:a16="http://schemas.microsoft.com/office/drawing/2014/main" id="{D328ABDE-E232-3EB7-C3F2-B4BB7B64262F}"/>
-              </a:ext>
-            </a:extLst>
-          </p:cNvPr>
-          <p:cNvSpPr/>
-          <p:nvPr/>
-        </p:nvSpPr>
-        <p:spPr>
-          <a:xfrm>
-            <a:off x="7526107" y="5681420"/>
-            <a:ext cx="4550222" cy="548230"/>
-          </a:xfrm>
-          <a:prstGeom prst="rect">
-            <a:avLst/>
-          </a:prstGeom>
-          <a:solidFill>
-            <a:srgbClr val="C00000"/>
-          </a:solidFill>
-          <a:ln>
-            <a:noFill/>
-          </a:ln>
-        </p:spPr>
-        <p:txBody>
-          <a:bodyPr spcFirstLastPara="1" wrap="square" lIns="91425" tIns="45700" rIns="91425" bIns="45700" anchor="ctr" anchorCtr="0">
-            <a:noAutofit/>
-          </a:bodyPr>
-          <a:lstStyle/>
-          <a:p>
-            <a:pPr marL="0" marR="0" lvl="0" indent="0" algn="ctr" rtl="0">
-              <a:lnSpc>
-                <a:spcPct val="100000"/>
-              </a:lnSpc>
-              <a:spcBef>
-                <a:spcPts val="0"/>
-              </a:spcBef>
-              <a:spcAft>
-                <a:spcPts val="0"/>
-              </a:spcAft>
-              <a:buClr>
-                <a:srgbClr val="000000"/>
-              </a:buClr>
-              <a:buSzPts val="1600"/>
-              <a:buFont typeface="Arial"/>
-              <a:buNone/>
-            </a:pPr>
-            <a:r>
-              <a:rPr lang="en-US" sz="3600" dirty="0">
-                <a:solidFill>
-                  <a:schemeClr val="lt1"/>
-                </a:solidFill>
-              </a:rPr>
-              <a:t>Dead at Age 52</a:t>
-            </a:r>
-            <a:endParaRPr sz="2000" b="0" i="0" u="none" strike="noStrike" cap="none" dirty="0">
-              <a:solidFill>
-                <a:srgbClr val="000000"/>
-              </a:solidFill>
-              <a:latin typeface="Arial"/>
-              <a:ea typeface="Arial"/>
-              <a:cs typeface="Arial"/>
-              <a:sym typeface="Arial"/>
-            </a:endParaRPr>
-          </a:p>
-        </p:txBody>
-      </p:sp>
-      <p:sp>
-        <p:nvSpPr>
-          <p:cNvPr id="10" name="TextBox 9">
-            <a:extLst>
-              <a:ext uri="{FF2B5EF4-FFF2-40B4-BE49-F238E27FC236}">
-                <a16:creationId xmlns:a16="http://schemas.microsoft.com/office/drawing/2014/main" id="{5FA0D8B2-6B55-D3DC-BCBB-6FEAD86B9E72}"/>
-              </a:ext>
-            </a:extLst>
-          </p:cNvPr>
-          <p:cNvSpPr txBox="1"/>
-          <p:nvPr/>
-        </p:nvSpPr>
-        <p:spPr>
-          <a:xfrm>
-            <a:off x="129030" y="1892995"/>
-            <a:ext cx="6987941" cy="3046988"/>
-          </a:xfrm>
-          <a:prstGeom prst="rect">
-            <a:avLst/>
-          </a:prstGeom>
-          <a:solidFill>
-            <a:schemeClr val="bg1">
-              <a:alpha val="84400"/>
-            </a:schemeClr>
-          </a:solidFill>
-        </p:spPr>
-        <p:txBody>
-          <a:bodyPr wrap="square" rtlCol="0">
-            <a:spAutoFit/>
-          </a:bodyPr>
-          <a:lstStyle/>
-          <a:p>
-            <a:pPr marL="285750" indent="-285750">
-              <a:spcBef>
-                <a:spcPts val="1200"/>
-              </a:spcBef>
-              <a:buFont typeface="Arial" panose="020B0604020202020204" pitchFamily="34" charset="0"/>
-              <a:buChar char="•"/>
-            </a:pPr>
-            <a:r>
-              <a:rPr dirty="0"/>
-              <a:t>Canadian government engineer who ran Project Magnet — Canada's official magnetic energy/propulsion program.</a:t>
-            </a:r>
-          </a:p>
-          <a:p>
-            <a:pPr marL="285750" indent="-285750">
-              <a:spcBef>
-                <a:spcPts val="1200"/>
-              </a:spcBef>
-              <a:buFont typeface="Arial" panose="020B0604020202020204" pitchFamily="34" charset="0"/>
-              <a:buChar char="•"/>
-            </a:pPr>
-            <a:r>
-              <a:rPr dirty="0"/>
-              <a:t>Died of cancer at age 52 after instructing his wife to HIDE all his research files.</a:t>
-            </a:r>
-          </a:p>
-          <a:p>
-            <a:pPr marL="285750" indent="-285750">
-              <a:spcBef>
-                <a:spcPts val="1200"/>
-              </a:spcBef>
-              <a:buFont typeface="Arial" panose="020B0604020202020204" pitchFamily="34" charset="0"/>
-              <a:buChar char="•"/>
-            </a:pPr>
-            <a:r>
-              <a:rPr dirty="0"/>
-              <a:t>Within DAYS of his death, intelligence representatives from THREE nations approached his wife seeking the files.</a:t>
-            </a:r>
-          </a:p>
-          <a:p>
-            <a:pPr marL="285750" indent="-285750">
-              <a:spcBef>
-                <a:spcPts val="1200"/>
-              </a:spcBef>
-              <a:buFont typeface="Arial" panose="020B0604020202020204" pitchFamily="34" charset="0"/>
-              <a:buChar char="•"/>
-            </a:pPr>
-            <a:r>
-              <a:rPr dirty="0"/>
-              <a:t>He knew they'd come for his research. His deathbed instruction was: HIDE EVERYTHING.</a:t>
-            </a:r>
-          </a:p>
-          <a:p>
-            <a:pPr marL="285750" indent="-285750">
-              <a:spcBef>
-                <a:spcPts val="1200"/>
-              </a:spcBef>
-              <a:buFont typeface="Arial" panose="020B0604020202020204" pitchFamily="34" charset="0"/>
-              <a:buChar char="•"/>
-            </a:pPr>
-            <a:r>
-              <a:rPr dirty="0"/>
-              <a:t>When three countries' spies show up at your widow's door, you were working on something REAL.</a:t>
-            </a:r>
-          </a:p>
-        </p:txBody>
-      </p:sp>
       <p:pic>
         <p:nvPicPr>
-          <p:cNvPr id="16" name="Picture 15" descr="Wilbert_Smith.jpg"/>
+          <p:cNvPr id="16" name="Picture 15" descr="John_Hutchison.jpg"/>
           <p:cNvPicPr>
             <a:picLocks noChangeAspect="1"/>
           </p:cNvPicPr>
@@ -25503,15 +25067,410 @@
         </p:blipFill>
         <p:spPr>
           <a:xfrm>
-            <a:off x="7198593" y="1100088"/>
-            <a:ext cx="4884780" cy="3884876"/>
+            <a:off x="6947091" y="1525362"/>
+            <a:ext cx="5387784" cy="3034328"/>
           </a:xfrm>
           <a:prstGeom prst="rect">
             <a:avLst/>
           </a:prstGeom>
         </p:spPr>
       </p:pic>
+      <p:sp>
+        <p:nvSpPr>
+          <p:cNvPr id="15" name="TextBox 14">
+            <a:extLst>
+              <a:ext uri="{FF2B5EF4-FFF2-40B4-BE49-F238E27FC236}">
+                <a16:creationId xmlns:a16="http://schemas.microsoft.com/office/drawing/2014/main" id="{E478240E-251B-5BA6-3C45-7E6620400769}"/>
+              </a:ext>
+            </a:extLst>
+          </p:cNvPr>
+          <p:cNvSpPr txBox="1"/>
+          <p:nvPr/>
+        </p:nvSpPr>
+        <p:spPr>
+          <a:xfrm>
+            <a:off x="312432" y="1288262"/>
+            <a:ext cx="6494294" cy="584775"/>
+          </a:xfrm>
+          <a:prstGeom prst="rect">
+            <a:avLst/>
+          </a:prstGeom>
+          <a:solidFill>
+            <a:schemeClr val="bg1">
+              <a:alpha val="84400"/>
+            </a:schemeClr>
+          </a:solidFill>
+        </p:spPr>
+        <p:txBody>
+          <a:bodyPr wrap="square" rtlCol="0">
+            <a:spAutoFit/>
+          </a:bodyPr>
+          <a:lstStyle/>
+          <a:p>
+            <a:r>
+              <a:rPr lang="en-US" sz="3200" b="1" dirty="0">
+                <a:solidFill>
+                  <a:schemeClr val="accent5"/>
+                </a:solidFill>
+              </a:rPr>
+              <a:t>Why / How they John Hutchison:</a:t>
+            </a:r>
+          </a:p>
+        </p:txBody>
+      </p:sp>
+      <p:sp>
+        <p:nvSpPr>
+          <p:cNvPr id="3" name="Google Shape;170;p31">
+            <a:extLst>
+              <a:ext uri="{FF2B5EF4-FFF2-40B4-BE49-F238E27FC236}">
+                <a16:creationId xmlns:a16="http://schemas.microsoft.com/office/drawing/2014/main" id="{A4695FE5-0AA5-AB05-98B1-B5B8E3FA8CBE}"/>
+              </a:ext>
+            </a:extLst>
+          </p:cNvPr>
+          <p:cNvSpPr/>
+          <p:nvPr/>
+        </p:nvSpPr>
+        <p:spPr>
+          <a:xfrm>
+            <a:off x="191731" y="5732890"/>
+            <a:ext cx="3431270" cy="496760"/>
+          </a:xfrm>
+          <a:prstGeom prst="rect">
+            <a:avLst/>
+          </a:prstGeom>
+          <a:solidFill>
+            <a:schemeClr val="accent5"/>
+          </a:solidFill>
+          <a:ln>
+            <a:noFill/>
+          </a:ln>
+        </p:spPr>
+        <p:txBody>
+          <a:bodyPr spcFirstLastPara="1" wrap="square" lIns="91425" tIns="45700" rIns="91425" bIns="45700" anchor="ctr" anchorCtr="0">
+            <a:noAutofit/>
+          </a:bodyPr>
+          <a:lstStyle/>
+          <a:p>
+            <a:pPr marL="0" marR="0" lvl="0" indent="0" algn="ctr" rtl="0">
+              <a:lnSpc>
+                <a:spcPct val="100000"/>
+              </a:lnSpc>
+              <a:spcBef>
+                <a:spcPts val="0"/>
+              </a:spcBef>
+              <a:spcAft>
+                <a:spcPts val="0"/>
+              </a:spcAft>
+              <a:buClr>
+                <a:srgbClr val="000000"/>
+              </a:buClr>
+              <a:buSzPts val="1600"/>
+              <a:buFont typeface="Arial"/>
+              <a:buNone/>
+            </a:pPr>
+            <a:r>
+              <a:rPr lang="en-US" sz="3600" dirty="0">
+                <a:solidFill>
+                  <a:schemeClr val="lt1"/>
+                </a:solidFill>
+              </a:rPr>
+              <a:t>Read List Here:</a:t>
+            </a:r>
+            <a:endParaRPr sz="2000" b="0" i="0" u="none" strike="noStrike" cap="none" dirty="0">
+              <a:solidFill>
+                <a:srgbClr val="000000"/>
+              </a:solidFill>
+              <a:latin typeface="Arial"/>
+              <a:ea typeface="Arial"/>
+              <a:cs typeface="Arial"/>
+              <a:sym typeface="Arial"/>
+            </a:endParaRPr>
+          </a:p>
+        </p:txBody>
+      </p:sp>
+      <p:sp>
+        <p:nvSpPr>
+          <p:cNvPr id="5" name="Google Shape;170;p31">
+            <a:extLst>
+              <a:ext uri="{FF2B5EF4-FFF2-40B4-BE49-F238E27FC236}">
+                <a16:creationId xmlns:a16="http://schemas.microsoft.com/office/drawing/2014/main" id="{98132413-6ED2-8B36-74B6-3C503B1A4634}"/>
+              </a:ext>
+            </a:extLst>
+          </p:cNvPr>
+          <p:cNvSpPr/>
+          <p:nvPr/>
+        </p:nvSpPr>
+        <p:spPr>
+          <a:xfrm>
+            <a:off x="0" y="-31518"/>
+            <a:ext cx="12192000" cy="1131606"/>
+          </a:xfrm>
+          <a:prstGeom prst="rect">
+            <a:avLst/>
+          </a:prstGeom>
+          <a:solidFill>
+            <a:srgbClr val="C00000"/>
+          </a:solidFill>
+          <a:ln>
+            <a:noFill/>
+          </a:ln>
+        </p:spPr>
+        <p:txBody>
+          <a:bodyPr spcFirstLastPara="1" wrap="square" lIns="91425" tIns="45700" rIns="91425" bIns="45700" anchor="ctr" anchorCtr="0">
+            <a:noAutofit/>
+          </a:bodyPr>
+          <a:lstStyle/>
+          <a:p>
+            <a:pPr marL="0" marR="0" lvl="0" indent="0" rtl="0">
+              <a:lnSpc>
+                <a:spcPct val="100000"/>
+              </a:lnSpc>
+              <a:spcBef>
+                <a:spcPts val="0"/>
+              </a:spcBef>
+              <a:spcAft>
+                <a:spcPts val="0"/>
+              </a:spcAft>
+              <a:buClr>
+                <a:srgbClr val="000000"/>
+              </a:buClr>
+              <a:buSzPts val="1600"/>
+              <a:buFont typeface="Arial"/>
+              <a:buNone/>
+            </a:pPr>
+            <a:r>
+              <a:rPr lang="en-US" sz="4800" dirty="0">
+                <a:solidFill>
+                  <a:schemeClr val="lt1"/>
+                </a:solidFill>
+              </a:rPr>
+              <a:t> 60+ Murdered: Energy Inventors Silenced</a:t>
+            </a:r>
+            <a:endParaRPr sz="3200" b="0" i="0" u="none" strike="noStrike" cap="none" dirty="0">
+              <a:solidFill>
+                <a:srgbClr val="000000"/>
+              </a:solidFill>
+              <a:latin typeface="Arial"/>
+              <a:ea typeface="Arial"/>
+              <a:cs typeface="Arial"/>
+              <a:sym typeface="Arial"/>
+            </a:endParaRPr>
+          </a:p>
+        </p:txBody>
+      </p:sp>
+      <p:sp>
+        <p:nvSpPr>
+          <p:cNvPr id="4" name="TextBox 3">
+            <a:extLst>
+              <a:ext uri="{FF2B5EF4-FFF2-40B4-BE49-F238E27FC236}">
+                <a16:creationId xmlns:a16="http://schemas.microsoft.com/office/drawing/2014/main" id="{50D7621F-9D36-7894-7117-9F831EF5EFA6}"/>
+              </a:ext>
+            </a:extLst>
+          </p:cNvPr>
+          <p:cNvSpPr txBox="1"/>
+          <p:nvPr/>
+        </p:nvSpPr>
+        <p:spPr>
+          <a:xfrm>
+            <a:off x="107300" y="6229650"/>
+            <a:ext cx="11685989" cy="461665"/>
+          </a:xfrm>
+          <a:prstGeom prst="rect">
+            <a:avLst/>
+          </a:prstGeom>
+          <a:solidFill>
+            <a:schemeClr val="bg1">
+              <a:alpha val="84400"/>
+            </a:schemeClr>
+          </a:solidFill>
+        </p:spPr>
+        <p:txBody>
+          <a:bodyPr wrap="square" rtlCol="0">
+            <a:spAutoFit/>
+          </a:bodyPr>
+          <a:lstStyle/>
+          <a:p>
+            <a:r>
+              <a:rPr lang="en-US" sz="2400" dirty="0"/>
+              <a:t>https://uapmurders.com/energy</a:t>
+            </a:r>
+          </a:p>
+        </p:txBody>
+      </p:sp>
+      <p:sp>
+        <p:nvSpPr>
+          <p:cNvPr id="7" name="Google Shape;170;p31">
+            <a:extLst>
+              <a:ext uri="{FF2B5EF4-FFF2-40B4-BE49-F238E27FC236}">
+                <a16:creationId xmlns:a16="http://schemas.microsoft.com/office/drawing/2014/main" id="{4B582382-76AA-B49E-C611-39A37CE591B9}"/>
+              </a:ext>
+            </a:extLst>
+          </p:cNvPr>
+          <p:cNvSpPr/>
+          <p:nvPr/>
+        </p:nvSpPr>
+        <p:spPr>
+          <a:xfrm>
+            <a:off x="7506336" y="4925186"/>
+            <a:ext cx="4550222" cy="869505"/>
+          </a:xfrm>
+          <a:prstGeom prst="rect">
+            <a:avLst/>
+          </a:prstGeom>
+          <a:solidFill>
+            <a:srgbClr val="C00000"/>
+          </a:solidFill>
+          <a:ln>
+            <a:noFill/>
+          </a:ln>
+        </p:spPr>
+        <p:txBody>
+          <a:bodyPr spcFirstLastPara="1" wrap="square" lIns="91425" tIns="45700" rIns="91425" bIns="45700" anchor="ctr" anchorCtr="0">
+            <a:noAutofit/>
+          </a:bodyPr>
+          <a:lstStyle/>
+          <a:p>
+            <a:pPr marL="0" marR="0" lvl="0" indent="0" algn="ctr" rtl="0">
+              <a:lnSpc>
+                <a:spcPct val="100000"/>
+              </a:lnSpc>
+              <a:spcBef>
+                <a:spcPts val="0"/>
+              </a:spcBef>
+              <a:spcAft>
+                <a:spcPts val="0"/>
+              </a:spcAft>
+              <a:buClr>
+                <a:srgbClr val="000000"/>
+              </a:buClr>
+              <a:buSzPts val="1600"/>
+              <a:buFont typeface="Arial"/>
+              <a:buNone/>
+            </a:pPr>
+            <a:r>
+              <a:rPr lang="en-US" sz="4800" dirty="0">
+                <a:solidFill>
+                  <a:schemeClr val="lt1"/>
+                </a:solidFill>
+              </a:rPr>
+              <a:t>John Hutchison</a:t>
+            </a:r>
+            <a:endParaRPr sz="3200" b="0" i="0" u="none" strike="noStrike" cap="none" dirty="0">
+              <a:solidFill>
+                <a:srgbClr val="000000"/>
+              </a:solidFill>
+              <a:latin typeface="Arial"/>
+              <a:ea typeface="Arial"/>
+              <a:cs typeface="Arial"/>
+              <a:sym typeface="Arial"/>
+            </a:endParaRPr>
+          </a:p>
+        </p:txBody>
+      </p:sp>
+      <p:sp>
+        <p:nvSpPr>
+          <p:cNvPr id="10" name="TextBox 9">
+            <a:extLst>
+              <a:ext uri="{FF2B5EF4-FFF2-40B4-BE49-F238E27FC236}">
+                <a16:creationId xmlns:a16="http://schemas.microsoft.com/office/drawing/2014/main" id="{5FA0D8B2-6B55-D3DC-BCBB-6FEAD86B9E72}"/>
+              </a:ext>
+            </a:extLst>
+          </p:cNvPr>
+          <p:cNvSpPr txBox="1"/>
+          <p:nvPr/>
+        </p:nvSpPr>
+        <p:spPr>
+          <a:xfrm>
+            <a:off x="269568" y="1850922"/>
+            <a:ext cx="6987941" cy="3046988"/>
+          </a:xfrm>
+          <a:prstGeom prst="rect">
+            <a:avLst/>
+          </a:prstGeom>
+          <a:solidFill>
+            <a:schemeClr val="bg1">
+              <a:alpha val="84400"/>
+            </a:schemeClr>
+          </a:solidFill>
+        </p:spPr>
+        <p:txBody>
+          <a:bodyPr wrap="square" rtlCol="0">
+            <a:spAutoFit/>
+          </a:bodyPr>
+          <a:lstStyle/>
+          <a:p>
+            <a:pPr marL="285750" indent="-285750">
+              <a:spcBef>
+                <a:spcPts val="1200"/>
+              </a:spcBef>
+              <a:buFont typeface="Arial" panose="020B0604020202020204" pitchFamily="34" charset="0"/>
+              <a:buChar char="•"/>
+            </a:pPr>
+            <a:r>
+              <a:rPr dirty="0"/>
+              <a:t>Canadian inventor whose lab was SEIZED by the government on direct orders from PRIME MINISTER Brian Mulroney.</a:t>
+            </a:r>
+          </a:p>
+          <a:p>
+            <a:pPr marL="285750" indent="-285750">
+              <a:spcBef>
+                <a:spcPts val="1200"/>
+              </a:spcBef>
+              <a:buFont typeface="Arial" panose="020B0604020202020204" pitchFamily="34" charset="0"/>
+              <a:buChar char="•"/>
+            </a:pPr>
+            <a:r>
+              <a:rPr dirty="0"/>
+              <a:t>A Supreme Court judge ordered his equipment RETURNED — the government KEPT IT ANYWAY.</a:t>
+            </a:r>
+          </a:p>
+          <a:p>
+            <a:pPr marL="285750" indent="-285750">
+              <a:spcBef>
+                <a:spcPts val="1200"/>
+              </a:spcBef>
+              <a:buFont typeface="Arial" panose="020B0604020202020204" pitchFamily="34" charset="0"/>
+              <a:buChar char="•"/>
+            </a:pPr>
+            <a:r>
+              <a:rPr dirty="0"/>
+              <a:t>His lab contained Tesla equipment replications and was the site of the "Hutchison Effect" — levitation and metal fusion.</a:t>
+            </a:r>
+          </a:p>
+          <a:p>
+            <a:pPr marL="285750" indent="-285750">
+              <a:spcBef>
+                <a:spcPts val="1200"/>
+              </a:spcBef>
+              <a:buFont typeface="Arial" panose="020B0604020202020204" pitchFamily="34" charset="0"/>
+              <a:buChar char="•"/>
+            </a:pPr>
+            <a:r>
+              <a:rPr dirty="0"/>
+              <a:t>U.S. military officials including Lt. Col. John Alexander visited his lab. Then the government TOOK everything.</a:t>
+            </a:r>
+          </a:p>
+          <a:p>
+            <a:pPr marL="285750" indent="-285750">
+              <a:spcBef>
+                <a:spcPts val="1200"/>
+              </a:spcBef>
+              <a:buFont typeface="Arial" panose="020B0604020202020204" pitchFamily="34" charset="0"/>
+              <a:buChar char="•"/>
+            </a:pPr>
+            <a:r>
+              <a:rPr dirty="0"/>
+              <a:t>SEIZED in 1990. Court ordered return. Government DEFIED the court. Evicted again in 2010. Still alive and still suppressed.</a:t>
+            </a:r>
+          </a:p>
+        </p:txBody>
+      </p:sp>
     </p:spTree>
+    <p:extLst>
+      <p:ext uri="{BB962C8B-B14F-4D97-AF65-F5344CB8AC3E}">
+        <p14:creationId xmlns:p14="http://schemas.microsoft.com/office/powerpoint/2010/main" val="3258241824"/>
+      </p:ext>
+    </p:extLst>
   </p:cSld>
   <p:clrMapOvr>
     <a:masterClrMapping/>
@@ -25538,7 +25497,7 @@
       </p:grpSpPr>
       <p:pic>
         <p:nvPicPr>
-          <p:cNvPr id="16" name="Picture 15" descr="John_Hutchison.jpg"/>
+          <p:cNvPr id="16" name="Picture 15" descr="Ken_Shoulders.jpg"/>
           <p:cNvPicPr>
             <a:picLocks noChangeAspect="1"/>
           </p:cNvPicPr>
@@ -25552,8 +25511,8 @@
         </p:blipFill>
         <p:spPr>
           <a:xfrm>
-            <a:off x="6947091" y="1525362"/>
-            <a:ext cx="5387784" cy="3034328"/>
+            <a:off x="9478244" y="1040310"/>
+            <a:ext cx="2665024" cy="3884876"/>
           </a:xfrm>
           <a:prstGeom prst="rect">
             <a:avLst/>
@@ -25598,7 +25557,7 @@
                   <a:schemeClr val="accent5"/>
                 </a:solidFill>
               </a:rPr>
-              <a:t>Why / How they John Hutchison:</a:t>
+              <a:t>Why / How they Ken Shoulders:</a:t>
             </a:r>
           </a:p>
         </p:txBody>
@@ -25784,6 +25743,104 @@
       </p:sp>
       <p:sp>
         <p:nvSpPr>
+          <p:cNvPr id="10" name="TextBox 9">
+            <a:extLst>
+              <a:ext uri="{FF2B5EF4-FFF2-40B4-BE49-F238E27FC236}">
+                <a16:creationId xmlns:a16="http://schemas.microsoft.com/office/drawing/2014/main" id="{5FA0D8B2-6B55-D3DC-BCBB-6FEAD86B9E72}"/>
+              </a:ext>
+            </a:extLst>
+          </p:cNvPr>
+          <p:cNvSpPr txBox="1"/>
+          <p:nvPr/>
+        </p:nvSpPr>
+        <p:spPr>
+          <a:xfrm>
+            <a:off x="283856" y="1867260"/>
+            <a:ext cx="7656422" cy="3477875"/>
+          </a:xfrm>
+          <a:prstGeom prst="rect">
+            <a:avLst/>
+          </a:prstGeom>
+          <a:solidFill>
+            <a:schemeClr val="bg1">
+              <a:alpha val="84400"/>
+            </a:schemeClr>
+          </a:solidFill>
+        </p:spPr>
+        <p:txBody>
+          <a:bodyPr wrap="square" rtlCol="0">
+            <a:spAutoFit/>
+          </a:bodyPr>
+          <a:lstStyle/>
+          <a:p>
+            <a:pPr marL="285750" indent="-285750">
+              <a:spcBef>
+                <a:spcPts val="1200"/>
+              </a:spcBef>
+              <a:buFont typeface="Arial" panose="020B0604020202020204" pitchFamily="34" charset="0"/>
+              <a:buChar char="•"/>
+            </a:pPr>
+            <a:r>
+              <a:rPr dirty="0"/>
+              <a:t>The "father of vacuum microelectronics" — discovered charge clusters that implied revolutionary energy generation.</a:t>
+            </a:r>
+          </a:p>
+          <a:p>
+            <a:pPr marL="285750" indent="-285750">
+              <a:spcBef>
+                <a:spcPts val="1200"/>
+              </a:spcBef>
+              <a:buFont typeface="Arial" panose="020B0604020202020204" pitchFamily="34" charset="0"/>
+              <a:buChar char="•"/>
+            </a:pPr>
+            <a:r>
+              <a:rPr dirty="0"/>
+              <a:t>Richard Feynman initially DISMISSED his findings, then admitted Shoulders was CORRECT.</a:t>
+            </a:r>
+          </a:p>
+          <a:p>
+            <a:pPr marL="285750" indent="-285750">
+              <a:spcBef>
+                <a:spcPts val="1200"/>
+              </a:spcBef>
+              <a:buFont typeface="Arial" panose="020B0604020202020204" pitchFamily="34" charset="0"/>
+              <a:buChar char="•"/>
+            </a:pPr>
+            <a:r>
+              <a:rPr dirty="0"/>
+              <a:t>Worked under CIA contract and deliberately SELF-CENSORED, knowing his discoveries would be suppressed.</a:t>
+            </a:r>
+          </a:p>
+          <a:p>
+            <a:pPr marL="285750" indent="-285750">
+              <a:spcBef>
+                <a:spcPts val="1200"/>
+              </a:spcBef>
+              <a:buFont typeface="Arial" panose="020B0604020202020204" pitchFamily="34" charset="0"/>
+              <a:buChar char="•"/>
+            </a:pPr>
+            <a:r>
+              <a:rPr dirty="0"/>
+              <a:t>Offered his research to dozens of companies and government agencies including the VP's office. NOBODY was interested.</a:t>
+            </a:r>
+          </a:p>
+          <a:p>
+            <a:pPr marL="285750" indent="-285750">
+              <a:spcBef>
+                <a:spcPts val="1200"/>
+              </a:spcBef>
+              <a:buFont typeface="Arial" panose="020B0604020202020204" pitchFamily="34" charset="0"/>
+              <a:buChar char="•"/>
+            </a:pPr>
+            <a:r>
+              <a:rPr dirty="0"/>
+              <a:t>Died at 86 of natural causes. The suppression wasn't violent — it was total institutional SILENCE.</a:t>
+            </a:r>
+          </a:p>
+        </p:txBody>
+      </p:sp>
+      <p:sp>
+        <p:nvSpPr>
           <p:cNvPr id="7" name="Google Shape;170;p31">
             <a:extLst>
               <a:ext uri="{FF2B5EF4-FFF2-40B4-BE49-F238E27FC236}">
@@ -25796,7 +25853,7 @@
         </p:nvSpPr>
         <p:spPr>
           <a:xfrm>
-            <a:off x="7506336" y="4925186"/>
+            <a:off x="7514707" y="5081958"/>
             <a:ext cx="4550222" cy="869505"/>
           </a:xfrm>
           <a:prstGeom prst="rect">
@@ -25838,7 +25895,7 @@
                   <a:schemeClr val="lt1"/>
                 </a:solidFill>
               </a:rPr>
-              <a:t>John Hutchison</a:t>
+              <a:t>Ken Shoulders</a:t>
             </a:r>
             <a:endParaRPr sz="3200" b="0" i="0" u="none" strike="noStrike" cap="none" dirty="0">
               <a:solidFill>
@@ -25854,106 +25911,78 @@
       </p:sp>
       <p:sp>
         <p:nvSpPr>
-          <p:cNvPr id="10" name="TextBox 9">
-            <a:extLst>
-              <a:ext uri="{FF2B5EF4-FFF2-40B4-BE49-F238E27FC236}">
-                <a16:creationId xmlns:a16="http://schemas.microsoft.com/office/drawing/2014/main" id="{5FA0D8B2-6B55-D3DC-BCBB-6FEAD86B9E72}"/>
-              </a:ext>
-            </a:extLst>
-          </p:cNvPr>
-          <p:cNvSpPr txBox="1"/>
-          <p:nvPr/>
-        </p:nvSpPr>
-        <p:spPr>
-          <a:xfrm>
-            <a:off x="269568" y="1850922"/>
-            <a:ext cx="6987941" cy="3046988"/>
-          </a:xfrm>
-          <a:prstGeom prst="rect">
-            <a:avLst/>
-          </a:prstGeom>
-          <a:solidFill>
-            <a:schemeClr val="bg1">
-              <a:alpha val="84400"/>
-            </a:schemeClr>
-          </a:solidFill>
-        </p:spPr>
-        <p:txBody>
-          <a:bodyPr wrap="square" rtlCol="0">
-            <a:spAutoFit/>
-          </a:bodyPr>
-          <a:lstStyle/>
-          <a:p>
-            <a:pPr marL="285750" indent="-285750">
-              <a:spcBef>
-                <a:spcPts val="1200"/>
-              </a:spcBef>
-              <a:buFont typeface="Arial" panose="020B0604020202020204" pitchFamily="34" charset="0"/>
-              <a:buChar char="•"/>
-            </a:pPr>
-            <a:r>
-              <a:rPr dirty="0"/>
-              <a:t>Canadian inventor whose lab was SEIZED by the government on direct orders from PRIME MINISTER Brian Mulroney.</a:t>
-            </a:r>
-          </a:p>
-          <a:p>
-            <a:pPr marL="285750" indent="-285750">
-              <a:spcBef>
-                <a:spcPts val="1200"/>
-              </a:spcBef>
-              <a:buFont typeface="Arial" panose="020B0604020202020204" pitchFamily="34" charset="0"/>
-              <a:buChar char="•"/>
-            </a:pPr>
-            <a:r>
-              <a:rPr dirty="0"/>
-              <a:t>A Supreme Court judge ordered his equipment RETURNED — the government KEPT IT ANYWAY.</a:t>
-            </a:r>
-          </a:p>
-          <a:p>
-            <a:pPr marL="285750" indent="-285750">
-              <a:spcBef>
-                <a:spcPts val="1200"/>
-              </a:spcBef>
-              <a:buFont typeface="Arial" panose="020B0604020202020204" pitchFamily="34" charset="0"/>
-              <a:buChar char="•"/>
-            </a:pPr>
-            <a:r>
-              <a:rPr dirty="0"/>
-              <a:t>His lab contained Tesla equipment replications and was the site of the "Hutchison Effect" — levitation and metal fusion.</a:t>
-            </a:r>
-          </a:p>
-          <a:p>
-            <a:pPr marL="285750" indent="-285750">
-              <a:spcBef>
-                <a:spcPts val="1200"/>
-              </a:spcBef>
-              <a:buFont typeface="Arial" panose="020B0604020202020204" pitchFamily="34" charset="0"/>
-              <a:buChar char="•"/>
-            </a:pPr>
-            <a:r>
-              <a:rPr dirty="0"/>
-              <a:t>U.S. military officials including Lt. Col. John Alexander visited his lab. Then the government TOOK everything.</a:t>
-            </a:r>
-          </a:p>
-          <a:p>
-            <a:pPr marL="285750" indent="-285750">
-              <a:spcBef>
-                <a:spcPts val="1200"/>
-              </a:spcBef>
-              <a:buFont typeface="Arial" panose="020B0604020202020204" pitchFamily="34" charset="0"/>
-              <a:buChar char="•"/>
-            </a:pPr>
-            <a:r>
-              <a:rPr dirty="0"/>
-              <a:t>SEIZED in 1990. Court ordered return. Government DEFIED the court. Evicted again in 2010. Still alive and still suppressed.</a:t>
-            </a:r>
+          <p:cNvPr id="8" name="Google Shape;170;p31">
+            <a:extLst>
+              <a:ext uri="{FF2B5EF4-FFF2-40B4-BE49-F238E27FC236}">
+                <a16:creationId xmlns:a16="http://schemas.microsoft.com/office/drawing/2014/main" id="{D328ABDE-E232-3EB7-C3F2-B4BB7B64262F}"/>
+              </a:ext>
+            </a:extLst>
+          </p:cNvPr>
+          <p:cNvSpPr/>
+          <p:nvPr/>
+        </p:nvSpPr>
+        <p:spPr>
+          <a:xfrm>
+            <a:off x="7534478" y="5838192"/>
+            <a:ext cx="4550222" cy="548230"/>
+          </a:xfrm>
+          <a:prstGeom prst="rect">
+            <a:avLst/>
+          </a:prstGeom>
+          <a:solidFill>
+            <a:srgbClr val="C00000"/>
+          </a:solidFill>
+          <a:ln>
+            <a:noFill/>
+          </a:ln>
+        </p:spPr>
+        <p:txBody>
+          <a:bodyPr spcFirstLastPara="1" wrap="square" lIns="91425" tIns="45700" rIns="91425" bIns="45700" anchor="ctr" anchorCtr="0">
+            <a:noAutofit/>
+          </a:bodyPr>
+          <a:lstStyle/>
+          <a:p>
+            <a:pPr marL="0" marR="0" lvl="0" indent="0" algn="ctr" rtl="0">
+              <a:lnSpc>
+                <a:spcPct val="100000"/>
+              </a:lnSpc>
+              <a:spcBef>
+                <a:spcPts val="0"/>
+              </a:spcBef>
+              <a:spcAft>
+                <a:spcPts val="0"/>
+              </a:spcAft>
+              <a:buClr>
+                <a:srgbClr val="000000"/>
+              </a:buClr>
+              <a:buSzPts val="1600"/>
+              <a:buFont typeface="Arial"/>
+              <a:buNone/>
+            </a:pPr>
+            <a:r>
+              <a:rPr lang="en-US" sz="3600" dirty="0">
+                <a:solidFill>
+                  <a:schemeClr val="lt1"/>
+                </a:solidFill>
+              </a:rPr>
+              <a:t>Dead at Age 86</a:t>
+            </a:r>
+            <a:endParaRPr sz="2000" b="0" i="0" u="none" strike="noStrike" cap="none" dirty="0">
+              <a:solidFill>
+                <a:srgbClr val="000000"/>
+              </a:solidFill>
+              <a:latin typeface="Arial"/>
+              <a:ea typeface="Arial"/>
+              <a:cs typeface="Arial"/>
+              <a:sym typeface="Arial"/>
+            </a:endParaRPr>
           </a:p>
         </p:txBody>
       </p:sp>
     </p:spTree>
     <p:extLst>
       <p:ext uri="{BB962C8B-B14F-4D97-AF65-F5344CB8AC3E}">
-        <p14:creationId xmlns:p14="http://schemas.microsoft.com/office/powerpoint/2010/main" val="3258241824"/>
+        <p14:creationId xmlns:p14="http://schemas.microsoft.com/office/powerpoint/2010/main" val="2848160679"/>
       </p:ext>
     </p:extLst>
   </p:cSld>
@@ -25980,9 +26009,469 @@
           <a:chExt cx="0" cy="0"/>
         </a:xfrm>
       </p:grpSpPr>
+      <p:sp>
+        <p:nvSpPr>
+          <p:cNvPr id="15" name="TextBox 14">
+            <a:extLst>
+              <a:ext uri="{FF2B5EF4-FFF2-40B4-BE49-F238E27FC236}">
+                <a16:creationId xmlns:a16="http://schemas.microsoft.com/office/drawing/2014/main" id="{E478240E-251B-5BA6-3C45-7E6620400769}"/>
+              </a:ext>
+            </a:extLst>
+          </p:cNvPr>
+          <p:cNvSpPr txBox="1"/>
+          <p:nvPr/>
+        </p:nvSpPr>
+        <p:spPr>
+          <a:xfrm>
+            <a:off x="312432" y="1288262"/>
+            <a:ext cx="6494294" cy="584775"/>
+          </a:xfrm>
+          <a:prstGeom prst="rect">
+            <a:avLst/>
+          </a:prstGeom>
+          <a:solidFill>
+            <a:schemeClr val="bg1">
+              <a:alpha val="84400"/>
+            </a:schemeClr>
+          </a:solidFill>
+        </p:spPr>
+        <p:txBody>
+          <a:bodyPr wrap="square" rtlCol="0">
+            <a:spAutoFit/>
+          </a:bodyPr>
+          <a:lstStyle/>
+          <a:p>
+            <a:r>
+              <a:rPr lang="en-US" sz="3200" b="1" dirty="0">
+                <a:solidFill>
+                  <a:schemeClr val="accent5"/>
+                </a:solidFill>
+              </a:rPr>
+              <a:t>Why / How they Wilhelm Reich:</a:t>
+            </a:r>
+          </a:p>
+        </p:txBody>
+      </p:sp>
+      <p:sp>
+        <p:nvSpPr>
+          <p:cNvPr id="3" name="Google Shape;170;p31">
+            <a:extLst>
+              <a:ext uri="{FF2B5EF4-FFF2-40B4-BE49-F238E27FC236}">
+                <a16:creationId xmlns:a16="http://schemas.microsoft.com/office/drawing/2014/main" id="{A4695FE5-0AA5-AB05-98B1-B5B8E3FA8CBE}"/>
+              </a:ext>
+            </a:extLst>
+          </p:cNvPr>
+          <p:cNvSpPr/>
+          <p:nvPr/>
+        </p:nvSpPr>
+        <p:spPr>
+          <a:xfrm>
+            <a:off x="191731" y="5732890"/>
+            <a:ext cx="3431270" cy="496760"/>
+          </a:xfrm>
+          <a:prstGeom prst="rect">
+            <a:avLst/>
+          </a:prstGeom>
+          <a:solidFill>
+            <a:schemeClr val="accent5"/>
+          </a:solidFill>
+          <a:ln>
+            <a:noFill/>
+          </a:ln>
+        </p:spPr>
+        <p:txBody>
+          <a:bodyPr spcFirstLastPara="1" wrap="square" lIns="91425" tIns="45700" rIns="91425" bIns="45700" anchor="ctr" anchorCtr="0">
+            <a:noAutofit/>
+          </a:bodyPr>
+          <a:lstStyle/>
+          <a:p>
+            <a:pPr marL="0" marR="0" lvl="0" indent="0" algn="ctr" rtl="0">
+              <a:lnSpc>
+                <a:spcPct val="100000"/>
+              </a:lnSpc>
+              <a:spcBef>
+                <a:spcPts val="0"/>
+              </a:spcBef>
+              <a:spcAft>
+                <a:spcPts val="0"/>
+              </a:spcAft>
+              <a:buClr>
+                <a:srgbClr val="000000"/>
+              </a:buClr>
+              <a:buSzPts val="1600"/>
+              <a:buFont typeface="Arial"/>
+              <a:buNone/>
+            </a:pPr>
+            <a:r>
+              <a:rPr lang="en-US" sz="3600" dirty="0">
+                <a:solidFill>
+                  <a:schemeClr val="lt1"/>
+                </a:solidFill>
+              </a:rPr>
+              <a:t>Read List Here:</a:t>
+            </a:r>
+            <a:endParaRPr sz="2000" b="0" i="0" u="none" strike="noStrike" cap="none" dirty="0">
+              <a:solidFill>
+                <a:srgbClr val="000000"/>
+              </a:solidFill>
+              <a:latin typeface="Arial"/>
+              <a:ea typeface="Arial"/>
+              <a:cs typeface="Arial"/>
+              <a:sym typeface="Arial"/>
+            </a:endParaRPr>
+          </a:p>
+        </p:txBody>
+      </p:sp>
+      <p:sp>
+        <p:nvSpPr>
+          <p:cNvPr id="5" name="Google Shape;170;p31">
+            <a:extLst>
+              <a:ext uri="{FF2B5EF4-FFF2-40B4-BE49-F238E27FC236}">
+                <a16:creationId xmlns:a16="http://schemas.microsoft.com/office/drawing/2014/main" id="{98132413-6ED2-8B36-74B6-3C503B1A4634}"/>
+              </a:ext>
+            </a:extLst>
+          </p:cNvPr>
+          <p:cNvSpPr/>
+          <p:nvPr/>
+        </p:nvSpPr>
+        <p:spPr>
+          <a:xfrm>
+            <a:off x="0" y="-31518"/>
+            <a:ext cx="12192000" cy="1131606"/>
+          </a:xfrm>
+          <a:prstGeom prst="rect">
+            <a:avLst/>
+          </a:prstGeom>
+          <a:solidFill>
+            <a:srgbClr val="C00000"/>
+          </a:solidFill>
+          <a:ln>
+            <a:noFill/>
+          </a:ln>
+        </p:spPr>
+        <p:txBody>
+          <a:bodyPr spcFirstLastPara="1" wrap="square" lIns="91425" tIns="45700" rIns="91425" bIns="45700" anchor="ctr" anchorCtr="0">
+            <a:noAutofit/>
+          </a:bodyPr>
+          <a:lstStyle/>
+          <a:p>
+            <a:pPr marL="0" marR="0" lvl="0" indent="0" rtl="0">
+              <a:lnSpc>
+                <a:spcPct val="100000"/>
+              </a:lnSpc>
+              <a:spcBef>
+                <a:spcPts val="0"/>
+              </a:spcBef>
+              <a:spcAft>
+                <a:spcPts val="0"/>
+              </a:spcAft>
+              <a:buClr>
+                <a:srgbClr val="000000"/>
+              </a:buClr>
+              <a:buSzPts val="1600"/>
+              <a:buFont typeface="Arial"/>
+              <a:buNone/>
+            </a:pPr>
+            <a:r>
+              <a:rPr lang="en-US" sz="4800" dirty="0">
+                <a:solidFill>
+                  <a:schemeClr val="lt1"/>
+                </a:solidFill>
+              </a:rPr>
+              <a:t> 60+ Murdered: Energy Inventors Silenced</a:t>
+            </a:r>
+            <a:endParaRPr sz="3200" b="0" i="0" u="none" strike="noStrike" cap="none" dirty="0">
+              <a:solidFill>
+                <a:srgbClr val="000000"/>
+              </a:solidFill>
+              <a:latin typeface="Arial"/>
+              <a:ea typeface="Arial"/>
+              <a:cs typeface="Arial"/>
+              <a:sym typeface="Arial"/>
+            </a:endParaRPr>
+          </a:p>
+        </p:txBody>
+      </p:sp>
+      <p:sp>
+        <p:nvSpPr>
+          <p:cNvPr id="4" name="TextBox 3">
+            <a:extLst>
+              <a:ext uri="{FF2B5EF4-FFF2-40B4-BE49-F238E27FC236}">
+                <a16:creationId xmlns:a16="http://schemas.microsoft.com/office/drawing/2014/main" id="{50D7621F-9D36-7894-7117-9F831EF5EFA6}"/>
+              </a:ext>
+            </a:extLst>
+          </p:cNvPr>
+          <p:cNvSpPr txBox="1"/>
+          <p:nvPr/>
+        </p:nvSpPr>
+        <p:spPr>
+          <a:xfrm>
+            <a:off x="107300" y="6229650"/>
+            <a:ext cx="11685989" cy="461665"/>
+          </a:xfrm>
+          <a:prstGeom prst="rect">
+            <a:avLst/>
+          </a:prstGeom>
+          <a:solidFill>
+            <a:schemeClr val="bg1">
+              <a:alpha val="84400"/>
+            </a:schemeClr>
+          </a:solidFill>
+        </p:spPr>
+        <p:txBody>
+          <a:bodyPr wrap="square" rtlCol="0">
+            <a:spAutoFit/>
+          </a:bodyPr>
+          <a:lstStyle/>
+          <a:p>
+            <a:r>
+              <a:rPr lang="en-US" sz="2400" dirty="0"/>
+              <a:t>https://uapmurders.com/energy</a:t>
+            </a:r>
+          </a:p>
+        </p:txBody>
+      </p:sp>
+      <p:sp>
+        <p:nvSpPr>
+          <p:cNvPr id="7" name="Google Shape;170;p31">
+            <a:extLst>
+              <a:ext uri="{FF2B5EF4-FFF2-40B4-BE49-F238E27FC236}">
+                <a16:creationId xmlns:a16="http://schemas.microsoft.com/office/drawing/2014/main" id="{4B582382-76AA-B49E-C611-39A37CE591B9}"/>
+              </a:ext>
+            </a:extLst>
+          </p:cNvPr>
+          <p:cNvSpPr/>
+          <p:nvPr/>
+        </p:nvSpPr>
+        <p:spPr>
+          <a:xfrm>
+            <a:off x="7506336" y="4925186"/>
+            <a:ext cx="4550222" cy="869505"/>
+          </a:xfrm>
+          <a:prstGeom prst="rect">
+            <a:avLst/>
+          </a:prstGeom>
+          <a:solidFill>
+            <a:srgbClr val="C00000"/>
+          </a:solidFill>
+          <a:ln>
+            <a:noFill/>
+          </a:ln>
+        </p:spPr>
+        <p:txBody>
+          <a:bodyPr spcFirstLastPara="1" wrap="square" lIns="91425" tIns="45700" rIns="91425" bIns="45700" anchor="ctr" anchorCtr="0">
+            <a:noAutofit/>
+          </a:bodyPr>
+          <a:lstStyle/>
+          <a:p>
+            <a:pPr marL="0" marR="0" lvl="0" indent="0" algn="ctr" rtl="0">
+              <a:lnSpc>
+                <a:spcPct val="100000"/>
+              </a:lnSpc>
+              <a:spcBef>
+                <a:spcPts val="0"/>
+              </a:spcBef>
+              <a:spcAft>
+                <a:spcPts val="0"/>
+              </a:spcAft>
+              <a:buClr>
+                <a:srgbClr val="000000"/>
+              </a:buClr>
+              <a:buSzPts val="1600"/>
+              <a:buFont typeface="Arial"/>
+              <a:buNone/>
+            </a:pPr>
+            <a:r>
+              <a:rPr lang="en-US" sz="4800" dirty="0">
+                <a:solidFill>
+                  <a:schemeClr val="lt1"/>
+                </a:solidFill>
+              </a:rPr>
+              <a:t>Wilhelm Reich</a:t>
+            </a:r>
+            <a:endParaRPr sz="3200" b="0" i="0" u="none" strike="noStrike" cap="none" dirty="0">
+              <a:solidFill>
+                <a:srgbClr val="000000"/>
+              </a:solidFill>
+              <a:latin typeface="Arial"/>
+              <a:ea typeface="Arial"/>
+              <a:cs typeface="Arial"/>
+              <a:sym typeface="Arial"/>
+            </a:endParaRPr>
+          </a:p>
+        </p:txBody>
+      </p:sp>
+      <p:sp>
+        <p:nvSpPr>
+          <p:cNvPr id="8" name="Google Shape;170;p31">
+            <a:extLst>
+              <a:ext uri="{FF2B5EF4-FFF2-40B4-BE49-F238E27FC236}">
+                <a16:creationId xmlns:a16="http://schemas.microsoft.com/office/drawing/2014/main" id="{D328ABDE-E232-3EB7-C3F2-B4BB7B64262F}"/>
+              </a:ext>
+            </a:extLst>
+          </p:cNvPr>
+          <p:cNvSpPr/>
+          <p:nvPr/>
+        </p:nvSpPr>
+        <p:spPr>
+          <a:xfrm>
+            <a:off x="7526107" y="5681420"/>
+            <a:ext cx="4550222" cy="548230"/>
+          </a:xfrm>
+          <a:prstGeom prst="rect">
+            <a:avLst/>
+          </a:prstGeom>
+          <a:solidFill>
+            <a:srgbClr val="C00000"/>
+          </a:solidFill>
+          <a:ln>
+            <a:noFill/>
+          </a:ln>
+        </p:spPr>
+        <p:txBody>
+          <a:bodyPr spcFirstLastPara="1" wrap="square" lIns="91425" tIns="45700" rIns="91425" bIns="45700" anchor="ctr" anchorCtr="0">
+            <a:noAutofit/>
+          </a:bodyPr>
+          <a:lstStyle/>
+          <a:p>
+            <a:pPr marL="0" marR="0" lvl="0" indent="0" algn="ctr" rtl="0">
+              <a:lnSpc>
+                <a:spcPct val="100000"/>
+              </a:lnSpc>
+              <a:spcBef>
+                <a:spcPts val="0"/>
+              </a:spcBef>
+              <a:spcAft>
+                <a:spcPts val="0"/>
+              </a:spcAft>
+              <a:buClr>
+                <a:srgbClr val="000000"/>
+              </a:buClr>
+              <a:buSzPts val="1600"/>
+              <a:buFont typeface="Arial"/>
+              <a:buNone/>
+            </a:pPr>
+            <a:r>
+              <a:rPr lang="en-US" sz="3600" dirty="0">
+                <a:solidFill>
+                  <a:schemeClr val="lt1"/>
+                </a:solidFill>
+              </a:rPr>
+              <a:t>Dead at Age 60</a:t>
+            </a:r>
+            <a:endParaRPr sz="2000" b="0" i="0" u="none" strike="noStrike" cap="none" dirty="0">
+              <a:solidFill>
+                <a:srgbClr val="000000"/>
+              </a:solidFill>
+              <a:latin typeface="Arial"/>
+              <a:ea typeface="Arial"/>
+              <a:cs typeface="Arial"/>
+              <a:sym typeface="Arial"/>
+            </a:endParaRPr>
+          </a:p>
+        </p:txBody>
+      </p:sp>
+      <p:sp>
+        <p:nvSpPr>
+          <p:cNvPr id="10" name="TextBox 9">
+            <a:extLst>
+              <a:ext uri="{FF2B5EF4-FFF2-40B4-BE49-F238E27FC236}">
+                <a16:creationId xmlns:a16="http://schemas.microsoft.com/office/drawing/2014/main" id="{5FA0D8B2-6B55-D3DC-BCBB-6FEAD86B9E72}"/>
+              </a:ext>
+            </a:extLst>
+          </p:cNvPr>
+          <p:cNvSpPr txBox="1"/>
+          <p:nvPr/>
+        </p:nvSpPr>
+        <p:spPr>
+          <a:xfrm>
+            <a:off x="237467" y="1937976"/>
+            <a:ext cx="7763533" cy="3200876"/>
+          </a:xfrm>
+          <a:prstGeom prst="rect">
+            <a:avLst/>
+          </a:prstGeom>
+          <a:solidFill>
+            <a:schemeClr val="bg1">
+              <a:alpha val="84400"/>
+            </a:schemeClr>
+          </a:solidFill>
+        </p:spPr>
+        <p:txBody>
+          <a:bodyPr wrap="square" rtlCol="0">
+            <a:spAutoFit/>
+          </a:bodyPr>
+          <a:lstStyle/>
+          <a:p>
+            <a:pPr marL="285750" indent="-285750">
+              <a:spcBef>
+                <a:spcPts val="1200"/>
+              </a:spcBef>
+              <a:buFont typeface="Arial" panose="020B0604020202020204" pitchFamily="34" charset="0"/>
+              <a:buChar char="•"/>
+            </a:pPr>
+            <a:r>
+              <a:rPr dirty="0"/>
+              <a:t>The FDA BURNED SIX TONS of his books — the only government-sanctioned book burning in U.S. history.</a:t>
+            </a:r>
+          </a:p>
+          <a:p>
+            <a:pPr marL="285750" indent="-285750">
+              <a:spcBef>
+                <a:spcPts val="1200"/>
+              </a:spcBef>
+              <a:buFont typeface="Arial" panose="020B0604020202020204" pitchFamily="34" charset="0"/>
+              <a:buChar char="•"/>
+            </a:pPr>
+            <a:r>
+              <a:rPr dirty="0"/>
+              <a:t>Developed orgone energy accumulators. The government didn't just ban the devices — they banned the WORD "orgone" in print.</a:t>
+            </a:r>
+          </a:p>
+          <a:p>
+            <a:pPr marL="285750" indent="-285750">
+              <a:spcBef>
+                <a:spcPts val="1200"/>
+              </a:spcBef>
+              <a:buFont typeface="Arial" panose="020B0604020202020204" pitchFamily="34" charset="0"/>
+              <a:buChar char="•"/>
+            </a:pPr>
+            <a:r>
+              <a:rPr dirty="0"/>
+              <a:t>IMPRISONED for contempt of court. Died of heart failure in federal prison at age 60.</a:t>
+            </a:r>
+          </a:p>
+          <a:p>
+            <a:pPr marL="285750" indent="-285750">
+              <a:spcBef>
+                <a:spcPts val="1200"/>
+              </a:spcBef>
+              <a:buFont typeface="Arial" panose="020B0604020202020204" pitchFamily="34" charset="0"/>
+              <a:buChar char="•"/>
+            </a:pPr>
+            <a:r>
+              <a:rPr dirty="0"/>
+              <a:t>He died ONE DAY before he was eligible to apply for parole. One single day.</a:t>
+            </a:r>
+          </a:p>
+          <a:p>
+            <a:pPr marL="285750" indent="-285750">
+              <a:spcBef>
+                <a:spcPts val="1200"/>
+              </a:spcBef>
+              <a:buFont typeface="Arial" panose="020B0604020202020204" pitchFamily="34" charset="0"/>
+              <a:buChar char="•"/>
+            </a:pPr>
+            <a:r>
+              <a:rPr dirty="0"/>
+              <a:t>They burned his books, banned his words, locked him up, and he died the day before freedom. In America.</a:t>
+            </a:r>
+          </a:p>
+        </p:txBody>
+      </p:sp>
       <p:pic>
         <p:nvPicPr>
-          <p:cNvPr id="16" name="Picture 15" descr="Ken_Shoulders.jpg"/>
+          <p:cNvPr id="16" name="Picture 15" descr="Wilhelm_Reich.jpg"/>
           <p:cNvPicPr>
             <a:picLocks noChangeAspect="1"/>
           </p:cNvPicPr>
@@ -25996,480 +26485,15 @@
         </p:blipFill>
         <p:spPr>
           <a:xfrm>
-            <a:off x="9478244" y="1040310"/>
-            <a:ext cx="2665024" cy="3884876"/>
+            <a:off x="8342003" y="1100088"/>
+            <a:ext cx="2597960" cy="3884876"/>
           </a:xfrm>
           <a:prstGeom prst="rect">
             <a:avLst/>
           </a:prstGeom>
         </p:spPr>
       </p:pic>
-      <p:sp>
-        <p:nvSpPr>
-          <p:cNvPr id="15" name="TextBox 14">
-            <a:extLst>
-              <a:ext uri="{FF2B5EF4-FFF2-40B4-BE49-F238E27FC236}">
-                <a16:creationId xmlns:a16="http://schemas.microsoft.com/office/drawing/2014/main" id="{E478240E-251B-5BA6-3C45-7E6620400769}"/>
-              </a:ext>
-            </a:extLst>
-          </p:cNvPr>
-          <p:cNvSpPr txBox="1"/>
-          <p:nvPr/>
-        </p:nvSpPr>
-        <p:spPr>
-          <a:xfrm>
-            <a:off x="312432" y="1288262"/>
-            <a:ext cx="6494294" cy="584775"/>
-          </a:xfrm>
-          <a:prstGeom prst="rect">
-            <a:avLst/>
-          </a:prstGeom>
-          <a:solidFill>
-            <a:schemeClr val="bg1">
-              <a:alpha val="84400"/>
-            </a:schemeClr>
-          </a:solidFill>
-        </p:spPr>
-        <p:txBody>
-          <a:bodyPr wrap="square" rtlCol="0">
-            <a:spAutoFit/>
-          </a:bodyPr>
-          <a:lstStyle/>
-          <a:p>
-            <a:r>
-              <a:rPr lang="en-US" sz="3200" b="1" dirty="0">
-                <a:solidFill>
-                  <a:schemeClr val="accent5"/>
-                </a:solidFill>
-              </a:rPr>
-              <a:t>Why / How they Ken Shoulders:</a:t>
-            </a:r>
-          </a:p>
-        </p:txBody>
-      </p:sp>
-      <p:sp>
-        <p:nvSpPr>
-          <p:cNvPr id="3" name="Google Shape;170;p31">
-            <a:extLst>
-              <a:ext uri="{FF2B5EF4-FFF2-40B4-BE49-F238E27FC236}">
-                <a16:creationId xmlns:a16="http://schemas.microsoft.com/office/drawing/2014/main" id="{A4695FE5-0AA5-AB05-98B1-B5B8E3FA8CBE}"/>
-              </a:ext>
-            </a:extLst>
-          </p:cNvPr>
-          <p:cNvSpPr/>
-          <p:nvPr/>
-        </p:nvSpPr>
-        <p:spPr>
-          <a:xfrm>
-            <a:off x="191731" y="5732890"/>
-            <a:ext cx="3431270" cy="496760"/>
-          </a:xfrm>
-          <a:prstGeom prst="rect">
-            <a:avLst/>
-          </a:prstGeom>
-          <a:solidFill>
-            <a:schemeClr val="accent5"/>
-          </a:solidFill>
-          <a:ln>
-            <a:noFill/>
-          </a:ln>
-        </p:spPr>
-        <p:txBody>
-          <a:bodyPr spcFirstLastPara="1" wrap="square" lIns="91425" tIns="45700" rIns="91425" bIns="45700" anchor="ctr" anchorCtr="0">
-            <a:noAutofit/>
-          </a:bodyPr>
-          <a:lstStyle/>
-          <a:p>
-            <a:pPr marL="0" marR="0" lvl="0" indent="0" algn="ctr" rtl="0">
-              <a:lnSpc>
-                <a:spcPct val="100000"/>
-              </a:lnSpc>
-              <a:spcBef>
-                <a:spcPts val="0"/>
-              </a:spcBef>
-              <a:spcAft>
-                <a:spcPts val="0"/>
-              </a:spcAft>
-              <a:buClr>
-                <a:srgbClr val="000000"/>
-              </a:buClr>
-              <a:buSzPts val="1600"/>
-              <a:buFont typeface="Arial"/>
-              <a:buNone/>
-            </a:pPr>
-            <a:r>
-              <a:rPr lang="en-US" sz="3600" dirty="0">
-                <a:solidFill>
-                  <a:schemeClr val="lt1"/>
-                </a:solidFill>
-              </a:rPr>
-              <a:t>Read List Here:</a:t>
-            </a:r>
-            <a:endParaRPr sz="2000" b="0" i="0" u="none" strike="noStrike" cap="none" dirty="0">
-              <a:solidFill>
-                <a:srgbClr val="000000"/>
-              </a:solidFill>
-              <a:latin typeface="Arial"/>
-              <a:ea typeface="Arial"/>
-              <a:cs typeface="Arial"/>
-              <a:sym typeface="Arial"/>
-            </a:endParaRPr>
-          </a:p>
-        </p:txBody>
-      </p:sp>
-      <p:sp>
-        <p:nvSpPr>
-          <p:cNvPr id="5" name="Google Shape;170;p31">
-            <a:extLst>
-              <a:ext uri="{FF2B5EF4-FFF2-40B4-BE49-F238E27FC236}">
-                <a16:creationId xmlns:a16="http://schemas.microsoft.com/office/drawing/2014/main" id="{98132413-6ED2-8B36-74B6-3C503B1A4634}"/>
-              </a:ext>
-            </a:extLst>
-          </p:cNvPr>
-          <p:cNvSpPr/>
-          <p:nvPr/>
-        </p:nvSpPr>
-        <p:spPr>
-          <a:xfrm>
-            <a:off x="0" y="-31518"/>
-            <a:ext cx="12192000" cy="1131606"/>
-          </a:xfrm>
-          <a:prstGeom prst="rect">
-            <a:avLst/>
-          </a:prstGeom>
-          <a:solidFill>
-            <a:srgbClr val="C00000"/>
-          </a:solidFill>
-          <a:ln>
-            <a:noFill/>
-          </a:ln>
-        </p:spPr>
-        <p:txBody>
-          <a:bodyPr spcFirstLastPara="1" wrap="square" lIns="91425" tIns="45700" rIns="91425" bIns="45700" anchor="ctr" anchorCtr="0">
-            <a:noAutofit/>
-          </a:bodyPr>
-          <a:lstStyle/>
-          <a:p>
-            <a:pPr marL="0" marR="0" lvl="0" indent="0" rtl="0">
-              <a:lnSpc>
-                <a:spcPct val="100000"/>
-              </a:lnSpc>
-              <a:spcBef>
-                <a:spcPts val="0"/>
-              </a:spcBef>
-              <a:spcAft>
-                <a:spcPts val="0"/>
-              </a:spcAft>
-              <a:buClr>
-                <a:srgbClr val="000000"/>
-              </a:buClr>
-              <a:buSzPts val="1600"/>
-              <a:buFont typeface="Arial"/>
-              <a:buNone/>
-            </a:pPr>
-            <a:r>
-              <a:rPr lang="en-US" sz="4800" dirty="0">
-                <a:solidFill>
-                  <a:schemeClr val="lt1"/>
-                </a:solidFill>
-              </a:rPr>
-              <a:t> 60+ Murdered: Energy Inventors Silenced</a:t>
-            </a:r>
-            <a:endParaRPr sz="3200" b="0" i="0" u="none" strike="noStrike" cap="none" dirty="0">
-              <a:solidFill>
-                <a:srgbClr val="000000"/>
-              </a:solidFill>
-              <a:latin typeface="Arial"/>
-              <a:ea typeface="Arial"/>
-              <a:cs typeface="Arial"/>
-              <a:sym typeface="Arial"/>
-            </a:endParaRPr>
-          </a:p>
-        </p:txBody>
-      </p:sp>
-      <p:sp>
-        <p:nvSpPr>
-          <p:cNvPr id="4" name="TextBox 3">
-            <a:extLst>
-              <a:ext uri="{FF2B5EF4-FFF2-40B4-BE49-F238E27FC236}">
-                <a16:creationId xmlns:a16="http://schemas.microsoft.com/office/drawing/2014/main" id="{50D7621F-9D36-7894-7117-9F831EF5EFA6}"/>
-              </a:ext>
-            </a:extLst>
-          </p:cNvPr>
-          <p:cNvSpPr txBox="1"/>
-          <p:nvPr/>
-        </p:nvSpPr>
-        <p:spPr>
-          <a:xfrm>
-            <a:off x="107300" y="6229650"/>
-            <a:ext cx="11685989" cy="461665"/>
-          </a:xfrm>
-          <a:prstGeom prst="rect">
-            <a:avLst/>
-          </a:prstGeom>
-          <a:solidFill>
-            <a:schemeClr val="bg1">
-              <a:alpha val="84400"/>
-            </a:schemeClr>
-          </a:solidFill>
-        </p:spPr>
-        <p:txBody>
-          <a:bodyPr wrap="square" rtlCol="0">
-            <a:spAutoFit/>
-          </a:bodyPr>
-          <a:lstStyle/>
-          <a:p>
-            <a:r>
-              <a:rPr lang="en-US" sz="2400" dirty="0"/>
-              <a:t>https://uapmurders.com/energy</a:t>
-            </a:r>
-          </a:p>
-        </p:txBody>
-      </p:sp>
-      <p:sp>
-        <p:nvSpPr>
-          <p:cNvPr id="10" name="TextBox 9">
-            <a:extLst>
-              <a:ext uri="{FF2B5EF4-FFF2-40B4-BE49-F238E27FC236}">
-                <a16:creationId xmlns:a16="http://schemas.microsoft.com/office/drawing/2014/main" id="{5FA0D8B2-6B55-D3DC-BCBB-6FEAD86B9E72}"/>
-              </a:ext>
-            </a:extLst>
-          </p:cNvPr>
-          <p:cNvSpPr txBox="1"/>
-          <p:nvPr/>
-        </p:nvSpPr>
-        <p:spPr>
-          <a:xfrm>
-            <a:off x="283856" y="1867260"/>
-            <a:ext cx="7656422" cy="3477875"/>
-          </a:xfrm>
-          <a:prstGeom prst="rect">
-            <a:avLst/>
-          </a:prstGeom>
-          <a:solidFill>
-            <a:schemeClr val="bg1">
-              <a:alpha val="84400"/>
-            </a:schemeClr>
-          </a:solidFill>
-        </p:spPr>
-        <p:txBody>
-          <a:bodyPr wrap="square" rtlCol="0">
-            <a:spAutoFit/>
-          </a:bodyPr>
-          <a:lstStyle/>
-          <a:p>
-            <a:pPr marL="285750" indent="-285750">
-              <a:spcBef>
-                <a:spcPts val="1200"/>
-              </a:spcBef>
-              <a:buFont typeface="Arial" panose="020B0604020202020204" pitchFamily="34" charset="0"/>
-              <a:buChar char="•"/>
-            </a:pPr>
-            <a:r>
-              <a:rPr dirty="0"/>
-              <a:t>The "father of vacuum microelectronics" — discovered charge clusters that implied revolutionary energy generation.</a:t>
-            </a:r>
-          </a:p>
-          <a:p>
-            <a:pPr marL="285750" indent="-285750">
-              <a:spcBef>
-                <a:spcPts val="1200"/>
-              </a:spcBef>
-              <a:buFont typeface="Arial" panose="020B0604020202020204" pitchFamily="34" charset="0"/>
-              <a:buChar char="•"/>
-            </a:pPr>
-            <a:r>
-              <a:rPr dirty="0"/>
-              <a:t>Richard Feynman initially DISMISSED his findings, then admitted Shoulders was CORRECT.</a:t>
-            </a:r>
-          </a:p>
-          <a:p>
-            <a:pPr marL="285750" indent="-285750">
-              <a:spcBef>
-                <a:spcPts val="1200"/>
-              </a:spcBef>
-              <a:buFont typeface="Arial" panose="020B0604020202020204" pitchFamily="34" charset="0"/>
-              <a:buChar char="•"/>
-            </a:pPr>
-            <a:r>
-              <a:rPr dirty="0"/>
-              <a:t>Worked under CIA contract and deliberately SELF-CENSORED, knowing his discoveries would be suppressed.</a:t>
-            </a:r>
-          </a:p>
-          <a:p>
-            <a:pPr marL="285750" indent="-285750">
-              <a:spcBef>
-                <a:spcPts val="1200"/>
-              </a:spcBef>
-              <a:buFont typeface="Arial" panose="020B0604020202020204" pitchFamily="34" charset="0"/>
-              <a:buChar char="•"/>
-            </a:pPr>
-            <a:r>
-              <a:rPr dirty="0"/>
-              <a:t>Offered his research to dozens of companies and government agencies including the VP's office. NOBODY was interested.</a:t>
-            </a:r>
-          </a:p>
-          <a:p>
-            <a:pPr marL="285750" indent="-285750">
-              <a:spcBef>
-                <a:spcPts val="1200"/>
-              </a:spcBef>
-              <a:buFont typeface="Arial" panose="020B0604020202020204" pitchFamily="34" charset="0"/>
-              <a:buChar char="•"/>
-            </a:pPr>
-            <a:r>
-              <a:rPr dirty="0"/>
-              <a:t>Died at 86 of natural causes. The suppression wasn't violent — it was total institutional SILENCE.</a:t>
-            </a:r>
-          </a:p>
-        </p:txBody>
-      </p:sp>
-      <p:sp>
-        <p:nvSpPr>
-          <p:cNvPr id="7" name="Google Shape;170;p31">
-            <a:extLst>
-              <a:ext uri="{FF2B5EF4-FFF2-40B4-BE49-F238E27FC236}">
-                <a16:creationId xmlns:a16="http://schemas.microsoft.com/office/drawing/2014/main" id="{4B582382-76AA-B49E-C611-39A37CE591B9}"/>
-              </a:ext>
-            </a:extLst>
-          </p:cNvPr>
-          <p:cNvSpPr/>
-          <p:nvPr/>
-        </p:nvSpPr>
-        <p:spPr>
-          <a:xfrm>
-            <a:off x="7514707" y="5081958"/>
-            <a:ext cx="4550222" cy="869505"/>
-          </a:xfrm>
-          <a:prstGeom prst="rect">
-            <a:avLst/>
-          </a:prstGeom>
-          <a:solidFill>
-            <a:srgbClr val="C00000"/>
-          </a:solidFill>
-          <a:ln>
-            <a:noFill/>
-          </a:ln>
-        </p:spPr>
-        <p:txBody>
-          <a:bodyPr spcFirstLastPara="1" wrap="square" lIns="91425" tIns="45700" rIns="91425" bIns="45700" anchor="ctr" anchorCtr="0">
-            <a:noAutofit/>
-          </a:bodyPr>
-          <a:lstStyle/>
-          <a:p>
-            <a:pPr marL="0" marR="0" lvl="0" indent="0" algn="ctr" rtl="0">
-              <a:lnSpc>
-                <a:spcPct val="100000"/>
-              </a:lnSpc>
-              <a:spcBef>
-                <a:spcPts val="0"/>
-              </a:spcBef>
-              <a:spcAft>
-                <a:spcPts val="0"/>
-              </a:spcAft>
-              <a:buClr>
-                <a:srgbClr val="000000"/>
-              </a:buClr>
-              <a:buSzPts val="1600"/>
-              <a:buFont typeface="Arial"/>
-              <a:buNone/>
-            </a:pPr>
-            <a:r>
-              <a:rPr lang="en-US" sz="4800" dirty="0">
-                <a:solidFill>
-                  <a:schemeClr val="lt1"/>
-                </a:solidFill>
-              </a:rPr>
-              <a:t>Ken Shoulders</a:t>
-            </a:r>
-            <a:endParaRPr sz="3200" b="0" i="0" u="none" strike="noStrike" cap="none" dirty="0">
-              <a:solidFill>
-                <a:srgbClr val="000000"/>
-              </a:solidFill>
-              <a:latin typeface="Arial"/>
-              <a:ea typeface="Arial"/>
-              <a:cs typeface="Arial"/>
-              <a:sym typeface="Arial"/>
-            </a:endParaRPr>
-          </a:p>
-        </p:txBody>
-      </p:sp>
-      <p:sp>
-        <p:nvSpPr>
-          <p:cNvPr id="8" name="Google Shape;170;p31">
-            <a:extLst>
-              <a:ext uri="{FF2B5EF4-FFF2-40B4-BE49-F238E27FC236}">
-                <a16:creationId xmlns:a16="http://schemas.microsoft.com/office/drawing/2014/main" id="{D328ABDE-E232-3EB7-C3F2-B4BB7B64262F}"/>
-              </a:ext>
-            </a:extLst>
-          </p:cNvPr>
-          <p:cNvSpPr/>
-          <p:nvPr/>
-        </p:nvSpPr>
-        <p:spPr>
-          <a:xfrm>
-            <a:off x="7534478" y="5838192"/>
-            <a:ext cx="4550222" cy="548230"/>
-          </a:xfrm>
-          <a:prstGeom prst="rect">
-            <a:avLst/>
-          </a:prstGeom>
-          <a:solidFill>
-            <a:srgbClr val="C00000"/>
-          </a:solidFill>
-          <a:ln>
-            <a:noFill/>
-          </a:ln>
-        </p:spPr>
-        <p:txBody>
-          <a:bodyPr spcFirstLastPara="1" wrap="square" lIns="91425" tIns="45700" rIns="91425" bIns="45700" anchor="ctr" anchorCtr="0">
-            <a:noAutofit/>
-          </a:bodyPr>
-          <a:lstStyle/>
-          <a:p>
-            <a:pPr marL="0" marR="0" lvl="0" indent="0" algn="ctr" rtl="0">
-              <a:lnSpc>
-                <a:spcPct val="100000"/>
-              </a:lnSpc>
-              <a:spcBef>
-                <a:spcPts val="0"/>
-              </a:spcBef>
-              <a:spcAft>
-                <a:spcPts val="0"/>
-              </a:spcAft>
-              <a:buClr>
-                <a:srgbClr val="000000"/>
-              </a:buClr>
-              <a:buSzPts val="1600"/>
-              <a:buFont typeface="Arial"/>
-              <a:buNone/>
-            </a:pPr>
-            <a:r>
-              <a:rPr lang="en-US" sz="3600" dirty="0">
-                <a:solidFill>
-                  <a:schemeClr val="lt1"/>
-                </a:solidFill>
-              </a:rPr>
-              <a:t>Dead at Age 86</a:t>
-            </a:r>
-            <a:endParaRPr sz="2000" b="0" i="0" u="none" strike="noStrike" cap="none" dirty="0">
-              <a:solidFill>
-                <a:srgbClr val="000000"/>
-              </a:solidFill>
-              <a:latin typeface="Arial"/>
-              <a:ea typeface="Arial"/>
-              <a:cs typeface="Arial"/>
-              <a:sym typeface="Arial"/>
-            </a:endParaRPr>
-          </a:p>
-        </p:txBody>
-      </p:sp>
     </p:spTree>
-    <p:extLst>
-      <p:ext uri="{BB962C8B-B14F-4D97-AF65-F5344CB8AC3E}">
-        <p14:creationId xmlns:p14="http://schemas.microsoft.com/office/powerpoint/2010/main" val="2848160679"/>
-      </p:ext>
-    </p:extLst>
   </p:cSld>
   <p:clrMapOvr>
     <a:masterClrMapping/>
@@ -26532,7 +26556,7 @@
                   <a:schemeClr val="accent5"/>
                 </a:solidFill>
               </a:rPr>
-              <a:t>Why / How they Wilhelm Reich:</a:t>
+              <a:t>Why / How they Yull Brown:</a:t>
             </a:r>
           </a:p>
         </p:txBody>
@@ -26772,7 +26796,7 @@
                   <a:schemeClr val="lt1"/>
                 </a:solidFill>
               </a:rPr>
-              <a:t>Wilhelm Reich</a:t>
+              <a:t>Yull Brown</a:t>
             </a:r>
             <a:endParaRPr sz="3200" b="0" i="0" u="none" strike="noStrike" cap="none" dirty="0">
               <a:solidFill>
@@ -26842,7 +26866,7 @@
                   <a:schemeClr val="lt1"/>
                 </a:solidFill>
               </a:rPr>
-              <a:t>Dead at Age 60</a:t>
+              <a:t>Dead at Age 75</a:t>
             </a:r>
             <a:endParaRPr sz="2000" b="0" i="0" u="none" strike="noStrike" cap="none" dirty="0">
               <a:solidFill>
@@ -26870,8 +26894,8 @@
         </p:nvSpPr>
         <p:spPr>
           <a:xfrm>
-            <a:off x="237467" y="1937976"/>
-            <a:ext cx="7763533" cy="3200876"/>
+            <a:off x="229986" y="2002985"/>
+            <a:ext cx="6987941" cy="3046988"/>
           </a:xfrm>
           <a:prstGeom prst="rect">
             <a:avLst/>
@@ -26897,7 +26921,7 @@
             </a:pPr>
             <a:r>
               <a:rPr dirty="0"/>
-              <a:t>The FDA BURNED SIX TONS of his books — the only government-sanctioned book burning in U.S. history.</a:t>
+              <a:t>Invented "Brown's Gas" (HHO) — a water-derived fuel that could cut through metals and neutralize RADIOACTIVE WASTE.</a:t>
             </a:r>
           </a:p>
           <a:p>
@@ -26910,7 +26934,7 @@
             </a:pPr>
             <a:r>
               <a:rPr dirty="0"/>
-              <a:t>Developed orgone energy accumulators. The government didn't just ban the devices — they banned the WORD "orgone" in print.</a:t>
+              <a:t>Declared an "ENEMY OF THE STATE" in Bulgaria. Fled to Australia.</a:t>
             </a:r>
           </a:p>
           <a:p>
@@ -26923,7 +26947,7 @@
             </a:pPr>
             <a:r>
               <a:rPr dirty="0"/>
-              <a:t>IMPRISONED for contempt of court. Died of heart failure in federal prison at age 60.</a:t>
+              <a:t>Held valuable patents. Demonstrated his technology publicly. Died PENNILESS at 75.</a:t>
             </a:r>
           </a:p>
           <a:p>
@@ -26936,7 +26960,7 @@
             </a:pPr>
             <a:r>
               <a:rPr dirty="0"/>
-              <a:t>He died ONE DAY before he was eligible to apply for parole. One single day.</a:t>
+              <a:t>His gas could neutralize radioactive waste — a multi-TRILLION dollar problem solved.</a:t>
             </a:r>
           </a:p>
           <a:p>
@@ -26949,14 +26973,14 @@
             </a:pPr>
             <a:r>
               <a:rPr dirty="0"/>
-              <a:t>They burned his books, banned his words, locked him up, and he died the day before freedom. In America.</a:t>
+              <a:t>Enemy of the state, patents in hand, technology proven, died broke. The full suppression arc.</a:t>
             </a:r>
           </a:p>
         </p:txBody>
       </p:sp>
       <p:pic>
         <p:nvPicPr>
-          <p:cNvPr id="16" name="Picture 15" descr="Wilhelm_Reich.jpg"/>
+          <p:cNvPr id="16" name="Picture 15" descr="Yull_Brown.jpg"/>
           <p:cNvPicPr>
             <a:picLocks noChangeAspect="1"/>
           </p:cNvPicPr>
@@ -26970,8 +26994,8 @@
         </p:blipFill>
         <p:spPr>
           <a:xfrm>
-            <a:off x="8342003" y="1100088"/>
-            <a:ext cx="2597960" cy="3884876"/>
+            <a:off x="7182201" y="1100088"/>
+            <a:ext cx="4917564" cy="3884876"/>
           </a:xfrm>
           <a:prstGeom prst="rect">
             <a:avLst/>
@@ -27041,515 +27065,6 @@
                   <a:schemeClr val="accent5"/>
                 </a:solidFill>
               </a:rPr>
-              <a:t>Why / How they Yull Brown:</a:t>
-            </a:r>
-          </a:p>
-        </p:txBody>
-      </p:sp>
-      <p:sp>
-        <p:nvSpPr>
-          <p:cNvPr id="3" name="Google Shape;170;p31">
-            <a:extLst>
-              <a:ext uri="{FF2B5EF4-FFF2-40B4-BE49-F238E27FC236}">
-                <a16:creationId xmlns:a16="http://schemas.microsoft.com/office/drawing/2014/main" id="{A4695FE5-0AA5-AB05-98B1-B5B8E3FA8CBE}"/>
-              </a:ext>
-            </a:extLst>
-          </p:cNvPr>
-          <p:cNvSpPr/>
-          <p:nvPr/>
-        </p:nvSpPr>
-        <p:spPr>
-          <a:xfrm>
-            <a:off x="191731" y="5732890"/>
-            <a:ext cx="3431270" cy="496760"/>
-          </a:xfrm>
-          <a:prstGeom prst="rect">
-            <a:avLst/>
-          </a:prstGeom>
-          <a:solidFill>
-            <a:schemeClr val="accent5"/>
-          </a:solidFill>
-          <a:ln>
-            <a:noFill/>
-          </a:ln>
-        </p:spPr>
-        <p:txBody>
-          <a:bodyPr spcFirstLastPara="1" wrap="square" lIns="91425" tIns="45700" rIns="91425" bIns="45700" anchor="ctr" anchorCtr="0">
-            <a:noAutofit/>
-          </a:bodyPr>
-          <a:lstStyle/>
-          <a:p>
-            <a:pPr marL="0" marR="0" lvl="0" indent="0" algn="ctr" rtl="0">
-              <a:lnSpc>
-                <a:spcPct val="100000"/>
-              </a:lnSpc>
-              <a:spcBef>
-                <a:spcPts val="0"/>
-              </a:spcBef>
-              <a:spcAft>
-                <a:spcPts val="0"/>
-              </a:spcAft>
-              <a:buClr>
-                <a:srgbClr val="000000"/>
-              </a:buClr>
-              <a:buSzPts val="1600"/>
-              <a:buFont typeface="Arial"/>
-              <a:buNone/>
-            </a:pPr>
-            <a:r>
-              <a:rPr lang="en-US" sz="3600" dirty="0">
-                <a:solidFill>
-                  <a:schemeClr val="lt1"/>
-                </a:solidFill>
-              </a:rPr>
-              <a:t>Read List Here:</a:t>
-            </a:r>
-            <a:endParaRPr sz="2000" b="0" i="0" u="none" strike="noStrike" cap="none" dirty="0">
-              <a:solidFill>
-                <a:srgbClr val="000000"/>
-              </a:solidFill>
-              <a:latin typeface="Arial"/>
-              <a:ea typeface="Arial"/>
-              <a:cs typeface="Arial"/>
-              <a:sym typeface="Arial"/>
-            </a:endParaRPr>
-          </a:p>
-        </p:txBody>
-      </p:sp>
-      <p:sp>
-        <p:nvSpPr>
-          <p:cNvPr id="5" name="Google Shape;170;p31">
-            <a:extLst>
-              <a:ext uri="{FF2B5EF4-FFF2-40B4-BE49-F238E27FC236}">
-                <a16:creationId xmlns:a16="http://schemas.microsoft.com/office/drawing/2014/main" id="{98132413-6ED2-8B36-74B6-3C503B1A4634}"/>
-              </a:ext>
-            </a:extLst>
-          </p:cNvPr>
-          <p:cNvSpPr/>
-          <p:nvPr/>
-        </p:nvSpPr>
-        <p:spPr>
-          <a:xfrm>
-            <a:off x="0" y="-31518"/>
-            <a:ext cx="12192000" cy="1131606"/>
-          </a:xfrm>
-          <a:prstGeom prst="rect">
-            <a:avLst/>
-          </a:prstGeom>
-          <a:solidFill>
-            <a:srgbClr val="C00000"/>
-          </a:solidFill>
-          <a:ln>
-            <a:noFill/>
-          </a:ln>
-        </p:spPr>
-        <p:txBody>
-          <a:bodyPr spcFirstLastPara="1" wrap="square" lIns="91425" tIns="45700" rIns="91425" bIns="45700" anchor="ctr" anchorCtr="0">
-            <a:noAutofit/>
-          </a:bodyPr>
-          <a:lstStyle/>
-          <a:p>
-            <a:pPr marL="0" marR="0" lvl="0" indent="0" rtl="0">
-              <a:lnSpc>
-                <a:spcPct val="100000"/>
-              </a:lnSpc>
-              <a:spcBef>
-                <a:spcPts val="0"/>
-              </a:spcBef>
-              <a:spcAft>
-                <a:spcPts val="0"/>
-              </a:spcAft>
-              <a:buClr>
-                <a:srgbClr val="000000"/>
-              </a:buClr>
-              <a:buSzPts val="1600"/>
-              <a:buFont typeface="Arial"/>
-              <a:buNone/>
-            </a:pPr>
-            <a:r>
-              <a:rPr lang="en-US" sz="4800" dirty="0">
-                <a:solidFill>
-                  <a:schemeClr val="lt1"/>
-                </a:solidFill>
-              </a:rPr>
-              <a:t> 60+ Murdered: Energy Inventors Silenced</a:t>
-            </a:r>
-            <a:endParaRPr sz="3200" b="0" i="0" u="none" strike="noStrike" cap="none" dirty="0">
-              <a:solidFill>
-                <a:srgbClr val="000000"/>
-              </a:solidFill>
-              <a:latin typeface="Arial"/>
-              <a:ea typeface="Arial"/>
-              <a:cs typeface="Arial"/>
-              <a:sym typeface="Arial"/>
-            </a:endParaRPr>
-          </a:p>
-        </p:txBody>
-      </p:sp>
-      <p:sp>
-        <p:nvSpPr>
-          <p:cNvPr id="4" name="TextBox 3">
-            <a:extLst>
-              <a:ext uri="{FF2B5EF4-FFF2-40B4-BE49-F238E27FC236}">
-                <a16:creationId xmlns:a16="http://schemas.microsoft.com/office/drawing/2014/main" id="{50D7621F-9D36-7894-7117-9F831EF5EFA6}"/>
-              </a:ext>
-            </a:extLst>
-          </p:cNvPr>
-          <p:cNvSpPr txBox="1"/>
-          <p:nvPr/>
-        </p:nvSpPr>
-        <p:spPr>
-          <a:xfrm>
-            <a:off x="107300" y="6229650"/>
-            <a:ext cx="11685989" cy="461665"/>
-          </a:xfrm>
-          <a:prstGeom prst="rect">
-            <a:avLst/>
-          </a:prstGeom>
-          <a:solidFill>
-            <a:schemeClr val="bg1">
-              <a:alpha val="84400"/>
-            </a:schemeClr>
-          </a:solidFill>
-        </p:spPr>
-        <p:txBody>
-          <a:bodyPr wrap="square" rtlCol="0">
-            <a:spAutoFit/>
-          </a:bodyPr>
-          <a:lstStyle/>
-          <a:p>
-            <a:r>
-              <a:rPr lang="en-US" sz="2400" dirty="0"/>
-              <a:t>https://uapmurders.com/energy</a:t>
-            </a:r>
-          </a:p>
-        </p:txBody>
-      </p:sp>
-      <p:sp>
-        <p:nvSpPr>
-          <p:cNvPr id="7" name="Google Shape;170;p31">
-            <a:extLst>
-              <a:ext uri="{FF2B5EF4-FFF2-40B4-BE49-F238E27FC236}">
-                <a16:creationId xmlns:a16="http://schemas.microsoft.com/office/drawing/2014/main" id="{4B582382-76AA-B49E-C611-39A37CE591B9}"/>
-              </a:ext>
-            </a:extLst>
-          </p:cNvPr>
-          <p:cNvSpPr/>
-          <p:nvPr/>
-        </p:nvSpPr>
-        <p:spPr>
-          <a:xfrm>
-            <a:off x="7506336" y="4925186"/>
-            <a:ext cx="4550222" cy="869505"/>
-          </a:xfrm>
-          <a:prstGeom prst="rect">
-            <a:avLst/>
-          </a:prstGeom>
-          <a:solidFill>
-            <a:srgbClr val="C00000"/>
-          </a:solidFill>
-          <a:ln>
-            <a:noFill/>
-          </a:ln>
-        </p:spPr>
-        <p:txBody>
-          <a:bodyPr spcFirstLastPara="1" wrap="square" lIns="91425" tIns="45700" rIns="91425" bIns="45700" anchor="ctr" anchorCtr="0">
-            <a:noAutofit/>
-          </a:bodyPr>
-          <a:lstStyle/>
-          <a:p>
-            <a:pPr marL="0" marR="0" lvl="0" indent="0" algn="ctr" rtl="0">
-              <a:lnSpc>
-                <a:spcPct val="100000"/>
-              </a:lnSpc>
-              <a:spcBef>
-                <a:spcPts val="0"/>
-              </a:spcBef>
-              <a:spcAft>
-                <a:spcPts val="0"/>
-              </a:spcAft>
-              <a:buClr>
-                <a:srgbClr val="000000"/>
-              </a:buClr>
-              <a:buSzPts val="1600"/>
-              <a:buFont typeface="Arial"/>
-              <a:buNone/>
-            </a:pPr>
-            <a:r>
-              <a:rPr lang="en-US" sz="4800" dirty="0">
-                <a:solidFill>
-                  <a:schemeClr val="lt1"/>
-                </a:solidFill>
-              </a:rPr>
-              <a:t>Yull Brown</a:t>
-            </a:r>
-            <a:endParaRPr sz="3200" b="0" i="0" u="none" strike="noStrike" cap="none" dirty="0">
-              <a:solidFill>
-                <a:srgbClr val="000000"/>
-              </a:solidFill>
-              <a:latin typeface="Arial"/>
-              <a:ea typeface="Arial"/>
-              <a:cs typeface="Arial"/>
-              <a:sym typeface="Arial"/>
-            </a:endParaRPr>
-          </a:p>
-        </p:txBody>
-      </p:sp>
-      <p:sp>
-        <p:nvSpPr>
-          <p:cNvPr id="8" name="Google Shape;170;p31">
-            <a:extLst>
-              <a:ext uri="{FF2B5EF4-FFF2-40B4-BE49-F238E27FC236}">
-                <a16:creationId xmlns:a16="http://schemas.microsoft.com/office/drawing/2014/main" id="{D328ABDE-E232-3EB7-C3F2-B4BB7B64262F}"/>
-              </a:ext>
-            </a:extLst>
-          </p:cNvPr>
-          <p:cNvSpPr/>
-          <p:nvPr/>
-        </p:nvSpPr>
-        <p:spPr>
-          <a:xfrm>
-            <a:off x="7526107" y="5681420"/>
-            <a:ext cx="4550222" cy="548230"/>
-          </a:xfrm>
-          <a:prstGeom prst="rect">
-            <a:avLst/>
-          </a:prstGeom>
-          <a:solidFill>
-            <a:srgbClr val="C00000"/>
-          </a:solidFill>
-          <a:ln>
-            <a:noFill/>
-          </a:ln>
-        </p:spPr>
-        <p:txBody>
-          <a:bodyPr spcFirstLastPara="1" wrap="square" lIns="91425" tIns="45700" rIns="91425" bIns="45700" anchor="ctr" anchorCtr="0">
-            <a:noAutofit/>
-          </a:bodyPr>
-          <a:lstStyle/>
-          <a:p>
-            <a:pPr marL="0" marR="0" lvl="0" indent="0" algn="ctr" rtl="0">
-              <a:lnSpc>
-                <a:spcPct val="100000"/>
-              </a:lnSpc>
-              <a:spcBef>
-                <a:spcPts val="0"/>
-              </a:spcBef>
-              <a:spcAft>
-                <a:spcPts val="0"/>
-              </a:spcAft>
-              <a:buClr>
-                <a:srgbClr val="000000"/>
-              </a:buClr>
-              <a:buSzPts val="1600"/>
-              <a:buFont typeface="Arial"/>
-              <a:buNone/>
-            </a:pPr>
-            <a:r>
-              <a:rPr lang="en-US" sz="3600" dirty="0">
-                <a:solidFill>
-                  <a:schemeClr val="lt1"/>
-                </a:solidFill>
-              </a:rPr>
-              <a:t>Dead at Age 75</a:t>
-            </a:r>
-            <a:endParaRPr sz="2000" b="0" i="0" u="none" strike="noStrike" cap="none" dirty="0">
-              <a:solidFill>
-                <a:srgbClr val="000000"/>
-              </a:solidFill>
-              <a:latin typeface="Arial"/>
-              <a:ea typeface="Arial"/>
-              <a:cs typeface="Arial"/>
-              <a:sym typeface="Arial"/>
-            </a:endParaRPr>
-          </a:p>
-        </p:txBody>
-      </p:sp>
-      <p:sp>
-        <p:nvSpPr>
-          <p:cNvPr id="10" name="TextBox 9">
-            <a:extLst>
-              <a:ext uri="{FF2B5EF4-FFF2-40B4-BE49-F238E27FC236}">
-                <a16:creationId xmlns:a16="http://schemas.microsoft.com/office/drawing/2014/main" id="{5FA0D8B2-6B55-D3DC-BCBB-6FEAD86B9E72}"/>
-              </a:ext>
-            </a:extLst>
-          </p:cNvPr>
-          <p:cNvSpPr txBox="1"/>
-          <p:nvPr/>
-        </p:nvSpPr>
-        <p:spPr>
-          <a:xfrm>
-            <a:off x="229986" y="2002985"/>
-            <a:ext cx="6987941" cy="3046988"/>
-          </a:xfrm>
-          <a:prstGeom prst="rect">
-            <a:avLst/>
-          </a:prstGeom>
-          <a:solidFill>
-            <a:schemeClr val="bg1">
-              <a:alpha val="84400"/>
-            </a:schemeClr>
-          </a:solidFill>
-        </p:spPr>
-        <p:txBody>
-          <a:bodyPr wrap="square" rtlCol="0">
-            <a:spAutoFit/>
-          </a:bodyPr>
-          <a:lstStyle/>
-          <a:p>
-            <a:pPr marL="285750" indent="-285750">
-              <a:spcBef>
-                <a:spcPts val="1200"/>
-              </a:spcBef>
-              <a:buFont typeface="Arial" panose="020B0604020202020204" pitchFamily="34" charset="0"/>
-              <a:buChar char="•"/>
-            </a:pPr>
-            <a:r>
-              <a:rPr dirty="0"/>
-              <a:t>Invented "Brown's Gas" (HHO) — a water-derived fuel that could cut through metals and neutralize RADIOACTIVE WASTE.</a:t>
-            </a:r>
-          </a:p>
-          <a:p>
-            <a:pPr marL="285750" indent="-285750">
-              <a:spcBef>
-                <a:spcPts val="1200"/>
-              </a:spcBef>
-              <a:buFont typeface="Arial" panose="020B0604020202020204" pitchFamily="34" charset="0"/>
-              <a:buChar char="•"/>
-            </a:pPr>
-            <a:r>
-              <a:rPr dirty="0"/>
-              <a:t>Declared an "ENEMY OF THE STATE" in Bulgaria. Fled to Australia.</a:t>
-            </a:r>
-          </a:p>
-          <a:p>
-            <a:pPr marL="285750" indent="-285750">
-              <a:spcBef>
-                <a:spcPts val="1200"/>
-              </a:spcBef>
-              <a:buFont typeface="Arial" panose="020B0604020202020204" pitchFamily="34" charset="0"/>
-              <a:buChar char="•"/>
-            </a:pPr>
-            <a:r>
-              <a:rPr dirty="0"/>
-              <a:t>Held valuable patents. Demonstrated his technology publicly. Died PENNILESS at 75.</a:t>
-            </a:r>
-          </a:p>
-          <a:p>
-            <a:pPr marL="285750" indent="-285750">
-              <a:spcBef>
-                <a:spcPts val="1200"/>
-              </a:spcBef>
-              <a:buFont typeface="Arial" panose="020B0604020202020204" pitchFamily="34" charset="0"/>
-              <a:buChar char="•"/>
-            </a:pPr>
-            <a:r>
-              <a:rPr dirty="0"/>
-              <a:t>His gas could neutralize radioactive waste — a multi-TRILLION dollar problem solved.</a:t>
-            </a:r>
-          </a:p>
-          <a:p>
-            <a:pPr marL="285750" indent="-285750">
-              <a:spcBef>
-                <a:spcPts val="1200"/>
-              </a:spcBef>
-              <a:buFont typeface="Arial" panose="020B0604020202020204" pitchFamily="34" charset="0"/>
-              <a:buChar char="•"/>
-            </a:pPr>
-            <a:r>
-              <a:rPr dirty="0"/>
-              <a:t>Enemy of the state, patents in hand, technology proven, died broke. The full suppression arc.</a:t>
-            </a:r>
-          </a:p>
-        </p:txBody>
-      </p:sp>
-      <p:pic>
-        <p:nvPicPr>
-          <p:cNvPr id="16" name="Picture 15" descr="Yull_Brown.jpg"/>
-          <p:cNvPicPr>
-            <a:picLocks noChangeAspect="1"/>
-          </p:cNvPicPr>
-          <p:nvPr/>
-        </p:nvPicPr>
-        <p:blipFill>
-          <a:blip r:embed="rId2"/>
-          <a:stretch>
-            <a:fillRect/>
-          </a:stretch>
-        </p:blipFill>
-        <p:spPr>
-          <a:xfrm>
-            <a:off x="7182201" y="1100088"/>
-            <a:ext cx="4917564" cy="3884876"/>
-          </a:xfrm>
-          <a:prstGeom prst="rect">
-            <a:avLst/>
-          </a:prstGeom>
-        </p:spPr>
-      </p:pic>
-    </p:spTree>
-  </p:cSld>
-  <p:clrMapOvr>
-    <a:masterClrMapping/>
-  </p:clrMapOvr>
-</p:sld>
-</file>
-
-<file path=ppt/slides/slide48.xml><?xml version="1.0" encoding="utf-8"?>
-<p:sld xmlns:a="http://schemas.openxmlformats.org/drawingml/2006/main" xmlns:r="http://schemas.openxmlformats.org/officeDocument/2006/relationships" xmlns:p="http://schemas.openxmlformats.org/presentationml/2006/main">
-  <p:cSld>
-    <p:spTree>
-      <p:nvGrpSpPr>
-        <p:cNvPr id="1" name=""/>
-        <p:cNvGrpSpPr/>
-        <p:nvPr/>
-      </p:nvGrpSpPr>
-      <p:grpSpPr>
-        <a:xfrm>
-          <a:off x="0" y="0"/>
-          <a:ext cx="0" cy="0"/>
-          <a:chOff x="0" y="0"/>
-          <a:chExt cx="0" cy="0"/>
-        </a:xfrm>
-      </p:grpSpPr>
-      <p:sp>
-        <p:nvSpPr>
-          <p:cNvPr id="15" name="TextBox 14">
-            <a:extLst>
-              <a:ext uri="{FF2B5EF4-FFF2-40B4-BE49-F238E27FC236}">
-                <a16:creationId xmlns:a16="http://schemas.microsoft.com/office/drawing/2014/main" id="{E478240E-251B-5BA6-3C45-7E6620400769}"/>
-              </a:ext>
-            </a:extLst>
-          </p:cNvPr>
-          <p:cNvSpPr txBox="1"/>
-          <p:nvPr/>
-        </p:nvSpPr>
-        <p:spPr>
-          <a:xfrm>
-            <a:off x="312432" y="1288262"/>
-            <a:ext cx="6494294" cy="584775"/>
-          </a:xfrm>
-          <a:prstGeom prst="rect">
-            <a:avLst/>
-          </a:prstGeom>
-          <a:solidFill>
-            <a:schemeClr val="bg1">
-              <a:alpha val="84400"/>
-            </a:schemeClr>
-          </a:solidFill>
-        </p:spPr>
-        <p:txBody>
-          <a:bodyPr wrap="square" rtlCol="0">
-            <a:spAutoFit/>
-          </a:bodyPr>
-          <a:lstStyle/>
-          <a:p>
-            <a:r>
-              <a:rPr lang="en-US" sz="3200" b="1" dirty="0">
-                <a:solidFill>
-                  <a:schemeClr val="accent5"/>
-                </a:solidFill>
-              </a:rPr>
               <a:t>Why / How they Otis T Carr:</a:t>
             </a:r>
           </a:p>
@@ -28009,7 +27524,7 @@
 </p:sld>
 </file>
 
-<file path=ppt/slides/slide49.xml><?xml version="1.0" encoding="utf-8"?>
+<file path=ppt/slides/slide48.xml><?xml version="1.0" encoding="utf-8"?>
 <p:sld xmlns:a="http://schemas.openxmlformats.org/drawingml/2006/main" xmlns:r="http://schemas.openxmlformats.org/officeDocument/2006/relationships" xmlns:p="http://schemas.openxmlformats.org/presentationml/2006/main">
   <p:cSld>
     <p:spTree>
